--- a/doc-mk/slides/dp3-pipe-filter-vs-repository-structure.pptx
+++ b/doc-mk/slides/dp3-pipe-filter-vs-repository-structure.pptx
@@ -11,6 +11,7 @@
     <p:sldId id="256" r:id="rId7"/>
     <p:sldId id="257" r:id="rId8"/>
     <p:sldId id="258" r:id="rId9"/>
+    <p:sldId id="259" r:id="rId10"/>
   </p:sldIdLst>
   <p:sldSz cx="12192000" cy="6858000"/>
   <p:notesSz cx="6858000" cy="9144000"/>
@@ -591,22 +592,17 @@
           <a:lstStyle/>
           <a:p>
             <a:r>
-              <a:t>핵심: 두 안은 같은 4개 모듈(Attention Manager, KV Sampler, Recompute Token Selector, Selective Recomputer)을 쓰고, 결합 방식과 결정 시점만 다르다.</a:t>
-            </a:r>
-          </a:p>
-          <a:p>
-            <a:r>
-              <a:t>근거: 1안은 Pipe로 연결된 무상태 Filter가 서빙 경로에서 실행되어 파생 상태가 없다. 2안은 사전 분석 결과(재계산 위치)를 공유 Repository에 쓰고 서빙 경로가 읽는다.</a:t>
-            </a:r>
-          </a:p>
-          <a:p>
-            <a:r>
-              <a:t>의미: 1안은 정확도와 정합성을, 2안은 TTFT를 얻는 대신 파생 상태의 정합성(version/validity)과 메모리를 비용으로 지불한다. 수치는 평가 전 [가설]이다.</a:t>
-            </a:r>
-          </a:p>
-          <a:p>
-            <a:r>
-              <a:t>version/validity는 원본 구조도에 없는 제안 요소다.</a:t>
+              <a:t>핵심: 색으로 구분했다. 회색은 두 안이 공유하는 모듈·연결, 파랑은 1안 고유(Pipe), 주황은 2안 고유(사전 분석, Repository write/read)다.</a:t>
+            </a:r>
+          </a:p>
+          <a:p>
+            <a:r>
+              <a:t>근거: 모듈과 처리 순서는 같고, 2안은 같은 체인을 사전/서빙 두 시점으로 끊어 그 사이에 영속 저장소를 둔다.</a:t>
+            </a:r>
+          </a:p>
+          <a:p>
+            <a:r>
+              <a:t>의미: 차이는 흐름 순서가 아니라 connector(Pipe vs 공유 Repository)와 결정 시점이다. version · validity는 원본에 없는 제안 요소다.</a:t>
             </a:r>
           </a:p>
         </p:txBody>
@@ -632,6 +628,86 @@
 </file>
 
 <file path=ppt/notesSlides/notesSlide3.xml><?xml version="1.0" encoding="utf-8"?>
+<p:notes xmlns:a="http://schemas.openxmlformats.org/drawingml/2006/main" xmlns:p="http://schemas.openxmlformats.org/presentationml/2006/main" xmlns:r="http://schemas.openxmlformats.org/officeDocument/2006/relationships">
+  <p:cSld>
+    <p:spTree>
+      <p:nvGrpSpPr>
+        <p:cNvPr id="1" name=""/>
+        <p:cNvGrpSpPr/>
+        <p:nvPr/>
+      </p:nvGrpSpPr>
+      <p:grpSpPr>
+        <a:xfrm>
+          <a:off x="0" y="0"/>
+          <a:ext cx="0" cy="0"/>
+          <a:chOff x="0" y="0"/>
+          <a:chExt cx="0" cy="0"/>
+        </a:xfrm>
+      </p:grpSpPr>
+      <p:sp>
+        <p:nvSpPr>
+          <p:cNvPr id="2" name="Slide Image Placeholder 1"/>
+          <p:cNvSpPr>
+            <a:spLocks noGrp="1"/>
+          </p:cNvSpPr>
+          <p:nvPr>
+            <p:ph type="sldImg" idx="2"/>
+          </p:nvPr>
+        </p:nvSpPr>
+        <p:spPr/>
+      </p:sp>
+      <p:sp>
+        <p:nvSpPr>
+          <p:cNvPr id="3" name="Notes Placeholder 2"/>
+          <p:cNvSpPr>
+            <a:spLocks noGrp="1"/>
+          </p:cNvSpPr>
+          <p:nvPr>
+            <p:ph type="body" idx="3" sz="quarter"/>
+          </p:nvPr>
+        </p:nvSpPr>
+        <p:spPr/>
+        <p:txBody>
+          <a:bodyPr/>
+          <a:lstStyle/>
+          <a:p>
+            <a:r>
+              <a:t>핵심: 처리 순서는 같지만 Pipe는 요청 범위에서 소멸하고 Repository는 영속이라 생산 1회 · 소비 N회와 서빙 경로 분리가 가능하다.</a:t>
+            </a:r>
+          </a:p>
+          <a:p>
+            <a:r>
+              <a:t>근거: 1안은 요청마다 분석 3단계를 반복하고, 2안은 사전에 1회 수행해 서빙에는 Selective Recomputer만 남는다.</a:t>
+            </a:r>
+          </a:p>
+          <a:p>
+            <a:r>
+              <a:t>의미: 반대로 1안은 실제 Query 반영과 파생 상태 없음이 장점이다. ④의 새 소비자 추가는 제안이며 검증되지 않았다.</a:t>
+            </a:r>
+          </a:p>
+        </p:txBody>
+      </p:sp>
+      <p:sp>
+        <p:nvSpPr>
+          <p:cNvPr id="4" name="Slide Number Placeholder 3"/>
+          <p:cNvSpPr>
+            <a:spLocks noGrp="1"/>
+          </p:cNvSpPr>
+          <p:nvPr>
+            <p:ph type="sldNum" idx="5" sz="quarter"/>
+          </p:nvPr>
+        </p:nvSpPr>
+        <p:spPr/>
+      </p:sp>
+    </p:spTree>
+  </p:cSld>
+  <p:clrMapOvr>
+    <a:masterClrMapping/>
+  </p:clrMapOvr>
+</p:notes>
+</file>
+
+<file path=ppt/notesSlides/notesSlide4.xml><?xml version="1.0" encoding="utf-8"?>
 <p:notes xmlns:a="http://schemas.openxmlformats.org/drawingml/2006/main" xmlns:p="http://schemas.openxmlformats.org/presentationml/2006/main" xmlns:r="http://schemas.openxmlformats.org/officeDocument/2006/relationships">
   <p:cSld>
     <p:spTree>
@@ -1541,7 +1617,7 @@
                   </a:schemeClr>
                 </a:solidFill>
               </a:rPr>
-              <a:t>/ 3</a:t>
+              <a:t>/ 4</a:t>
             </a:r>
             <a:endParaRPr lang="ko-KR" altLang="en-US" sz="1200" dirty="0">
               <a:solidFill>
@@ -6636,80 +6712,8 @@
         </p:nvSpPr>
         <p:spPr>
           <a:xfrm>
-            <a:off x="246888" y="1097280"/>
-            <a:ext cx="5760720" cy="329184"/>
-          </a:xfrm>
-          <a:prstGeom prst="rect">
-            <a:avLst/>
-          </a:prstGeom>
-          <a:solidFill>
-            <a:srgbClr val="F2F2F2"/>
-          </a:solidFill>
-          <a:ln w="10160">
-            <a:solidFill>
-              <a:srgbClr val="7F7F7F"/>
-            </a:solidFill>
-          </a:ln>
-          <a:effectLst/>
-        </p:spPr>
-        <p:style>
-          <a:lnRef idx="1">
-            <a:schemeClr val="accent1"/>
-          </a:lnRef>
-          <a:fillRef idx="3">
-            <a:schemeClr val="accent1"/>
-          </a:fillRef>
-          <a:effectRef idx="2">
-            <a:schemeClr val="accent1"/>
-          </a:effectRef>
-          <a:fontRef idx="minor">
-            <a:schemeClr val="lt1"/>
-          </a:fontRef>
-        </p:style>
-        <p:txBody>
-          <a:bodyPr rtlCol="0" anchor="ctr" wrap="square" lIns="45720" rIns="45720" tIns="27432" bIns="27432"/>
-          <a:lstStyle/>
-          <a:p>
-            <a:pPr algn="ctr">
-              <a:spcAft>
-                <a:spcPts val="200"/>
-              </a:spcAft>
-            </a:pPr>
-            <a:r>
-              <a:rPr sz="1100" b="1">
-                <a:solidFill>
-                  <a:srgbClr val="000000"/>
-                </a:solidFill>
-                <a:latin typeface="맑은 고딕"/>
-                <a:ea typeface="맑은 고딕"/>
-                <a:cs typeface="맑은 고딕"/>
-              </a:rPr>
-              <a:t>(1안) Query Aware 재사용 (Online) </a:t>
-            </a:r>
-            <a:r>
-              <a:rPr sz="1100" b="1">
-                <a:solidFill>
-                  <a:srgbClr val="FF0000"/>
-                </a:solidFill>
-                <a:latin typeface="맑은 고딕"/>
-                <a:ea typeface="맑은 고딕"/>
-                <a:cs typeface="맑은 고딕"/>
-              </a:rPr>
-              <a:t>Pipe-and-Filter</a:t>
-            </a:r>
-          </a:p>
-        </p:txBody>
-      </p:sp>
-      <p:sp>
-        <p:nvSpPr>
-          <p:cNvPr id="18" name="Rectangle 17"/>
-          <p:cNvSpPr/>
-          <p:nvPr/>
-        </p:nvSpPr>
-        <p:spPr>
-          <a:xfrm>
-            <a:off x="384048" y="1572768"/>
-            <a:ext cx="1554480" cy="502920"/>
+            <a:off x="246888" y="1033271"/>
+            <a:ext cx="1280160" cy="201168"/>
           </a:xfrm>
           <a:prstGeom prst="rect">
             <a:avLst/>
@@ -6739,12 +6743,459 @@
           </a:fontRef>
         </p:style>
         <p:txBody>
-          <a:bodyPr rtlCol="0" anchor="ctr" wrap="square" lIns="45720" rIns="45720" tIns="27432" bIns="27432"/>
+          <a:bodyPr rtlCol="0" anchor="ctr" wrap="square" lIns="18288" rIns="18288" tIns="27432" bIns="27432"/>
           <a:lstStyle/>
           <a:p>
             <a:pPr algn="ctr">
               <a:spcAft>
                 <a:spcPts val="200"/>
+              </a:spcAft>
+            </a:pPr>
+            <a:r>
+              <a:rPr sz="800" b="1">
+                <a:solidFill>
+                  <a:srgbClr val="000000"/>
+                </a:solidFill>
+                <a:latin typeface="맑은 고딕"/>
+                <a:ea typeface="맑은 고딕"/>
+                <a:cs typeface="맑은 고딕"/>
+              </a:rPr>
+              <a:t>공통 모듈 · 연결</a:t>
+            </a:r>
+          </a:p>
+        </p:txBody>
+      </p:sp>
+      <p:sp>
+        <p:nvSpPr>
+          <p:cNvPr id="18" name="Rectangle 17"/>
+          <p:cNvSpPr/>
+          <p:nvPr/>
+        </p:nvSpPr>
+        <p:spPr>
+          <a:xfrm>
+            <a:off x="1618488" y="1033271"/>
+            <a:ext cx="1280160" cy="201168"/>
+          </a:xfrm>
+          <a:prstGeom prst="rect">
+            <a:avLst/>
+          </a:prstGeom>
+          <a:solidFill>
+            <a:srgbClr val="DEEBF7"/>
+          </a:solidFill>
+          <a:ln w="10160">
+            <a:solidFill>
+              <a:srgbClr val="2E75B6"/>
+            </a:solidFill>
+          </a:ln>
+          <a:effectLst/>
+        </p:spPr>
+        <p:style>
+          <a:lnRef idx="1">
+            <a:schemeClr val="accent1"/>
+          </a:lnRef>
+          <a:fillRef idx="3">
+            <a:schemeClr val="accent1"/>
+          </a:fillRef>
+          <a:effectRef idx="2">
+            <a:schemeClr val="accent1"/>
+          </a:effectRef>
+          <a:fontRef idx="minor">
+            <a:schemeClr val="lt1"/>
+          </a:fontRef>
+        </p:style>
+        <p:txBody>
+          <a:bodyPr rtlCol="0" anchor="ctr" wrap="square" lIns="18288" rIns="18288" tIns="27432" bIns="27432"/>
+          <a:lstStyle/>
+          <a:p>
+            <a:pPr algn="ctr">
+              <a:spcAft>
+                <a:spcPts val="200"/>
+              </a:spcAft>
+            </a:pPr>
+            <a:r>
+              <a:rPr sz="800" b="1">
+                <a:solidFill>
+                  <a:srgbClr val="000000"/>
+                </a:solidFill>
+                <a:latin typeface="맑은 고딕"/>
+                <a:ea typeface="맑은 고딕"/>
+                <a:cs typeface="맑은 고딕"/>
+              </a:rPr>
+              <a:t>1안 고유</a:t>
+            </a:r>
+          </a:p>
+        </p:txBody>
+      </p:sp>
+      <p:sp>
+        <p:nvSpPr>
+          <p:cNvPr id="19" name="Rectangle 18"/>
+          <p:cNvSpPr/>
+          <p:nvPr/>
+        </p:nvSpPr>
+        <p:spPr>
+          <a:xfrm>
+            <a:off x="2990088" y="1033271"/>
+            <a:ext cx="1280160" cy="201168"/>
+          </a:xfrm>
+          <a:prstGeom prst="rect">
+            <a:avLst/>
+          </a:prstGeom>
+          <a:solidFill>
+            <a:srgbClr val="FBE5D6"/>
+          </a:solidFill>
+          <a:ln w="10160">
+            <a:solidFill>
+              <a:srgbClr val="C55A11"/>
+            </a:solidFill>
+          </a:ln>
+          <a:effectLst/>
+        </p:spPr>
+        <p:style>
+          <a:lnRef idx="1">
+            <a:schemeClr val="accent1"/>
+          </a:lnRef>
+          <a:fillRef idx="3">
+            <a:schemeClr val="accent1"/>
+          </a:fillRef>
+          <a:effectRef idx="2">
+            <a:schemeClr val="accent1"/>
+          </a:effectRef>
+          <a:fontRef idx="minor">
+            <a:schemeClr val="lt1"/>
+          </a:fontRef>
+        </p:style>
+        <p:txBody>
+          <a:bodyPr rtlCol="0" anchor="ctr" wrap="square" lIns="18288" rIns="18288" tIns="27432" bIns="27432"/>
+          <a:lstStyle/>
+          <a:p>
+            <a:pPr algn="ctr">
+              <a:spcAft>
+                <a:spcPts val="200"/>
+              </a:spcAft>
+            </a:pPr>
+            <a:r>
+              <a:rPr sz="800" b="1">
+                <a:solidFill>
+                  <a:srgbClr val="000000"/>
+                </a:solidFill>
+                <a:latin typeface="맑은 고딕"/>
+                <a:ea typeface="맑은 고딕"/>
+                <a:cs typeface="맑은 고딕"/>
+              </a:rPr>
+              <a:t>2안 고유</a:t>
+            </a:r>
+          </a:p>
+        </p:txBody>
+      </p:sp>
+      <p:sp>
+        <p:nvSpPr>
+          <p:cNvPr id="20" name="Rectangle 19"/>
+          <p:cNvSpPr/>
+          <p:nvPr/>
+        </p:nvSpPr>
+        <p:spPr>
+          <a:xfrm>
+            <a:off x="4361688" y="1033271"/>
+            <a:ext cx="1280160" cy="201168"/>
+          </a:xfrm>
+          <a:prstGeom prst="rect">
+            <a:avLst/>
+          </a:prstGeom>
+          <a:solidFill>
+            <a:srgbClr val="FFF2CC"/>
+          </a:solidFill>
+          <a:ln w="10160">
+            <a:solidFill>
+              <a:srgbClr val="BF9000"/>
+            </a:solidFill>
+            <a:prstDash val="dash"/>
+          </a:ln>
+          <a:effectLst/>
+        </p:spPr>
+        <p:style>
+          <a:lnRef idx="1">
+            <a:schemeClr val="accent1"/>
+          </a:lnRef>
+          <a:fillRef idx="3">
+            <a:schemeClr val="accent1"/>
+          </a:fillRef>
+          <a:effectRef idx="2">
+            <a:schemeClr val="accent1"/>
+          </a:effectRef>
+          <a:fontRef idx="minor">
+            <a:schemeClr val="lt1"/>
+          </a:fontRef>
+        </p:style>
+        <p:txBody>
+          <a:bodyPr rtlCol="0" anchor="ctr" wrap="square" lIns="18288" rIns="18288" tIns="27432" bIns="27432"/>
+          <a:lstStyle/>
+          <a:p>
+            <a:pPr algn="ctr">
+              <a:spcAft>
+                <a:spcPts val="200"/>
+              </a:spcAft>
+            </a:pPr>
+            <a:r>
+              <a:rPr sz="800" b="1">
+                <a:solidFill>
+                  <a:srgbClr val="000000"/>
+                </a:solidFill>
+                <a:latin typeface="맑은 고딕"/>
+                <a:ea typeface="맑은 고딕"/>
+                <a:cs typeface="맑은 고딕"/>
+              </a:rPr>
+              <a:t>제안 (신규 가정)</a:t>
+            </a:r>
+          </a:p>
+        </p:txBody>
+      </p:sp>
+      <p:sp>
+        <p:nvSpPr>
+          <p:cNvPr id="21" name="Rectangle 20"/>
+          <p:cNvSpPr/>
+          <p:nvPr/>
+        </p:nvSpPr>
+        <p:spPr>
+          <a:xfrm>
+            <a:off x="246888" y="1325880"/>
+            <a:ext cx="914400" cy="1691640"/>
+          </a:xfrm>
+          <a:prstGeom prst="rect">
+            <a:avLst/>
+          </a:prstGeom>
+          <a:solidFill>
+            <a:srgbClr val="2E75B6"/>
+          </a:solidFill>
+          <a:ln w="10160">
+            <a:solidFill>
+              <a:srgbClr val="2E75B6"/>
+            </a:solidFill>
+          </a:ln>
+          <a:effectLst/>
+        </p:spPr>
+        <p:style>
+          <a:lnRef idx="1">
+            <a:schemeClr val="accent1"/>
+          </a:lnRef>
+          <a:fillRef idx="3">
+            <a:schemeClr val="accent1"/>
+          </a:fillRef>
+          <a:effectRef idx="2">
+            <a:schemeClr val="accent1"/>
+          </a:effectRef>
+          <a:fontRef idx="minor">
+            <a:schemeClr val="lt1"/>
+          </a:fontRef>
+        </p:style>
+        <p:txBody>
+          <a:bodyPr rtlCol="0" anchor="ctr" wrap="square" lIns="18288" rIns="18288" tIns="27432" bIns="27432"/>
+          <a:lstStyle/>
+          <a:p>
+            <a:pPr algn="ctr">
+              <a:spcAft>
+                <a:spcPts val="200"/>
+              </a:spcAft>
+            </a:pPr>
+            <a:r>
+              <a:rPr sz="1200" b="1">
+                <a:solidFill>
+                  <a:srgbClr val="FFFFFF"/>
+                </a:solidFill>
+                <a:latin typeface="맑은 고딕"/>
+                <a:ea typeface="맑은 고딕"/>
+                <a:cs typeface="맑은 고딕"/>
+              </a:rPr>
+              <a:t>1안</a:t>
+            </a:r>
+          </a:p>
+          <a:p>
+            <a:pPr algn="ctr">
+              <a:spcAft>
+                <a:spcPts val="200"/>
+              </a:spcAft>
+            </a:pPr>
+            <a:r>
+              <a:rPr sz="800" b="1">
+                <a:solidFill>
+                  <a:srgbClr val="FFFFFF"/>
+                </a:solidFill>
+                <a:latin typeface="맑은 고딕"/>
+                <a:ea typeface="맑은 고딕"/>
+                <a:cs typeface="맑은 고딕"/>
+              </a:rPr>
+              <a:t>Query Aware</a:t>
+            </a:r>
+          </a:p>
+          <a:p>
+            <a:pPr algn="ctr">
+              <a:spcAft>
+                <a:spcPts val="200"/>
+              </a:spcAft>
+            </a:pPr>
+            <a:r>
+              <a:rPr sz="800" b="1">
+                <a:solidFill>
+                  <a:srgbClr val="FFFFFF"/>
+                </a:solidFill>
+                <a:latin typeface="맑은 고딕"/>
+                <a:ea typeface="맑은 고딕"/>
+                <a:cs typeface="맑은 고딕"/>
+              </a:rPr>
+              <a:t>(Online)</a:t>
+            </a:r>
+          </a:p>
+          <a:p>
+            <a:pPr algn="ctr">
+              <a:spcAft>
+                <a:spcPts val="200"/>
+              </a:spcAft>
+            </a:pPr>
+            <a:r>
+              <a:rPr sz="800" b="1">
+                <a:solidFill>
+                  <a:srgbClr val="FFFFFF"/>
+                </a:solidFill>
+                <a:latin typeface="맑은 고딕"/>
+                <a:ea typeface="맑은 고딕"/>
+                <a:cs typeface="맑은 고딕"/>
+              </a:rPr>
+              <a:t>Pipe-and-Filter</a:t>
+            </a:r>
+          </a:p>
+        </p:txBody>
+      </p:sp>
+      <p:sp>
+        <p:nvSpPr>
+          <p:cNvPr id="22" name="Rectangle 21"/>
+          <p:cNvSpPr/>
+          <p:nvPr/>
+        </p:nvSpPr>
+        <p:spPr>
+          <a:xfrm>
+            <a:off x="1234440" y="1325880"/>
+            <a:ext cx="10104120" cy="1097280"/>
+          </a:xfrm>
+          <a:prstGeom prst="rect">
+            <a:avLst/>
+          </a:prstGeom>
+          <a:solidFill>
+            <a:srgbClr val="EEF5FB"/>
+          </a:solidFill>
+          <a:ln w="19050">
+            <a:solidFill>
+              <a:srgbClr val="2E75B6"/>
+            </a:solidFill>
+          </a:ln>
+          <a:effectLst/>
+        </p:spPr>
+        <p:style>
+          <a:lnRef idx="1">
+            <a:schemeClr val="accent1"/>
+          </a:lnRef>
+          <a:fillRef idx="3">
+            <a:schemeClr val="accent1"/>
+          </a:fillRef>
+          <a:effectRef idx="2">
+            <a:schemeClr val="accent1"/>
+          </a:effectRef>
+          <a:fontRef idx="minor">
+            <a:schemeClr val="lt1"/>
+          </a:fontRef>
+        </p:style>
+        <p:txBody>
+          <a:bodyPr rtlCol="0" anchor="ctr"/>
+          <a:lstStyle/>
+          <a:p>
+            <a:pPr algn="ctr"/>
+          </a:p>
+        </p:txBody>
+      </p:sp>
+      <p:sp>
+        <p:nvSpPr>
+          <p:cNvPr id="23" name="TextBox 22"/>
+          <p:cNvSpPr txBox="1"/>
+          <p:nvPr/>
+        </p:nvSpPr>
+        <p:spPr>
+          <a:xfrm>
+            <a:off x="1280160" y="1335024"/>
+            <a:ext cx="7315200" cy="201168"/>
+          </a:xfrm>
+          <a:prstGeom prst="rect">
+            <a:avLst/>
+          </a:prstGeom>
+          <a:noFill/>
+        </p:spPr>
+        <p:txBody>
+          <a:bodyPr wrap="square" anchor="t" lIns="45720" rIns="45720" tIns="27432" bIns="27432">
+            <a:spAutoFit/>
+          </a:bodyPr>
+          <a:lstStyle/>
+          <a:p>
+            <a:pPr algn="l">
+              <a:spcAft>
+                <a:spcPts val="200"/>
+              </a:spcAft>
+            </a:pPr>
+            <a:r>
+              <a:rPr sz="800" b="1">
+                <a:solidFill>
+                  <a:srgbClr val="2E75B6"/>
+                </a:solidFill>
+                <a:latin typeface="맑은 고딕"/>
+                <a:ea typeface="맑은 고딕"/>
+                <a:cs typeface="맑은 고딕"/>
+              </a:rPr>
+              <a:t>서빙 경로 (요청마다 실행, 동기) — Pipe : 요청 범위에서만 존재</a:t>
+            </a:r>
+          </a:p>
+        </p:txBody>
+      </p:sp>
+      <p:sp>
+        <p:nvSpPr>
+          <p:cNvPr id="24" name="Rectangle 23"/>
+          <p:cNvSpPr/>
+          <p:nvPr/>
+        </p:nvSpPr>
+        <p:spPr>
+          <a:xfrm>
+            <a:off x="1325880" y="1691640"/>
+            <a:ext cx="1188720" cy="548640"/>
+          </a:xfrm>
+          <a:prstGeom prst="rect">
+            <a:avLst/>
+          </a:prstGeom>
+          <a:solidFill>
+            <a:srgbClr val="F0F1F3"/>
+          </a:solidFill>
+          <a:ln w="15240">
+            <a:solidFill>
+              <a:srgbClr val="7F7F7F"/>
+            </a:solidFill>
+          </a:ln>
+          <a:effectLst/>
+        </p:spPr>
+        <p:style>
+          <a:lnRef idx="1">
+            <a:schemeClr val="accent1"/>
+          </a:lnRef>
+          <a:fillRef idx="3">
+            <a:schemeClr val="accent1"/>
+          </a:fillRef>
+          <a:effectRef idx="2">
+            <a:schemeClr val="accent1"/>
+          </a:effectRef>
+          <a:fontRef idx="minor">
+            <a:schemeClr val="lt1"/>
+          </a:fontRef>
+        </p:style>
+        <p:txBody>
+          <a:bodyPr rtlCol="0" anchor="ctr" wrap="square" lIns="27432" rIns="27432" tIns="27432" bIns="27432"/>
+          <a:lstStyle/>
+          <a:p>
+            <a:pPr algn="ctr">
+              <a:spcAft>
+                <a:spcPts val="0"/>
               </a:spcAft>
             </a:pPr>
             <a:r>
@@ -6762,11 +7213,11 @@
           <a:p>
             <a:pPr algn="ctr">
               <a:spcAft>
-                <a:spcPts val="200"/>
+                <a:spcPts val="0"/>
               </a:spcAft>
             </a:pPr>
             <a:r>
-              <a:rPr sz="750" b="1">
+              <a:rPr sz="700" b="1">
                 <a:solidFill>
                   <a:srgbClr val="000000"/>
                 </a:solidFill>
@@ -6774,31 +7225,31 @@
                 <a:ea typeface="맑은 고딕"/>
                 <a:cs typeface="맑은 고딕"/>
               </a:rPr>
-              <a:t>실제 Query (요청 시점)</a:t>
-            </a:r>
-          </a:p>
-        </p:txBody>
-      </p:sp>
-      <p:sp>
-        <p:nvSpPr>
-          <p:cNvPr id="19" name="Rectangle 18"/>
+              <a:t>실제 Query</a:t>
+            </a:r>
+          </a:p>
+        </p:txBody>
+      </p:sp>
+      <p:sp>
+        <p:nvSpPr>
+          <p:cNvPr id="25" name="Rectangle 24"/>
           <p:cNvSpPr/>
           <p:nvPr/>
         </p:nvSpPr>
         <p:spPr>
           <a:xfrm>
-            <a:off x="2834640" y="1572768"/>
-            <a:ext cx="3017520" cy="502920"/>
+            <a:off x="3063239" y="1691640"/>
+            <a:ext cx="1188720" cy="548640"/>
           </a:xfrm>
           <a:prstGeom prst="rect">
             <a:avLst/>
           </a:prstGeom>
           <a:solidFill>
-            <a:srgbClr val="E2F0D9"/>
+            <a:srgbClr val="F0F1F3"/>
           </a:solidFill>
-          <a:ln w="10160">
+          <a:ln w="15240">
             <a:solidFill>
-              <a:srgbClr val="548235"/>
+              <a:srgbClr val="7F7F7F"/>
             </a:solidFill>
           </a:ln>
           <a:effectLst/>
@@ -6818,12 +7269,12 @@
           </a:fontRef>
         </p:style>
         <p:txBody>
-          <a:bodyPr rtlCol="0" anchor="ctr" wrap="square" lIns="45720" rIns="45720" tIns="27432" bIns="27432"/>
+          <a:bodyPr rtlCol="0" anchor="ctr" wrap="square" lIns="27432" rIns="27432" tIns="27432" bIns="27432"/>
           <a:lstStyle/>
           <a:p>
             <a:pPr algn="ctr">
               <a:spcAft>
-                <a:spcPts val="200"/>
+                <a:spcPts val="0"/>
               </a:spcAft>
             </a:pPr>
             <a:r>
@@ -6835,17 +7286,17 @@
                 <a:ea typeface="맑은 고딕"/>
                 <a:cs typeface="맑은 고딕"/>
               </a:rPr>
-              <a:t>KV Store</a:t>
+              <a:t>Attention Manager</a:t>
             </a:r>
           </a:p>
           <a:p>
             <a:pPr algn="ctr">
               <a:spcAft>
-                <a:spcPts val="200"/>
+                <a:spcPts val="0"/>
               </a:spcAft>
             </a:pPr>
             <a:r>
-              <a:rPr sz="750" b="1">
+              <a:rPr sz="700" b="1">
                 <a:solidFill>
                   <a:srgbClr val="000000"/>
                 </a:solidFill>
@@ -6853,20 +7304,336 @@
                 <a:ea typeface="맑은 고딕"/>
                 <a:cs typeface="맑은 고딕"/>
               </a:rPr>
-              <a:t>Context KV 1 · 2  (read-only)</a:t>
-            </a:r>
-          </a:p>
-        </p:txBody>
-      </p:sp>
-      <p:sp>
-        <p:nvSpPr>
-          <p:cNvPr id="20" name="Rectangle 19"/>
+              <a:t>Query × KV Attention</a:t>
+            </a:r>
+          </a:p>
+        </p:txBody>
+      </p:sp>
+      <p:sp>
+        <p:nvSpPr>
+          <p:cNvPr id="26" name="Rectangle 25"/>
           <p:cNvSpPr/>
           <p:nvPr/>
         </p:nvSpPr>
         <p:spPr>
           <a:xfrm>
-            <a:off x="5440680" y="1481328"/>
+            <a:off x="4800600" y="1691640"/>
+            <a:ext cx="1188720" cy="548640"/>
+          </a:xfrm>
+          <a:prstGeom prst="rect">
+            <a:avLst/>
+          </a:prstGeom>
+          <a:solidFill>
+            <a:srgbClr val="F0F1F3"/>
+          </a:solidFill>
+          <a:ln w="15240">
+            <a:solidFill>
+              <a:srgbClr val="7F7F7F"/>
+            </a:solidFill>
+          </a:ln>
+          <a:effectLst/>
+        </p:spPr>
+        <p:style>
+          <a:lnRef idx="1">
+            <a:schemeClr val="accent1"/>
+          </a:lnRef>
+          <a:fillRef idx="3">
+            <a:schemeClr val="accent1"/>
+          </a:fillRef>
+          <a:effectRef idx="2">
+            <a:schemeClr val="accent1"/>
+          </a:effectRef>
+          <a:fontRef idx="minor">
+            <a:schemeClr val="lt1"/>
+          </a:fontRef>
+        </p:style>
+        <p:txBody>
+          <a:bodyPr rtlCol="0" anchor="ctr" wrap="square" lIns="27432" rIns="27432" tIns="27432" bIns="27432"/>
+          <a:lstStyle/>
+          <a:p>
+            <a:pPr algn="ctr">
+              <a:spcAft>
+                <a:spcPts val="0"/>
+              </a:spcAft>
+            </a:pPr>
+            <a:r>
+              <a:rPr sz="850" b="1">
+                <a:solidFill>
+                  <a:srgbClr val="000000"/>
+                </a:solidFill>
+                <a:latin typeface="맑은 고딕"/>
+                <a:ea typeface="맑은 고딕"/>
+                <a:cs typeface="맑은 고딕"/>
+              </a:rPr>
+              <a:t>KV Sampler</a:t>
+            </a:r>
+          </a:p>
+          <a:p>
+            <a:pPr algn="ctr">
+              <a:spcAft>
+                <a:spcPts val="0"/>
+              </a:spcAft>
+            </a:pPr>
+            <a:r>
+              <a:rPr sz="700" b="1">
+                <a:solidFill>
+                  <a:srgbClr val="000000"/>
+                </a:solidFill>
+                <a:latin typeface="맑은 고딕"/>
+                <a:ea typeface="맑은 고딕"/>
+                <a:cs typeface="맑은 고딕"/>
+              </a:rPr>
+              <a:t>점수로 토큰 선정</a:t>
+            </a:r>
+          </a:p>
+        </p:txBody>
+      </p:sp>
+      <p:sp>
+        <p:nvSpPr>
+          <p:cNvPr id="27" name="Rectangle 26"/>
+          <p:cNvSpPr/>
+          <p:nvPr/>
+        </p:nvSpPr>
+        <p:spPr>
+          <a:xfrm>
+            <a:off x="6537959" y="1691640"/>
+            <a:ext cx="1188720" cy="548640"/>
+          </a:xfrm>
+          <a:prstGeom prst="rect">
+            <a:avLst/>
+          </a:prstGeom>
+          <a:solidFill>
+            <a:srgbClr val="F0F1F3"/>
+          </a:solidFill>
+          <a:ln w="15240">
+            <a:solidFill>
+              <a:srgbClr val="7F7F7F"/>
+            </a:solidFill>
+          </a:ln>
+          <a:effectLst/>
+        </p:spPr>
+        <p:style>
+          <a:lnRef idx="1">
+            <a:schemeClr val="accent1"/>
+          </a:lnRef>
+          <a:fillRef idx="3">
+            <a:schemeClr val="accent1"/>
+          </a:fillRef>
+          <a:effectRef idx="2">
+            <a:schemeClr val="accent1"/>
+          </a:effectRef>
+          <a:fontRef idx="minor">
+            <a:schemeClr val="lt1"/>
+          </a:fontRef>
+        </p:style>
+        <p:txBody>
+          <a:bodyPr rtlCol="0" anchor="ctr" wrap="square" lIns="27432" rIns="27432" tIns="27432" bIns="27432"/>
+          <a:lstStyle/>
+          <a:p>
+            <a:pPr algn="ctr">
+              <a:spcAft>
+                <a:spcPts val="0"/>
+              </a:spcAft>
+            </a:pPr>
+            <a:r>
+              <a:rPr sz="850" b="1">
+                <a:solidFill>
+                  <a:srgbClr val="000000"/>
+                </a:solidFill>
+                <a:latin typeface="맑은 고딕"/>
+                <a:ea typeface="맑은 고딕"/>
+                <a:cs typeface="맑은 고딕"/>
+              </a:rPr>
+              <a:t>Recompute Token Selector</a:t>
+            </a:r>
+          </a:p>
+          <a:p>
+            <a:pPr algn="ctr">
+              <a:spcAft>
+                <a:spcPts val="0"/>
+              </a:spcAft>
+            </a:pPr>
+            <a:r>
+              <a:rPr sz="700" b="1">
+                <a:solidFill>
+                  <a:srgbClr val="000000"/>
+                </a:solidFill>
+                <a:latin typeface="맑은 고딕"/>
+                <a:ea typeface="맑은 고딕"/>
+                <a:cs typeface="맑은 고딕"/>
+              </a:rPr>
+              <a:t>재계산 토큰 선정</a:t>
+            </a:r>
+          </a:p>
+        </p:txBody>
+      </p:sp>
+      <p:sp>
+        <p:nvSpPr>
+          <p:cNvPr id="28" name="Rectangle 27"/>
+          <p:cNvSpPr/>
+          <p:nvPr/>
+        </p:nvSpPr>
+        <p:spPr>
+          <a:xfrm>
+            <a:off x="8275319" y="1691640"/>
+            <a:ext cx="1188720" cy="548640"/>
+          </a:xfrm>
+          <a:prstGeom prst="rect">
+            <a:avLst/>
+          </a:prstGeom>
+          <a:solidFill>
+            <a:srgbClr val="F0F1F3"/>
+          </a:solidFill>
+          <a:ln w="15240">
+            <a:solidFill>
+              <a:srgbClr val="7F7F7F"/>
+            </a:solidFill>
+          </a:ln>
+          <a:effectLst/>
+        </p:spPr>
+        <p:style>
+          <a:lnRef idx="1">
+            <a:schemeClr val="accent1"/>
+          </a:lnRef>
+          <a:fillRef idx="3">
+            <a:schemeClr val="accent1"/>
+          </a:fillRef>
+          <a:effectRef idx="2">
+            <a:schemeClr val="accent1"/>
+          </a:effectRef>
+          <a:fontRef idx="minor">
+            <a:schemeClr val="lt1"/>
+          </a:fontRef>
+        </p:style>
+        <p:txBody>
+          <a:bodyPr rtlCol="0" anchor="ctr" wrap="square" lIns="27432" rIns="27432" tIns="27432" bIns="27432"/>
+          <a:lstStyle/>
+          <a:p>
+            <a:pPr algn="ctr">
+              <a:spcAft>
+                <a:spcPts val="0"/>
+              </a:spcAft>
+            </a:pPr>
+            <a:r>
+              <a:rPr sz="850" b="1">
+                <a:solidFill>
+                  <a:srgbClr val="000000"/>
+                </a:solidFill>
+                <a:latin typeface="맑은 고딕"/>
+                <a:ea typeface="맑은 고딕"/>
+                <a:cs typeface="맑은 고딕"/>
+              </a:rPr>
+              <a:t>Selective Recomputer</a:t>
+            </a:r>
+          </a:p>
+          <a:p>
+            <a:pPr algn="ctr">
+              <a:spcAft>
+                <a:spcPts val="0"/>
+              </a:spcAft>
+            </a:pPr>
+            <a:r>
+              <a:rPr sz="700" b="1">
+                <a:solidFill>
+                  <a:srgbClr val="000000"/>
+                </a:solidFill>
+                <a:latin typeface="맑은 고딕"/>
+                <a:ea typeface="맑은 고딕"/>
+                <a:cs typeface="맑은 고딕"/>
+              </a:rPr>
+              <a:t>선정 토큰만 재계산</a:t>
+            </a:r>
+          </a:p>
+        </p:txBody>
+      </p:sp>
+      <p:sp>
+        <p:nvSpPr>
+          <p:cNvPr id="29" name="Rectangle 28"/>
+          <p:cNvSpPr/>
+          <p:nvPr/>
+        </p:nvSpPr>
+        <p:spPr>
+          <a:xfrm>
+            <a:off x="10012680" y="1691640"/>
+            <a:ext cx="1188720" cy="548640"/>
+          </a:xfrm>
+          <a:prstGeom prst="rect">
+            <a:avLst/>
+          </a:prstGeom>
+          <a:solidFill>
+            <a:srgbClr val="F0F1F3"/>
+          </a:solidFill>
+          <a:ln w="15240">
+            <a:solidFill>
+              <a:srgbClr val="7F7F7F"/>
+            </a:solidFill>
+          </a:ln>
+          <a:effectLst/>
+        </p:spPr>
+        <p:style>
+          <a:lnRef idx="1">
+            <a:schemeClr val="accent1"/>
+          </a:lnRef>
+          <a:fillRef idx="3">
+            <a:schemeClr val="accent1"/>
+          </a:fillRef>
+          <a:effectRef idx="2">
+            <a:schemeClr val="accent1"/>
+          </a:effectRef>
+          <a:fontRef idx="minor">
+            <a:schemeClr val="lt1"/>
+          </a:fontRef>
+        </p:style>
+        <p:txBody>
+          <a:bodyPr rtlCol="0" anchor="ctr" wrap="square" lIns="27432" rIns="27432" tIns="27432" bIns="27432"/>
+          <a:lstStyle/>
+          <a:p>
+            <a:pPr algn="ctr">
+              <a:spcAft>
+                <a:spcPts val="0"/>
+              </a:spcAft>
+            </a:pPr>
+            <a:r>
+              <a:rPr sz="850" b="1">
+                <a:solidFill>
+                  <a:srgbClr val="000000"/>
+                </a:solidFill>
+                <a:latin typeface="맑은 고딕"/>
+                <a:ea typeface="맑은 고딕"/>
+                <a:cs typeface="맑은 고딕"/>
+              </a:rPr>
+              <a:t>Decode</a:t>
+            </a:r>
+          </a:p>
+          <a:p>
+            <a:pPr algn="ctr">
+              <a:spcAft>
+                <a:spcPts val="0"/>
+              </a:spcAft>
+            </a:pPr>
+            <a:r>
+              <a:rPr sz="700" b="1">
+                <a:solidFill>
+                  <a:srgbClr val="000000"/>
+                </a:solidFill>
+                <a:latin typeface="맑은 고딕"/>
+                <a:ea typeface="맑은 고딕"/>
+                <a:cs typeface="맑은 고딕"/>
+              </a:rPr>
+              <a:t>응답 생성</a:t>
+            </a:r>
+          </a:p>
+        </p:txBody>
+      </p:sp>
+      <p:sp>
+        <p:nvSpPr>
+          <p:cNvPr id="30" name="Rectangle 29"/>
+          <p:cNvSpPr/>
+          <p:nvPr/>
+        </p:nvSpPr>
+        <p:spPr>
+          <a:xfrm>
+            <a:off x="9098280" y="1600200"/>
             <a:ext cx="384048" cy="182880"/>
           </a:xfrm>
           <a:prstGeom prst="rect">
@@ -6914,77 +7681,416 @@
                 <a:ea typeface="맑은 고딕"/>
                 <a:cs typeface="맑은 고딕"/>
               </a:rPr>
-              <a:t>DP1</a:t>
-            </a:r>
-          </a:p>
-        </p:txBody>
-      </p:sp>
-      <p:sp>
-        <p:nvSpPr>
-          <p:cNvPr id="21" name="Rectangle 20"/>
-          <p:cNvSpPr/>
-          <p:nvPr/>
-        </p:nvSpPr>
-        <p:spPr>
-          <a:xfrm>
-            <a:off x="292608" y="2377440"/>
-            <a:ext cx="5669280" cy="2514600"/>
-          </a:xfrm>
-          <a:prstGeom prst="rect">
-            <a:avLst/>
-          </a:prstGeom>
-          <a:solidFill>
-            <a:srgbClr val="F7FAFD"/>
-          </a:solidFill>
-          <a:ln w="12700">
+              <a:t>DP2</a:t>
+            </a:r>
+          </a:p>
+        </p:txBody>
+      </p:sp>
+      <p:cxnSp>
+        <p:nvCxnSpPr>
+          <p:cNvPr id="31" name="Connector 30"/>
+          <p:cNvCxnSpPr/>
+          <p:nvPr/>
+        </p:nvCxnSpPr>
+        <p:spPr>
+          <a:xfrm>
+            <a:off x="2514600" y="2057400"/>
+            <a:ext cx="548639" cy="0"/>
+          </a:xfrm>
+          <a:prstGeom prst="line">
+            <a:avLst/>
+          </a:prstGeom>
+          <a:ln w="28575">
             <a:solidFill>
               <a:srgbClr val="2E75B6"/>
             </a:solidFill>
+            <a:tailEnd type="triangle"/>
           </a:ln>
-          <a:effectLst/>
         </p:spPr>
         <p:style>
-          <a:lnRef idx="1">
+          <a:lnRef idx="2">
             <a:schemeClr val="accent1"/>
           </a:lnRef>
-          <a:fillRef idx="3">
+          <a:fillRef idx="0">
             <a:schemeClr val="accent1"/>
           </a:fillRef>
-          <a:effectRef idx="2">
+          <a:effectRef idx="1">
             <a:schemeClr val="accent1"/>
           </a:effectRef>
           <a:fontRef idx="minor">
-            <a:schemeClr val="lt1"/>
+            <a:schemeClr val="tx1"/>
           </a:fontRef>
         </p:style>
-        <p:txBody>
-          <a:bodyPr rtlCol="0" anchor="ctr"/>
-          <a:lstStyle/>
-          <a:p>
-            <a:pPr algn="ctr"/>
-          </a:p>
-        </p:txBody>
-      </p:sp>
-      <p:sp>
-        <p:nvSpPr>
-          <p:cNvPr id="22" name="Rectangle 21"/>
-          <p:cNvSpPr/>
-          <p:nvPr/>
-        </p:nvSpPr>
-        <p:spPr>
-          <a:xfrm>
-            <a:off x="411480" y="2788920"/>
-            <a:ext cx="1554480" cy="640080"/>
+      </p:cxnSp>
+      <p:sp>
+        <p:nvSpPr>
+          <p:cNvPr id="32" name="TextBox 31"/>
+          <p:cNvSpPr txBox="1"/>
+          <p:nvPr/>
+        </p:nvSpPr>
+        <p:spPr>
+          <a:xfrm>
+            <a:off x="2468880" y="1737360"/>
+            <a:ext cx="640080" cy="201168"/>
           </a:xfrm>
           <a:prstGeom prst="rect">
             <a:avLst/>
           </a:prstGeom>
-          <a:solidFill>
-            <a:srgbClr val="FFFFFF"/>
-          </a:solidFill>
-          <a:ln w="15240">
+          <a:noFill/>
+        </p:spPr>
+        <p:txBody>
+          <a:bodyPr wrap="square" anchor="t" lIns="45720" rIns="45720" tIns="27432" bIns="27432">
+            <a:spAutoFit/>
+          </a:bodyPr>
+          <a:lstStyle/>
+          <a:p>
+            <a:pPr algn="ctr">
+              <a:spcAft>
+                <a:spcPts val="200"/>
+              </a:spcAft>
+            </a:pPr>
+            <a:r>
+              <a:rPr sz="700" b="0">
+                <a:solidFill>
+                  <a:srgbClr val="2E75B6"/>
+                </a:solidFill>
+                <a:latin typeface="맑은 고딕"/>
+                <a:ea typeface="맑은 고딕"/>
+                <a:cs typeface="맑은 고딕"/>
+              </a:rPr>
+              <a:t>실제 Query</a:t>
+            </a:r>
+          </a:p>
+        </p:txBody>
+      </p:sp>
+      <p:cxnSp>
+        <p:nvCxnSpPr>
+          <p:cNvPr id="33" name="Connector 32"/>
+          <p:cNvCxnSpPr/>
+          <p:nvPr/>
+        </p:nvCxnSpPr>
+        <p:spPr>
+          <a:xfrm>
+            <a:off x="4251959" y="2057400"/>
+            <a:ext cx="548641" cy="0"/>
+          </a:xfrm>
+          <a:prstGeom prst="line">
+            <a:avLst/>
+          </a:prstGeom>
+          <a:ln w="28575">
             <a:solidFill>
               <a:srgbClr val="2E75B6"/>
+            </a:solidFill>
+            <a:tailEnd type="triangle"/>
+          </a:ln>
+        </p:spPr>
+        <p:style>
+          <a:lnRef idx="2">
+            <a:schemeClr val="accent1"/>
+          </a:lnRef>
+          <a:fillRef idx="0">
+            <a:schemeClr val="accent1"/>
+          </a:fillRef>
+          <a:effectRef idx="1">
+            <a:schemeClr val="accent1"/>
+          </a:effectRef>
+          <a:fontRef idx="minor">
+            <a:schemeClr val="tx1"/>
+          </a:fontRef>
+        </p:style>
+      </p:cxnSp>
+      <p:sp>
+        <p:nvSpPr>
+          <p:cNvPr id="34" name="TextBox 33"/>
+          <p:cNvSpPr txBox="1"/>
+          <p:nvPr/>
+        </p:nvSpPr>
+        <p:spPr>
+          <a:xfrm>
+            <a:off x="4206240" y="1737360"/>
+            <a:ext cx="640080" cy="201168"/>
+          </a:xfrm>
+          <a:prstGeom prst="rect">
+            <a:avLst/>
+          </a:prstGeom>
+          <a:noFill/>
+        </p:spPr>
+        <p:txBody>
+          <a:bodyPr wrap="square" anchor="t" lIns="45720" rIns="45720" tIns="27432" bIns="27432">
+            <a:spAutoFit/>
+          </a:bodyPr>
+          <a:lstStyle/>
+          <a:p>
+            <a:pPr algn="ctr">
+              <a:spcAft>
+                <a:spcPts val="200"/>
+              </a:spcAft>
+            </a:pPr>
+            <a:r>
+              <a:rPr sz="700" b="0">
+                <a:solidFill>
+                  <a:srgbClr val="2E75B6"/>
+                </a:solidFill>
+                <a:latin typeface="맑은 고딕"/>
+                <a:ea typeface="맑은 고딕"/>
+                <a:cs typeface="맑은 고딕"/>
+              </a:rPr>
+              <a:t>attention score</a:t>
+            </a:r>
+          </a:p>
+        </p:txBody>
+      </p:sp>
+      <p:cxnSp>
+        <p:nvCxnSpPr>
+          <p:cNvPr id="35" name="Connector 34"/>
+          <p:cNvCxnSpPr/>
+          <p:nvPr/>
+        </p:nvCxnSpPr>
+        <p:spPr>
+          <a:xfrm>
+            <a:off x="5989320" y="2057400"/>
+            <a:ext cx="548639" cy="0"/>
+          </a:xfrm>
+          <a:prstGeom prst="line">
+            <a:avLst/>
+          </a:prstGeom>
+          <a:ln w="28575">
+            <a:solidFill>
+              <a:srgbClr val="2E75B6"/>
+            </a:solidFill>
+            <a:tailEnd type="triangle"/>
+          </a:ln>
+        </p:spPr>
+        <p:style>
+          <a:lnRef idx="2">
+            <a:schemeClr val="accent1"/>
+          </a:lnRef>
+          <a:fillRef idx="0">
+            <a:schemeClr val="accent1"/>
+          </a:fillRef>
+          <a:effectRef idx="1">
+            <a:schemeClr val="accent1"/>
+          </a:effectRef>
+          <a:fontRef idx="minor">
+            <a:schemeClr val="tx1"/>
+          </a:fontRef>
+        </p:style>
+      </p:cxnSp>
+      <p:sp>
+        <p:nvSpPr>
+          <p:cNvPr id="36" name="TextBox 35"/>
+          <p:cNvSpPr txBox="1"/>
+          <p:nvPr/>
+        </p:nvSpPr>
+        <p:spPr>
+          <a:xfrm>
+            <a:off x="5943600" y="1737360"/>
+            <a:ext cx="640080" cy="201168"/>
+          </a:xfrm>
+          <a:prstGeom prst="rect">
+            <a:avLst/>
+          </a:prstGeom>
+          <a:noFill/>
+        </p:spPr>
+        <p:txBody>
+          <a:bodyPr wrap="square" anchor="t" lIns="45720" rIns="45720" tIns="27432" bIns="27432">
+            <a:spAutoFit/>
+          </a:bodyPr>
+          <a:lstStyle/>
+          <a:p>
+            <a:pPr algn="ctr">
+              <a:spcAft>
+                <a:spcPts val="200"/>
+              </a:spcAft>
+            </a:pPr>
+            <a:r>
+              <a:rPr sz="700" b="0">
+                <a:solidFill>
+                  <a:srgbClr val="2E75B6"/>
+                </a:solidFill>
+                <a:latin typeface="맑은 고딕"/>
+                <a:ea typeface="맑은 고딕"/>
+                <a:cs typeface="맑은 고딕"/>
+              </a:rPr>
+              <a:t>후보 순위</a:t>
+            </a:r>
+          </a:p>
+        </p:txBody>
+      </p:sp>
+      <p:cxnSp>
+        <p:nvCxnSpPr>
+          <p:cNvPr id="37" name="Connector 36"/>
+          <p:cNvCxnSpPr/>
+          <p:nvPr/>
+        </p:nvCxnSpPr>
+        <p:spPr>
+          <a:xfrm>
+            <a:off x="7726679" y="2057400"/>
+            <a:ext cx="548640" cy="0"/>
+          </a:xfrm>
+          <a:prstGeom prst="line">
+            <a:avLst/>
+          </a:prstGeom>
+          <a:ln w="28575">
+            <a:solidFill>
+              <a:srgbClr val="2E75B6"/>
+            </a:solidFill>
+            <a:tailEnd type="triangle"/>
+          </a:ln>
+        </p:spPr>
+        <p:style>
+          <a:lnRef idx="2">
+            <a:schemeClr val="accent1"/>
+          </a:lnRef>
+          <a:fillRef idx="0">
+            <a:schemeClr val="accent1"/>
+          </a:fillRef>
+          <a:effectRef idx="1">
+            <a:schemeClr val="accent1"/>
+          </a:effectRef>
+          <a:fontRef idx="minor">
+            <a:schemeClr val="tx1"/>
+          </a:fontRef>
+        </p:style>
+      </p:cxnSp>
+      <p:sp>
+        <p:nvSpPr>
+          <p:cNvPr id="38" name="TextBox 37"/>
+          <p:cNvSpPr txBox="1"/>
+          <p:nvPr/>
+        </p:nvSpPr>
+        <p:spPr>
+          <a:xfrm>
+            <a:off x="7680959" y="1737360"/>
+            <a:ext cx="640080" cy="201168"/>
+          </a:xfrm>
+          <a:prstGeom prst="rect">
+            <a:avLst/>
+          </a:prstGeom>
+          <a:noFill/>
+        </p:spPr>
+        <p:txBody>
+          <a:bodyPr wrap="square" anchor="t" lIns="45720" rIns="45720" tIns="27432" bIns="27432">
+            <a:spAutoFit/>
+          </a:bodyPr>
+          <a:lstStyle/>
+          <a:p>
+            <a:pPr algn="ctr">
+              <a:spcAft>
+                <a:spcPts val="200"/>
+              </a:spcAft>
+            </a:pPr>
+            <a:r>
+              <a:rPr sz="700" b="0">
+                <a:solidFill>
+                  <a:srgbClr val="2E75B6"/>
+                </a:solidFill>
+                <a:latin typeface="맑은 고딕"/>
+                <a:ea typeface="맑은 고딕"/>
+                <a:cs typeface="맑은 고딕"/>
+              </a:rPr>
+              <a:t>재계산 토큰 집합</a:t>
+            </a:r>
+          </a:p>
+        </p:txBody>
+      </p:sp>
+      <p:cxnSp>
+        <p:nvCxnSpPr>
+          <p:cNvPr id="39" name="Connector 38"/>
+          <p:cNvCxnSpPr/>
+          <p:nvPr/>
+        </p:nvCxnSpPr>
+        <p:spPr>
+          <a:xfrm>
+            <a:off x="9464040" y="2057400"/>
+            <a:ext cx="548640" cy="0"/>
+          </a:xfrm>
+          <a:prstGeom prst="line">
+            <a:avLst/>
+          </a:prstGeom>
+          <a:ln w="28575">
+            <a:solidFill>
+              <a:srgbClr val="2E75B6"/>
+            </a:solidFill>
+            <a:tailEnd type="triangle"/>
+          </a:ln>
+        </p:spPr>
+        <p:style>
+          <a:lnRef idx="2">
+            <a:schemeClr val="accent1"/>
+          </a:lnRef>
+          <a:fillRef idx="0">
+            <a:schemeClr val="accent1"/>
+          </a:fillRef>
+          <a:effectRef idx="1">
+            <a:schemeClr val="accent1"/>
+          </a:effectRef>
+          <a:fontRef idx="minor">
+            <a:schemeClr val="tx1"/>
+          </a:fontRef>
+        </p:style>
+      </p:cxnSp>
+      <p:sp>
+        <p:nvSpPr>
+          <p:cNvPr id="40" name="TextBox 39"/>
+          <p:cNvSpPr txBox="1"/>
+          <p:nvPr/>
+        </p:nvSpPr>
+        <p:spPr>
+          <a:xfrm>
+            <a:off x="9418319" y="1737360"/>
+            <a:ext cx="640080" cy="201168"/>
+          </a:xfrm>
+          <a:prstGeom prst="rect">
+            <a:avLst/>
+          </a:prstGeom>
+          <a:noFill/>
+        </p:spPr>
+        <p:txBody>
+          <a:bodyPr wrap="square" anchor="t" lIns="45720" rIns="45720" tIns="27432" bIns="27432">
+            <a:spAutoFit/>
+          </a:bodyPr>
+          <a:lstStyle/>
+          <a:p>
+            <a:pPr algn="ctr">
+              <a:spcAft>
+                <a:spcPts val="200"/>
+              </a:spcAft>
+            </a:pPr>
+            <a:r>
+              <a:rPr sz="700" b="0">
+                <a:solidFill>
+                  <a:srgbClr val="2E75B6"/>
+                </a:solidFill>
+                <a:latin typeface="맑은 고딕"/>
+                <a:ea typeface="맑은 고딕"/>
+                <a:cs typeface="맑은 고딕"/>
+              </a:rPr>
+              <a:t>Blended KV</a:t>
+            </a:r>
+          </a:p>
+        </p:txBody>
+      </p:sp>
+      <p:sp>
+        <p:nvSpPr>
+          <p:cNvPr id="41" name="Rectangle 40"/>
+          <p:cNvSpPr/>
+          <p:nvPr/>
+        </p:nvSpPr>
+        <p:spPr>
+          <a:xfrm>
+            <a:off x="3063240" y="2697480"/>
+            <a:ext cx="6400800" cy="274320"/>
+          </a:xfrm>
+          <a:prstGeom prst="rect">
+            <a:avLst/>
+          </a:prstGeom>
+          <a:solidFill>
+            <a:srgbClr val="F0F1F3"/>
+          </a:solidFill>
+          <a:ln w="10160">
+            <a:solidFill>
+              <a:srgbClr val="7F7F7F"/>
             </a:solidFill>
           </a:ln>
           <a:effectLst/>
@@ -7021,275 +8127,20 @@
                 <a:ea typeface="맑은 고딕"/>
                 <a:cs typeface="맑은 고딕"/>
               </a:rPr>
-              <a:t>Attention Manager</a:t>
-            </a:r>
-          </a:p>
-          <a:p>
-            <a:pPr algn="ctr">
-              <a:spcAft>
-                <a:spcPts val="200"/>
-              </a:spcAft>
-            </a:pPr>
-            <a:r>
-              <a:rPr sz="750" b="1">
-                <a:solidFill>
-                  <a:srgbClr val="000000"/>
-                </a:solidFill>
-                <a:latin typeface="맑은 고딕"/>
-                <a:ea typeface="맑은 고딕"/>
-                <a:cs typeface="맑은 고딕"/>
-              </a:rPr>
-              <a:t>Query × KV Attention</a:t>
-            </a:r>
-          </a:p>
-        </p:txBody>
-      </p:sp>
-      <p:sp>
-        <p:nvSpPr>
-          <p:cNvPr id="23" name="Rectangle 22"/>
+              <a:t>KV Store (DP1) — Context KV 1 · 2  (read-only)</a:t>
+            </a:r>
+          </a:p>
+        </p:txBody>
+      </p:sp>
+      <p:sp>
+        <p:nvSpPr>
+          <p:cNvPr id="42" name="Rectangle 41"/>
           <p:cNvSpPr/>
           <p:nvPr/>
         </p:nvSpPr>
         <p:spPr>
           <a:xfrm>
-            <a:off x="2331720" y="2788920"/>
-            <a:ext cx="1554480" cy="640080"/>
-          </a:xfrm>
-          <a:prstGeom prst="rect">
-            <a:avLst/>
-          </a:prstGeom>
-          <a:solidFill>
-            <a:srgbClr val="FFFFFF"/>
-          </a:solidFill>
-          <a:ln w="15240">
-            <a:solidFill>
-              <a:srgbClr val="2E75B6"/>
-            </a:solidFill>
-          </a:ln>
-          <a:effectLst/>
-        </p:spPr>
-        <p:style>
-          <a:lnRef idx="1">
-            <a:schemeClr val="accent1"/>
-          </a:lnRef>
-          <a:fillRef idx="3">
-            <a:schemeClr val="accent1"/>
-          </a:fillRef>
-          <a:effectRef idx="2">
-            <a:schemeClr val="accent1"/>
-          </a:effectRef>
-          <a:fontRef idx="minor">
-            <a:schemeClr val="lt1"/>
-          </a:fontRef>
-        </p:style>
-        <p:txBody>
-          <a:bodyPr rtlCol="0" anchor="ctr" wrap="square" lIns="45720" rIns="45720" tIns="27432" bIns="27432"/>
-          <a:lstStyle/>
-          <a:p>
-            <a:pPr algn="ctr">
-              <a:spcAft>
-                <a:spcPts val="200"/>
-              </a:spcAft>
-            </a:pPr>
-            <a:r>
-              <a:rPr sz="850" b="1">
-                <a:solidFill>
-                  <a:srgbClr val="000000"/>
-                </a:solidFill>
-                <a:latin typeface="맑은 고딕"/>
-                <a:ea typeface="맑은 고딕"/>
-                <a:cs typeface="맑은 고딕"/>
-              </a:rPr>
-              <a:t>KV Sampler</a:t>
-            </a:r>
-          </a:p>
-          <a:p>
-            <a:pPr algn="ctr">
-              <a:spcAft>
-                <a:spcPts val="200"/>
-              </a:spcAft>
-            </a:pPr>
-            <a:r>
-              <a:rPr sz="750" b="1">
-                <a:solidFill>
-                  <a:srgbClr val="000000"/>
-                </a:solidFill>
-                <a:latin typeface="맑은 고딕"/>
-                <a:ea typeface="맑은 고딕"/>
-                <a:cs typeface="맑은 고딕"/>
-              </a:rPr>
-              <a:t>점수로 토큰 선정</a:t>
-            </a:r>
-          </a:p>
-        </p:txBody>
-      </p:sp>
-      <p:sp>
-        <p:nvSpPr>
-          <p:cNvPr id="24" name="Rectangle 23"/>
-          <p:cNvSpPr/>
-          <p:nvPr/>
-        </p:nvSpPr>
-        <p:spPr>
-          <a:xfrm>
-            <a:off x="4251960" y="2788920"/>
-            <a:ext cx="1554480" cy="640080"/>
-          </a:xfrm>
-          <a:prstGeom prst="rect">
-            <a:avLst/>
-          </a:prstGeom>
-          <a:solidFill>
-            <a:srgbClr val="FFFFFF"/>
-          </a:solidFill>
-          <a:ln w="15240">
-            <a:solidFill>
-              <a:srgbClr val="2E75B6"/>
-            </a:solidFill>
-          </a:ln>
-          <a:effectLst/>
-        </p:spPr>
-        <p:style>
-          <a:lnRef idx="1">
-            <a:schemeClr val="accent1"/>
-          </a:lnRef>
-          <a:fillRef idx="3">
-            <a:schemeClr val="accent1"/>
-          </a:fillRef>
-          <a:effectRef idx="2">
-            <a:schemeClr val="accent1"/>
-          </a:effectRef>
-          <a:fontRef idx="minor">
-            <a:schemeClr val="lt1"/>
-          </a:fontRef>
-        </p:style>
-        <p:txBody>
-          <a:bodyPr rtlCol="0" anchor="ctr" wrap="square" lIns="45720" rIns="45720" tIns="27432" bIns="27432"/>
-          <a:lstStyle/>
-          <a:p>
-            <a:pPr algn="ctr">
-              <a:spcAft>
-                <a:spcPts val="200"/>
-              </a:spcAft>
-            </a:pPr>
-            <a:r>
-              <a:rPr sz="850" b="1">
-                <a:solidFill>
-                  <a:srgbClr val="000000"/>
-                </a:solidFill>
-                <a:latin typeface="맑은 고딕"/>
-                <a:ea typeface="맑은 고딕"/>
-                <a:cs typeface="맑은 고딕"/>
-              </a:rPr>
-              <a:t>Recompute Token Selector</a:t>
-            </a:r>
-          </a:p>
-          <a:p>
-            <a:pPr algn="ctr">
-              <a:spcAft>
-                <a:spcPts val="200"/>
-              </a:spcAft>
-            </a:pPr>
-            <a:r>
-              <a:rPr sz="750" b="1">
-                <a:solidFill>
-                  <a:srgbClr val="000000"/>
-                </a:solidFill>
-                <a:latin typeface="맑은 고딕"/>
-                <a:ea typeface="맑은 고딕"/>
-                <a:cs typeface="맑은 고딕"/>
-              </a:rPr>
-              <a:t>재계산 토큰 집합 결정</a:t>
-            </a:r>
-          </a:p>
-        </p:txBody>
-      </p:sp>
-      <p:sp>
-        <p:nvSpPr>
-          <p:cNvPr id="25" name="Rectangle 24"/>
-          <p:cNvSpPr/>
-          <p:nvPr/>
-        </p:nvSpPr>
-        <p:spPr>
-          <a:xfrm>
-            <a:off x="4251960" y="4023360"/>
-            <a:ext cx="1554480" cy="640080"/>
-          </a:xfrm>
-          <a:prstGeom prst="rect">
-            <a:avLst/>
-          </a:prstGeom>
-          <a:solidFill>
-            <a:srgbClr val="FFFFFF"/>
-          </a:solidFill>
-          <a:ln w="15240">
-            <a:solidFill>
-              <a:srgbClr val="2E75B6"/>
-            </a:solidFill>
-          </a:ln>
-          <a:effectLst/>
-        </p:spPr>
-        <p:style>
-          <a:lnRef idx="1">
-            <a:schemeClr val="accent1"/>
-          </a:lnRef>
-          <a:fillRef idx="3">
-            <a:schemeClr val="accent1"/>
-          </a:fillRef>
-          <a:effectRef idx="2">
-            <a:schemeClr val="accent1"/>
-          </a:effectRef>
-          <a:fontRef idx="minor">
-            <a:schemeClr val="lt1"/>
-          </a:fontRef>
-        </p:style>
-        <p:txBody>
-          <a:bodyPr rtlCol="0" anchor="ctr" wrap="square" lIns="45720" rIns="45720" tIns="27432" bIns="27432"/>
-          <a:lstStyle/>
-          <a:p>
-            <a:pPr algn="ctr">
-              <a:spcAft>
-                <a:spcPts val="200"/>
-              </a:spcAft>
-            </a:pPr>
-            <a:r>
-              <a:rPr sz="850" b="1">
-                <a:solidFill>
-                  <a:srgbClr val="000000"/>
-                </a:solidFill>
-                <a:latin typeface="맑은 고딕"/>
-                <a:ea typeface="맑은 고딕"/>
-                <a:cs typeface="맑은 고딕"/>
-              </a:rPr>
-              <a:t>Selective Recomputer</a:t>
-            </a:r>
-          </a:p>
-          <a:p>
-            <a:pPr algn="ctr">
-              <a:spcAft>
-                <a:spcPts val="200"/>
-              </a:spcAft>
-            </a:pPr>
-            <a:r>
-              <a:rPr sz="750" b="1">
-                <a:solidFill>
-                  <a:srgbClr val="000000"/>
-                </a:solidFill>
-                <a:latin typeface="맑은 고딕"/>
-                <a:ea typeface="맑은 고딕"/>
-                <a:cs typeface="맑은 고딕"/>
-              </a:rPr>
-              <a:t>선정 토큰만 재계산</a:t>
-            </a:r>
-          </a:p>
-        </p:txBody>
-      </p:sp>
-      <p:sp>
-        <p:nvSpPr>
-          <p:cNvPr id="26" name="Rectangle 25"/>
-          <p:cNvSpPr/>
-          <p:nvPr/>
-        </p:nvSpPr>
-        <p:spPr>
-          <a:xfrm>
-            <a:off x="5486400" y="3931920"/>
+            <a:off x="9144000" y="2606040"/>
             <a:ext cx="384048" cy="182880"/>
           </a:xfrm>
           <a:prstGeom prst="rect">
@@ -7337,660 +8188,11 @@
                 <a:ea typeface="맑은 고딕"/>
                 <a:cs typeface="맑은 고딕"/>
               </a:rPr>
-              <a:t>DP2</a:t>
-            </a:r>
-          </a:p>
-        </p:txBody>
-      </p:sp>
-      <p:sp>
-        <p:nvSpPr>
-          <p:cNvPr id="27" name="Rectangle 26"/>
-          <p:cNvSpPr/>
-          <p:nvPr/>
-        </p:nvSpPr>
-        <p:spPr>
-          <a:xfrm>
-            <a:off x="2331720" y="4023360"/>
-            <a:ext cx="1554480" cy="640080"/>
-          </a:xfrm>
-          <a:prstGeom prst="rect">
-            <a:avLst/>
-          </a:prstGeom>
-          <a:solidFill>
-            <a:srgbClr val="F0F1F3"/>
-          </a:solidFill>
-          <a:ln w="10160">
-            <a:solidFill>
-              <a:srgbClr val="7F7F7F"/>
-            </a:solidFill>
-          </a:ln>
-          <a:effectLst/>
-        </p:spPr>
-        <p:style>
-          <a:lnRef idx="1">
-            <a:schemeClr val="accent1"/>
-          </a:lnRef>
-          <a:fillRef idx="3">
-            <a:schemeClr val="accent1"/>
-          </a:fillRef>
-          <a:effectRef idx="2">
-            <a:schemeClr val="accent1"/>
-          </a:effectRef>
-          <a:fontRef idx="minor">
-            <a:schemeClr val="lt1"/>
-          </a:fontRef>
-        </p:style>
-        <p:txBody>
-          <a:bodyPr rtlCol="0" anchor="ctr" wrap="square" lIns="45720" rIns="45720" tIns="27432" bIns="27432"/>
-          <a:lstStyle/>
-          <a:p>
-            <a:pPr algn="ctr">
-              <a:spcAft>
-                <a:spcPts val="200"/>
-              </a:spcAft>
-            </a:pPr>
-            <a:r>
-              <a:rPr sz="850" b="1">
-                <a:solidFill>
-                  <a:srgbClr val="000000"/>
-                </a:solidFill>
-                <a:latin typeface="맑은 고딕"/>
-                <a:ea typeface="맑은 고딕"/>
-                <a:cs typeface="맑은 고딕"/>
-              </a:rPr>
-              <a:t>Decode</a:t>
-            </a:r>
-          </a:p>
-          <a:p>
-            <a:pPr algn="ctr">
-              <a:spcAft>
-                <a:spcPts val="200"/>
-              </a:spcAft>
-            </a:pPr>
-            <a:r>
-              <a:rPr sz="750" b="1">
-                <a:solidFill>
-                  <a:srgbClr val="000000"/>
-                </a:solidFill>
-                <a:latin typeface="맑은 고딕"/>
-                <a:ea typeface="맑은 고딕"/>
-                <a:cs typeface="맑은 고딕"/>
-              </a:rPr>
-              <a:t>응답 생성</a:t>
-            </a:r>
-          </a:p>
-        </p:txBody>
-      </p:sp>
-      <p:cxnSp>
-        <p:nvCxnSpPr>
-          <p:cNvPr id="28" name="Connector 27"/>
-          <p:cNvCxnSpPr/>
-          <p:nvPr/>
-        </p:nvCxnSpPr>
-        <p:spPr>
-          <a:xfrm>
-            <a:off x="1965960" y="3108960"/>
-            <a:ext cx="365760" cy="0"/>
-          </a:xfrm>
-          <a:prstGeom prst="line">
-            <a:avLst/>
-          </a:prstGeom>
-          <a:ln w="19050">
-            <a:solidFill>
-              <a:srgbClr val="2E75B6"/>
-            </a:solidFill>
-            <a:tailEnd type="triangle"/>
-          </a:ln>
-        </p:spPr>
-        <p:style>
-          <a:lnRef idx="2">
-            <a:schemeClr val="accent1"/>
-          </a:lnRef>
-          <a:fillRef idx="0">
-            <a:schemeClr val="accent1"/>
-          </a:fillRef>
-          <a:effectRef idx="1">
-            <a:schemeClr val="accent1"/>
-          </a:effectRef>
-          <a:fontRef idx="minor">
-            <a:schemeClr val="tx1"/>
-          </a:fontRef>
-        </p:style>
-      </p:cxnSp>
-      <p:cxnSp>
-        <p:nvCxnSpPr>
-          <p:cNvPr id="29" name="Connector 28"/>
-          <p:cNvCxnSpPr/>
-          <p:nvPr/>
-        </p:nvCxnSpPr>
-        <p:spPr>
-          <a:xfrm>
-            <a:off x="3886200" y="3108960"/>
-            <a:ext cx="365760" cy="0"/>
-          </a:xfrm>
-          <a:prstGeom prst="line">
-            <a:avLst/>
-          </a:prstGeom>
-          <a:ln w="19050">
-            <a:solidFill>
-              <a:srgbClr val="2E75B6"/>
-            </a:solidFill>
-            <a:tailEnd type="triangle"/>
-          </a:ln>
-        </p:spPr>
-        <p:style>
-          <a:lnRef idx="2">
-            <a:schemeClr val="accent1"/>
-          </a:lnRef>
-          <a:fillRef idx="0">
-            <a:schemeClr val="accent1"/>
-          </a:fillRef>
-          <a:effectRef idx="1">
-            <a:schemeClr val="accent1"/>
-          </a:effectRef>
-          <a:fontRef idx="minor">
-            <a:schemeClr val="tx1"/>
-          </a:fontRef>
-        </p:style>
-      </p:cxnSp>
-      <p:cxnSp>
-        <p:nvCxnSpPr>
-          <p:cNvPr id="30" name="Connector 29"/>
-          <p:cNvCxnSpPr/>
-          <p:nvPr/>
-        </p:nvCxnSpPr>
-        <p:spPr>
-          <a:xfrm>
-            <a:off x="5029200" y="3429000"/>
-            <a:ext cx="0" cy="594360"/>
-          </a:xfrm>
-          <a:prstGeom prst="line">
-            <a:avLst/>
-          </a:prstGeom>
-          <a:ln w="19050">
-            <a:solidFill>
-              <a:srgbClr val="2E75B6"/>
-            </a:solidFill>
-            <a:tailEnd type="triangle"/>
-          </a:ln>
-        </p:spPr>
-        <p:style>
-          <a:lnRef idx="2">
-            <a:schemeClr val="accent1"/>
-          </a:lnRef>
-          <a:fillRef idx="0">
-            <a:schemeClr val="accent1"/>
-          </a:fillRef>
-          <a:effectRef idx="1">
-            <a:schemeClr val="accent1"/>
-          </a:effectRef>
-          <a:fontRef idx="minor">
-            <a:schemeClr val="tx1"/>
-          </a:fontRef>
-        </p:style>
-      </p:cxnSp>
-      <p:cxnSp>
-        <p:nvCxnSpPr>
-          <p:cNvPr id="31" name="Connector 30"/>
-          <p:cNvCxnSpPr/>
-          <p:nvPr/>
-        </p:nvCxnSpPr>
-        <p:spPr>
-          <a:xfrm flipH="1">
-            <a:off x="3886200" y="4343400"/>
-            <a:ext cx="365760" cy="0"/>
-          </a:xfrm>
-          <a:prstGeom prst="line">
-            <a:avLst/>
-          </a:prstGeom>
-          <a:ln w="19050">
-            <a:solidFill>
-              <a:srgbClr val="2E75B6"/>
-            </a:solidFill>
-            <a:tailEnd type="triangle"/>
-          </a:ln>
-        </p:spPr>
-        <p:style>
-          <a:lnRef idx="2">
-            <a:schemeClr val="accent1"/>
-          </a:lnRef>
-          <a:fillRef idx="0">
-            <a:schemeClr val="accent1"/>
-          </a:fillRef>
-          <a:effectRef idx="1">
-            <a:schemeClr val="accent1"/>
-          </a:effectRef>
-          <a:fontRef idx="minor">
-            <a:schemeClr val="tx1"/>
-          </a:fontRef>
-        </p:style>
-      </p:cxnSp>
-      <p:sp>
-        <p:nvSpPr>
-          <p:cNvPr id="32" name="TextBox 31"/>
-          <p:cNvSpPr txBox="1"/>
-          <p:nvPr/>
-        </p:nvSpPr>
-        <p:spPr>
-          <a:xfrm>
-            <a:off x="1691640" y="3456432"/>
-            <a:ext cx="914400" cy="201168"/>
-          </a:xfrm>
-          <a:prstGeom prst="rect">
-            <a:avLst/>
-          </a:prstGeom>
-          <a:noFill/>
-        </p:spPr>
-        <p:txBody>
-          <a:bodyPr wrap="square" anchor="t" lIns="45720" rIns="45720" tIns="27432" bIns="27432">
-            <a:spAutoFit/>
-          </a:bodyPr>
-          <a:lstStyle/>
-          <a:p>
-            <a:pPr algn="ctr">
-              <a:spcAft>
-                <a:spcPts val="200"/>
-              </a:spcAft>
-            </a:pPr>
-            <a:r>
-              <a:rPr sz="750" b="0">
-                <a:solidFill>
-                  <a:srgbClr val="595959"/>
-                </a:solidFill>
-                <a:latin typeface="맑은 고딕"/>
-                <a:ea typeface="맑은 고딕"/>
-                <a:cs typeface="맑은 고딕"/>
-              </a:rPr>
-              <a:t>attention score</a:t>
-            </a:r>
-          </a:p>
-        </p:txBody>
-      </p:sp>
-      <p:sp>
-        <p:nvSpPr>
-          <p:cNvPr id="33" name="TextBox 32"/>
-          <p:cNvSpPr txBox="1"/>
-          <p:nvPr/>
-        </p:nvSpPr>
-        <p:spPr>
-          <a:xfrm>
-            <a:off x="3611880" y="3456432"/>
-            <a:ext cx="914400" cy="201168"/>
-          </a:xfrm>
-          <a:prstGeom prst="rect">
-            <a:avLst/>
-          </a:prstGeom>
-          <a:noFill/>
-        </p:spPr>
-        <p:txBody>
-          <a:bodyPr wrap="square" anchor="t" lIns="45720" rIns="45720" tIns="27432" bIns="27432">
-            <a:spAutoFit/>
-          </a:bodyPr>
-          <a:lstStyle/>
-          <a:p>
-            <a:pPr algn="ctr">
-              <a:spcAft>
-                <a:spcPts val="200"/>
-              </a:spcAft>
-            </a:pPr>
-            <a:r>
-              <a:rPr sz="750" b="0">
-                <a:solidFill>
-                  <a:srgbClr val="595959"/>
-                </a:solidFill>
-                <a:latin typeface="맑은 고딕"/>
-                <a:ea typeface="맑은 고딕"/>
-                <a:cs typeface="맑은 고딕"/>
-              </a:rPr>
-              <a:t>후보 토큰 순위</a:t>
-            </a:r>
-          </a:p>
-        </p:txBody>
-      </p:sp>
-      <p:sp>
-        <p:nvSpPr>
-          <p:cNvPr id="34" name="TextBox 33"/>
-          <p:cNvSpPr txBox="1"/>
-          <p:nvPr/>
-        </p:nvSpPr>
-        <p:spPr>
-          <a:xfrm>
-            <a:off x="3657600" y="3675887"/>
-            <a:ext cx="1325880" cy="201168"/>
-          </a:xfrm>
-          <a:prstGeom prst="rect">
-            <a:avLst/>
-          </a:prstGeom>
-          <a:noFill/>
-        </p:spPr>
-        <p:txBody>
-          <a:bodyPr wrap="square" anchor="t" lIns="45720" rIns="45720" tIns="27432" bIns="27432">
-            <a:spAutoFit/>
-          </a:bodyPr>
-          <a:lstStyle/>
-          <a:p>
-            <a:pPr algn="r">
-              <a:spcAft>
-                <a:spcPts val="200"/>
-              </a:spcAft>
-            </a:pPr>
-            <a:r>
-              <a:rPr sz="750" b="0">
-                <a:solidFill>
-                  <a:srgbClr val="595959"/>
-                </a:solidFill>
-                <a:latin typeface="맑은 고딕"/>
-                <a:ea typeface="맑은 고딕"/>
-                <a:cs typeface="맑은 고딕"/>
-              </a:rPr>
-              <a:t>재계산 토큰 집합</a:t>
-            </a:r>
-          </a:p>
-        </p:txBody>
-      </p:sp>
-      <p:sp>
-        <p:nvSpPr>
-          <p:cNvPr id="35" name="TextBox 34"/>
-          <p:cNvSpPr txBox="1"/>
-          <p:nvPr/>
-        </p:nvSpPr>
-        <p:spPr>
-          <a:xfrm>
-            <a:off x="3383280" y="4681728"/>
-            <a:ext cx="914400" cy="201168"/>
-          </a:xfrm>
-          <a:prstGeom prst="rect">
-            <a:avLst/>
-          </a:prstGeom>
-          <a:noFill/>
-        </p:spPr>
-        <p:txBody>
-          <a:bodyPr wrap="square" anchor="t" lIns="45720" rIns="45720" tIns="27432" bIns="27432">
-            <a:spAutoFit/>
-          </a:bodyPr>
-          <a:lstStyle/>
-          <a:p>
-            <a:pPr algn="ctr">
-              <a:spcAft>
-                <a:spcPts val="200"/>
-              </a:spcAft>
-            </a:pPr>
-            <a:r>
-              <a:rPr sz="750" b="0">
-                <a:solidFill>
-                  <a:srgbClr val="595959"/>
-                </a:solidFill>
-                <a:latin typeface="맑은 고딕"/>
-                <a:ea typeface="맑은 고딕"/>
-                <a:cs typeface="맑은 고딕"/>
-              </a:rPr>
-              <a:t>Blended KV</a:t>
-            </a:r>
-          </a:p>
-        </p:txBody>
-      </p:sp>
-      <p:cxnSp>
-        <p:nvCxnSpPr>
-          <p:cNvPr id="36" name="Connector 35"/>
-          <p:cNvCxnSpPr/>
-          <p:nvPr/>
-        </p:nvCxnSpPr>
-        <p:spPr>
-          <a:xfrm>
-            <a:off x="868680" y="2075688"/>
-            <a:ext cx="0" cy="713232"/>
-          </a:xfrm>
-          <a:prstGeom prst="line">
-            <a:avLst/>
-          </a:prstGeom>
-          <a:ln w="15240">
-            <a:solidFill>
-              <a:srgbClr val="595959"/>
-            </a:solidFill>
-            <a:tailEnd type="triangle"/>
-          </a:ln>
-        </p:spPr>
-        <p:style>
-          <a:lnRef idx="2">
-            <a:schemeClr val="accent1"/>
-          </a:lnRef>
-          <a:fillRef idx="0">
-            <a:schemeClr val="accent1"/>
-          </a:fillRef>
-          <a:effectRef idx="1">
-            <a:schemeClr val="accent1"/>
-          </a:effectRef>
-          <a:fontRef idx="minor">
-            <a:schemeClr val="tx1"/>
-          </a:fontRef>
-        </p:style>
-      </p:cxnSp>
-      <p:sp>
-        <p:nvSpPr>
-          <p:cNvPr id="37" name="TextBox 36"/>
-          <p:cNvSpPr txBox="1"/>
-          <p:nvPr/>
-        </p:nvSpPr>
-        <p:spPr>
-          <a:xfrm>
-            <a:off x="914400" y="2130552"/>
-            <a:ext cx="548640" cy="201168"/>
-          </a:xfrm>
-          <a:prstGeom prst="rect">
-            <a:avLst/>
-          </a:prstGeom>
-          <a:noFill/>
-        </p:spPr>
-        <p:txBody>
-          <a:bodyPr wrap="square" anchor="t" lIns="45720" rIns="45720" tIns="27432" bIns="27432">
-            <a:spAutoFit/>
-          </a:bodyPr>
-          <a:lstStyle/>
-          <a:p>
-            <a:pPr algn="l">
-              <a:spcAft>
-                <a:spcPts val="200"/>
-              </a:spcAft>
-            </a:pPr>
-            <a:r>
-              <a:rPr sz="750" b="0">
-                <a:solidFill>
-                  <a:srgbClr val="595959"/>
-                </a:solidFill>
-                <a:latin typeface="맑은 고딕"/>
-                <a:ea typeface="맑은 고딕"/>
-                <a:cs typeface="맑은 고딕"/>
-              </a:rPr>
-              <a:t>Query</a:t>
-            </a:r>
-          </a:p>
-        </p:txBody>
-      </p:sp>
-      <p:cxnSp>
-        <p:nvCxnSpPr>
-          <p:cNvPr id="38" name="Connector 37"/>
-          <p:cNvCxnSpPr/>
-          <p:nvPr/>
-        </p:nvCxnSpPr>
-        <p:spPr>
-          <a:xfrm>
-            <a:off x="3291840" y="2075688"/>
-            <a:ext cx="0" cy="438912"/>
-          </a:xfrm>
-          <a:prstGeom prst="line">
-            <a:avLst/>
-          </a:prstGeom>
-          <a:ln w="15240">
-            <a:solidFill>
-              <a:srgbClr val="548235"/>
-            </a:solidFill>
-            <a:tailEnd type="triangle"/>
-          </a:ln>
-        </p:spPr>
-        <p:style>
-          <a:lnRef idx="2">
-            <a:schemeClr val="accent1"/>
-          </a:lnRef>
-          <a:fillRef idx="0">
-            <a:schemeClr val="accent1"/>
-          </a:fillRef>
-          <a:effectRef idx="1">
-            <a:schemeClr val="accent1"/>
-          </a:effectRef>
-          <a:fontRef idx="minor">
-            <a:schemeClr val="tx1"/>
-          </a:fontRef>
-        </p:style>
-      </p:cxnSp>
-      <p:cxnSp>
-        <p:nvCxnSpPr>
-          <p:cNvPr id="39" name="Connector 38"/>
-          <p:cNvCxnSpPr/>
-          <p:nvPr/>
-        </p:nvCxnSpPr>
-        <p:spPr>
-          <a:xfrm flipH="1">
-            <a:off x="1554480" y="2514600"/>
-            <a:ext cx="1737360" cy="0"/>
-          </a:xfrm>
-          <a:prstGeom prst="line">
-            <a:avLst/>
-          </a:prstGeom>
-          <a:ln w="15240">
-            <a:solidFill>
-              <a:srgbClr val="548235"/>
-            </a:solidFill>
-            <a:tailEnd type="triangle"/>
-          </a:ln>
-        </p:spPr>
-        <p:style>
-          <a:lnRef idx="2">
-            <a:schemeClr val="accent1"/>
-          </a:lnRef>
-          <a:fillRef idx="0">
-            <a:schemeClr val="accent1"/>
-          </a:fillRef>
-          <a:effectRef idx="1">
-            <a:schemeClr val="accent1"/>
-          </a:effectRef>
-          <a:fontRef idx="minor">
-            <a:schemeClr val="tx1"/>
-          </a:fontRef>
-        </p:style>
-      </p:cxnSp>
-      <p:cxnSp>
-        <p:nvCxnSpPr>
-          <p:cNvPr id="40" name="Connector 39"/>
-          <p:cNvCxnSpPr/>
-          <p:nvPr/>
-        </p:nvCxnSpPr>
-        <p:spPr>
-          <a:xfrm>
-            <a:off x="1554480" y="2514600"/>
-            <a:ext cx="0" cy="274320"/>
-          </a:xfrm>
-          <a:prstGeom prst="line">
-            <a:avLst/>
-          </a:prstGeom>
-          <a:ln w="15240">
-            <a:solidFill>
-              <a:srgbClr val="548235"/>
-            </a:solidFill>
-            <a:tailEnd type="triangle"/>
-          </a:ln>
-        </p:spPr>
-        <p:style>
-          <a:lnRef idx="2">
-            <a:schemeClr val="accent1"/>
-          </a:lnRef>
-          <a:fillRef idx="0">
-            <a:schemeClr val="accent1"/>
-          </a:fillRef>
-          <a:effectRef idx="1">
-            <a:schemeClr val="accent1"/>
-          </a:effectRef>
-          <a:fontRef idx="minor">
-            <a:schemeClr val="tx1"/>
-          </a:fontRef>
-        </p:style>
-      </p:cxnSp>
-      <p:sp>
-        <p:nvSpPr>
-          <p:cNvPr id="41" name="TextBox 40"/>
-          <p:cNvSpPr txBox="1"/>
-          <p:nvPr/>
-        </p:nvSpPr>
-        <p:spPr>
-          <a:xfrm>
-            <a:off x="1783080" y="2130552"/>
-            <a:ext cx="1463040" cy="201168"/>
-          </a:xfrm>
-          <a:prstGeom prst="rect">
-            <a:avLst/>
-          </a:prstGeom>
-          <a:noFill/>
-        </p:spPr>
-        <p:txBody>
-          <a:bodyPr wrap="square" anchor="t" lIns="45720" rIns="45720" tIns="27432" bIns="27432">
-            <a:spAutoFit/>
-          </a:bodyPr>
-          <a:lstStyle/>
-          <a:p>
-            <a:pPr algn="l">
-              <a:spcAft>
-                <a:spcPts val="200"/>
-              </a:spcAft>
-            </a:pPr>
-            <a:r>
-              <a:rPr sz="750" b="0">
-                <a:solidFill>
-                  <a:srgbClr val="548235"/>
-                </a:solidFill>
-                <a:latin typeface="맑은 고딕"/>
-                <a:ea typeface="맑은 고딕"/>
-                <a:cs typeface="맑은 고딕"/>
-              </a:rPr>
-              <a:t>Context KV (read)</a:t>
-            </a:r>
-          </a:p>
-        </p:txBody>
-      </p:sp>
-      <p:cxnSp>
-        <p:nvCxnSpPr>
-          <p:cNvPr id="42" name="Connector 41"/>
-          <p:cNvCxnSpPr/>
-          <p:nvPr/>
-        </p:nvCxnSpPr>
-        <p:spPr>
-          <a:xfrm>
-            <a:off x="5852160" y="1828800"/>
-            <a:ext cx="54864" cy="0"/>
-          </a:xfrm>
-          <a:prstGeom prst="line">
-            <a:avLst/>
-          </a:prstGeom>
-          <a:ln w="15240">
-            <a:solidFill>
-              <a:srgbClr val="548235"/>
-            </a:solidFill>
-            <a:tailEnd type="triangle"/>
-          </a:ln>
-        </p:spPr>
-        <p:style>
-          <a:lnRef idx="2">
-            <a:schemeClr val="accent1"/>
-          </a:lnRef>
-          <a:fillRef idx="0">
-            <a:schemeClr val="accent1"/>
-          </a:fillRef>
-          <a:effectRef idx="1">
-            <a:schemeClr val="accent1"/>
-          </a:effectRef>
-          <a:fontRef idx="minor">
-            <a:schemeClr val="tx1"/>
-          </a:fontRef>
-        </p:style>
-      </p:cxnSp>
+              <a:t>DP1</a:t>
+            </a:r>
+          </a:p>
+        </p:txBody>
+      </p:sp>
       <p:cxnSp>
         <p:nvCxnSpPr>
           <p:cNvPr id="43" name="Connector 42"/>
@@ -7998,16 +8200,16 @@
           <p:nvPr/>
         </p:nvCxnSpPr>
         <p:spPr>
-          <a:xfrm>
-            <a:off x="5907024" y="1828800"/>
-            <a:ext cx="0" cy="2514600"/>
+          <a:xfrm flipV="1">
+            <a:off x="3657600" y="2240280"/>
+            <a:ext cx="0" cy="457200"/>
           </a:xfrm>
           <a:prstGeom prst="line">
             <a:avLst/>
           </a:prstGeom>
           <a:ln w="15240">
             <a:solidFill>
-              <a:srgbClr val="548235"/>
+              <a:srgbClr val="7F7F7F"/>
             </a:solidFill>
             <a:tailEnd type="triangle"/>
           </a:ln>
@@ -8034,16 +8236,16 @@
           <p:nvPr/>
         </p:nvCxnSpPr>
         <p:spPr>
-          <a:xfrm flipH="1">
-            <a:off x="5806440" y="4343400"/>
-            <a:ext cx="100584" cy="0"/>
+          <a:xfrm flipV="1">
+            <a:off x="8869680" y="2240280"/>
+            <a:ext cx="0" cy="457200"/>
           </a:xfrm>
           <a:prstGeom prst="line">
             <a:avLst/>
           </a:prstGeom>
           <a:ln w="15240">
             <a:solidFill>
-              <a:srgbClr val="548235"/>
+              <a:srgbClr val="7F7F7F"/>
             </a:solidFill>
             <a:tailEnd type="triangle"/>
           </a:ln>
@@ -8071,49 +8273,8 @@
         </p:nvSpPr>
         <p:spPr>
           <a:xfrm>
-            <a:off x="4526280" y="4681728"/>
-            <a:ext cx="1325880" cy="201168"/>
-          </a:xfrm>
-          <a:prstGeom prst="rect">
-            <a:avLst/>
-          </a:prstGeom>
-          <a:noFill/>
-        </p:spPr>
-        <p:txBody>
-          <a:bodyPr wrap="square" anchor="t" lIns="45720" rIns="45720" tIns="27432" bIns="27432">
-            <a:spAutoFit/>
-          </a:bodyPr>
-          <a:lstStyle/>
-          <a:p>
-            <a:pPr algn="r">
-              <a:spcAft>
-                <a:spcPts val="200"/>
-              </a:spcAft>
-            </a:pPr>
-            <a:r>
-              <a:rPr sz="750" b="0">
-                <a:solidFill>
-                  <a:srgbClr val="548235"/>
-                </a:solidFill>
-                <a:latin typeface="맑은 고딕"/>
-                <a:ea typeface="맑은 고딕"/>
-                <a:cs typeface="맑은 고딕"/>
-              </a:rPr>
-              <a:t>Context KV (재사용분)</a:t>
-            </a:r>
-          </a:p>
-        </p:txBody>
-      </p:sp>
-      <p:sp>
-        <p:nvSpPr>
-          <p:cNvPr id="46" name="TextBox 45"/>
-          <p:cNvSpPr txBox="1"/>
-          <p:nvPr/>
-        </p:nvSpPr>
-        <p:spPr>
-          <a:xfrm>
-            <a:off x="365760" y="4069080"/>
-            <a:ext cx="1920240" cy="640080"/>
+            <a:off x="3703320" y="2395728"/>
+            <a:ext cx="548640" cy="201168"/>
           </a:xfrm>
           <a:prstGeom prst="rect">
             <a:avLst/>
@@ -8132,25 +8293,7 @@
               </a:spcAft>
             </a:pPr>
             <a:r>
-              <a:rPr sz="800" b="1">
-                <a:solidFill>
-                  <a:srgbClr val="2E75B6"/>
-                </a:solidFill>
-                <a:latin typeface="맑은 고딕"/>
-                <a:ea typeface="맑은 고딕"/>
-                <a:cs typeface="맑은 고딕"/>
-              </a:rPr>
-              <a:t>서빙 경로 (요청 시점, 동기)</a:t>
-            </a:r>
-          </a:p>
-          <a:p>
-            <a:pPr algn="l">
-              <a:spcAft>
-                <a:spcPts val="200"/>
-              </a:spcAft>
-            </a:pPr>
-            <a:r>
-              <a:rPr sz="800" b="0">
+              <a:rPr sz="750" b="0">
                 <a:solidFill>
                   <a:srgbClr val="595959"/>
                 </a:solidFill>
@@ -8158,236 +8301,62 @@
                 <a:ea typeface="맑은 고딕"/>
                 <a:cs typeface="맑은 고딕"/>
               </a:rPr>
-              <a:t>Filter : 무상태 · 요청 단위</a:t>
-            </a:r>
-          </a:p>
-        </p:txBody>
-      </p:sp>
-      <p:sp>
-        <p:nvSpPr>
-          <p:cNvPr id="47" name="Rectangle 46"/>
-          <p:cNvSpPr/>
-          <p:nvPr/>
-        </p:nvSpPr>
-        <p:spPr>
-          <a:xfrm>
-            <a:off x="292608" y="4983480"/>
-            <a:ext cx="5669280" cy="548640"/>
+              <a:t>read</a:t>
+            </a:r>
+          </a:p>
+        </p:txBody>
+      </p:sp>
+      <p:sp>
+        <p:nvSpPr>
+          <p:cNvPr id="46" name="TextBox 45"/>
+          <p:cNvSpPr txBox="1"/>
+          <p:nvPr/>
+        </p:nvSpPr>
+        <p:spPr>
+          <a:xfrm>
+            <a:off x="8915400" y="2395728"/>
+            <a:ext cx="548640" cy="201168"/>
           </a:xfrm>
           <a:prstGeom prst="rect">
             <a:avLst/>
           </a:prstGeom>
-          <a:solidFill>
-            <a:srgbClr val="FFFFFF"/>
-          </a:solidFill>
-          <a:ln w="10160">
-            <a:solidFill>
-              <a:srgbClr val="BFBFBF"/>
-            </a:solidFill>
-          </a:ln>
-          <a:effectLst/>
-        </p:spPr>
-        <p:style>
-          <a:lnRef idx="1">
-            <a:schemeClr val="accent1"/>
-          </a:lnRef>
-          <a:fillRef idx="3">
-            <a:schemeClr val="accent1"/>
-          </a:fillRef>
-          <a:effectRef idx="2">
-            <a:schemeClr val="accent1"/>
-          </a:effectRef>
-          <a:fontRef idx="minor">
-            <a:schemeClr val="lt1"/>
-          </a:fontRef>
-        </p:style>
-        <p:txBody>
-          <a:bodyPr rtlCol="0" anchor="ctr" wrap="square" lIns="73152" rIns="73152" tIns="27432" bIns="27432"/>
+          <a:noFill/>
+        </p:spPr>
+        <p:txBody>
+          <a:bodyPr wrap="square" anchor="t" lIns="45720" rIns="45720" tIns="27432" bIns="27432">
+            <a:spAutoFit/>
+          </a:bodyPr>
           <a:lstStyle/>
           <a:p>
             <a:pPr algn="l">
               <a:spcAft>
-                <a:spcPts val="100"/>
+                <a:spcPts val="200"/>
               </a:spcAft>
             </a:pPr>
             <a:r>
-              <a:rPr sz="850" b="0">
+              <a:rPr sz="750" b="0">
                 <a:solidFill>
-                  <a:srgbClr val="000000"/>
+                  <a:srgbClr val="595959"/>
                 </a:solidFill>
                 <a:latin typeface="맑은 고딕"/>
                 <a:ea typeface="맑은 고딕"/>
                 <a:cs typeface="맑은 고딕"/>
               </a:rPr>
-              <a:t>• 결정 시점 : 요청마다 실제 Query로 attention 재산출 (Late Binding)</a:t>
-            </a:r>
-          </a:p>
-          <a:p>
-            <a:pPr algn="l">
-              <a:spcAft>
-                <a:spcPts val="100"/>
-              </a:spcAft>
-            </a:pPr>
-            <a:r>
-              <a:rPr sz="850" b="0">
-                <a:solidFill>
-                  <a:srgbClr val="000000"/>
-                </a:solidFill>
-                <a:latin typeface="맑은 고딕"/>
-                <a:ea typeface="맑은 고딕"/>
-                <a:cs typeface="맑은 고딕"/>
-              </a:rPr>
-              <a:t>• 상태 : 파생 상태 없음, KV 원본만 보관 → Stale 위험 낮음</a:t>
-            </a:r>
-          </a:p>
-          <a:p>
-            <a:pPr algn="l">
-              <a:spcAft>
-                <a:spcPts val="100"/>
-              </a:spcAft>
-            </a:pPr>
-            <a:r>
-              <a:rPr sz="850" b="0">
-                <a:solidFill>
-                  <a:srgbClr val="FF0000"/>
-                </a:solidFill>
-                <a:latin typeface="맑은 고딕"/>
-                <a:ea typeface="맑은 고딕"/>
-                <a:cs typeface="맑은 고딕"/>
-              </a:rPr>
-              <a:t>• 비용 : 모든 Filter가 서빙 경로에 직렬 위치 → TTFT 가산 [가설]</a:t>
-            </a:r>
-          </a:p>
-        </p:txBody>
-      </p:sp>
-      <p:sp>
-        <p:nvSpPr>
-          <p:cNvPr id="48" name="Rectangle 47"/>
+              <a:t>read</a:t>
+            </a:r>
+          </a:p>
+        </p:txBody>
+      </p:sp>
+      <p:sp>
+        <p:nvSpPr>
+          <p:cNvPr id="47" name="Rectangle 46"/>
           <p:cNvSpPr/>
           <p:nvPr/>
         </p:nvSpPr>
         <p:spPr>
           <a:xfrm>
-            <a:off x="6199632" y="1097280"/>
-            <a:ext cx="5760720" cy="329184"/>
-          </a:xfrm>
-          <a:prstGeom prst="rect">
-            <a:avLst/>
-          </a:prstGeom>
-          <a:solidFill>
-            <a:srgbClr val="F2F2F2"/>
-          </a:solidFill>
-          <a:ln w="10160">
-            <a:solidFill>
-              <a:srgbClr val="7F7F7F"/>
-            </a:solidFill>
-          </a:ln>
-          <a:effectLst/>
-        </p:spPr>
-        <p:style>
-          <a:lnRef idx="1">
-            <a:schemeClr val="accent1"/>
-          </a:lnRef>
-          <a:fillRef idx="3">
-            <a:schemeClr val="accent1"/>
-          </a:fillRef>
-          <a:effectRef idx="2">
-            <a:schemeClr val="accent1"/>
-          </a:effectRef>
-          <a:fontRef idx="minor">
-            <a:schemeClr val="lt1"/>
-          </a:fontRef>
-        </p:style>
-        <p:txBody>
-          <a:bodyPr rtlCol="0" anchor="ctr" wrap="square" lIns="45720" rIns="45720" tIns="27432" bIns="27432"/>
-          <a:lstStyle/>
-          <a:p>
-            <a:pPr algn="ctr">
-              <a:spcAft>
-                <a:spcPts val="200"/>
-              </a:spcAft>
-            </a:pPr>
-            <a:r>
-              <a:rPr sz="1100" b="1">
-                <a:solidFill>
-                  <a:srgbClr val="000000"/>
-                </a:solidFill>
-                <a:latin typeface="맑은 고딕"/>
-                <a:ea typeface="맑은 고딕"/>
-                <a:cs typeface="맑은 고딕"/>
-              </a:rPr>
-              <a:t>(2안) Query Agnostic 재사용 (Offline) </a:t>
-            </a:r>
-            <a:r>
-              <a:rPr sz="1100" b="1">
-                <a:solidFill>
-                  <a:srgbClr val="FF0000"/>
-                </a:solidFill>
-                <a:latin typeface="맑은 고딕"/>
-                <a:ea typeface="맑은 고딕"/>
-                <a:cs typeface="맑은 고딕"/>
-              </a:rPr>
-              <a:t>Repository + 사전 Batch 분석</a:t>
-            </a:r>
-          </a:p>
-        </p:txBody>
-      </p:sp>
-      <p:sp>
-        <p:nvSpPr>
-          <p:cNvPr id="49" name="Rectangle 48"/>
-          <p:cNvSpPr/>
-          <p:nvPr/>
-        </p:nvSpPr>
-        <p:spPr>
-          <a:xfrm>
-            <a:off x="6245352" y="1536192"/>
-            <a:ext cx="5669280" cy="1188720"/>
-          </a:xfrm>
-          <a:prstGeom prst="rect">
-            <a:avLst/>
-          </a:prstGeom>
-          <a:solidFill>
-            <a:srgbClr val="FBE5D6"/>
-          </a:solidFill>
-          <a:ln w="12700">
-            <a:solidFill>
-              <a:srgbClr val="C55A11"/>
-            </a:solidFill>
-          </a:ln>
-          <a:effectLst/>
-        </p:spPr>
-        <p:style>
-          <a:lnRef idx="1">
-            <a:schemeClr val="accent1"/>
-          </a:lnRef>
-          <a:fillRef idx="3">
-            <a:schemeClr val="accent1"/>
-          </a:fillRef>
-          <a:effectRef idx="2">
-            <a:schemeClr val="accent1"/>
-          </a:effectRef>
-          <a:fontRef idx="minor">
-            <a:schemeClr val="lt1"/>
-          </a:fontRef>
-        </p:style>
-        <p:txBody>
-          <a:bodyPr rtlCol="0" anchor="ctr"/>
-          <a:lstStyle/>
-          <a:p>
-            <a:pPr algn="ctr"/>
-          </a:p>
-        </p:txBody>
-      </p:sp>
-      <p:sp>
-        <p:nvSpPr>
-          <p:cNvPr id="50" name="Rectangle 49"/>
-          <p:cNvSpPr/>
-          <p:nvPr/>
-        </p:nvSpPr>
-        <p:spPr>
-          <a:xfrm>
-            <a:off x="6245352" y="1536192"/>
-            <a:ext cx="5669280" cy="219456"/>
+            <a:off x="246888" y="3154680"/>
+            <a:ext cx="914400" cy="3246120"/>
           </a:xfrm>
           <a:prstGeom prst="rect">
             <a:avLst/>
@@ -8426,6 +8395,24 @@
               </a:spcAft>
             </a:pPr>
             <a:r>
+              <a:rPr sz="1200" b="1">
+                <a:solidFill>
+                  <a:srgbClr val="FFFFFF"/>
+                </a:solidFill>
+                <a:latin typeface="맑은 고딕"/>
+                <a:ea typeface="맑은 고딕"/>
+                <a:cs typeface="맑은 고딕"/>
+              </a:rPr>
+              <a:t>2안</a:t>
+            </a:r>
+          </a:p>
+          <a:p>
+            <a:pPr algn="ctr">
+              <a:spcAft>
+                <a:spcPts val="200"/>
+              </a:spcAft>
+            </a:pPr>
+            <a:r>
               <a:rPr sz="800" b="1">
                 <a:solidFill>
                   <a:srgbClr val="FFFFFF"/>
@@ -8434,27 +8421,168 @@
                 <a:ea typeface="맑은 고딕"/>
                 <a:cs typeface="맑은 고딕"/>
               </a:rPr>
-              <a:t>사전 분석 (Offline) — Batch-Sequential : 단계별 일괄 처리 후 다음 단계</a:t>
-            </a:r>
-          </a:p>
-        </p:txBody>
-      </p:sp>
-      <p:sp>
-        <p:nvSpPr>
-          <p:cNvPr id="51" name="Rectangle 50"/>
+              <a:t>Query Agnostic</a:t>
+            </a:r>
+          </a:p>
+          <a:p>
+            <a:pPr algn="ctr">
+              <a:spcAft>
+                <a:spcPts val="200"/>
+              </a:spcAft>
+            </a:pPr>
+            <a:r>
+              <a:rPr sz="800" b="1">
+                <a:solidFill>
+                  <a:srgbClr val="FFFFFF"/>
+                </a:solidFill>
+                <a:latin typeface="맑은 고딕"/>
+                <a:ea typeface="맑은 고딕"/>
+                <a:cs typeface="맑은 고딕"/>
+              </a:rPr>
+              <a:t>(Offline)</a:t>
+            </a:r>
+          </a:p>
+          <a:p>
+            <a:pPr algn="ctr">
+              <a:spcAft>
+                <a:spcPts val="200"/>
+              </a:spcAft>
+            </a:pPr>
+            <a:r>
+              <a:rPr sz="800" b="1">
+                <a:solidFill>
+                  <a:srgbClr val="FFFFFF"/>
+                </a:solidFill>
+                <a:latin typeface="맑은 고딕"/>
+                <a:ea typeface="맑은 고딕"/>
+                <a:cs typeface="맑은 고딕"/>
+              </a:rPr>
+              <a:t>Repository</a:t>
+            </a:r>
+          </a:p>
+          <a:p>
+            <a:pPr algn="ctr">
+              <a:spcAft>
+                <a:spcPts val="200"/>
+              </a:spcAft>
+            </a:pPr>
+            <a:r>
+              <a:rPr sz="800" b="1">
+                <a:solidFill>
+                  <a:srgbClr val="FFFFFF"/>
+                </a:solidFill>
+                <a:latin typeface="맑은 고딕"/>
+                <a:ea typeface="맑은 고딕"/>
+                <a:cs typeface="맑은 고딕"/>
+              </a:rPr>
+              <a:t>+ 사전 Batch 분석</a:t>
+            </a:r>
+          </a:p>
+        </p:txBody>
+      </p:sp>
+      <p:sp>
+        <p:nvSpPr>
+          <p:cNvPr id="48" name="Rectangle 47"/>
           <p:cNvSpPr/>
           <p:nvPr/>
         </p:nvSpPr>
         <p:spPr>
           <a:xfrm>
-            <a:off x="6355080" y="1828800"/>
-            <a:ext cx="1170432" cy="548640"/>
+            <a:off x="1234440" y="3154680"/>
+            <a:ext cx="6629400" cy="1188720"/>
           </a:xfrm>
           <a:prstGeom prst="rect">
             <a:avLst/>
           </a:prstGeom>
           <a:solidFill>
-            <a:srgbClr val="FFFFFF"/>
+            <a:srgbClr val="FEF4EC"/>
+          </a:solidFill>
+          <a:ln w="19050">
+            <a:solidFill>
+              <a:srgbClr val="C55A11"/>
+            </a:solidFill>
+          </a:ln>
+          <a:effectLst/>
+        </p:spPr>
+        <p:style>
+          <a:lnRef idx="1">
+            <a:schemeClr val="accent1"/>
+          </a:lnRef>
+          <a:fillRef idx="3">
+            <a:schemeClr val="accent1"/>
+          </a:fillRef>
+          <a:effectRef idx="2">
+            <a:schemeClr val="accent1"/>
+          </a:effectRef>
+          <a:fontRef idx="minor">
+            <a:schemeClr val="lt1"/>
+          </a:fontRef>
+        </p:style>
+        <p:txBody>
+          <a:bodyPr rtlCol="0" anchor="ctr"/>
+          <a:lstStyle/>
+          <a:p>
+            <a:pPr algn="ctr"/>
+          </a:p>
+        </p:txBody>
+      </p:sp>
+      <p:sp>
+        <p:nvSpPr>
+          <p:cNvPr id="49" name="TextBox 48"/>
+          <p:cNvSpPr txBox="1"/>
+          <p:nvPr/>
+        </p:nvSpPr>
+        <p:spPr>
+          <a:xfrm>
+            <a:off x="1280160" y="3163824"/>
+            <a:ext cx="6583680" cy="201168"/>
+          </a:xfrm>
+          <a:prstGeom prst="rect">
+            <a:avLst/>
+          </a:prstGeom>
+          <a:noFill/>
+        </p:spPr>
+        <p:txBody>
+          <a:bodyPr wrap="square" anchor="t" lIns="45720" rIns="45720" tIns="27432" bIns="27432">
+            <a:spAutoFit/>
+          </a:bodyPr>
+          <a:lstStyle/>
+          <a:p>
+            <a:pPr algn="l">
+              <a:spcAft>
+                <a:spcPts val="200"/>
+              </a:spcAft>
+            </a:pPr>
+            <a:r>
+              <a:rPr sz="800" b="1">
+                <a:solidFill>
+                  <a:srgbClr val="C55A11"/>
+                </a:solidFill>
+                <a:latin typeface="맑은 고딕"/>
+                <a:ea typeface="맑은 고딕"/>
+                <a:cs typeface="맑은 고딕"/>
+              </a:rPr>
+              <a:t>사전 분석 (Offline, 1회 · KV 갱신 시) — Batch-Sequential</a:t>
+            </a:r>
+          </a:p>
+        </p:txBody>
+      </p:sp>
+      <p:sp>
+        <p:nvSpPr>
+          <p:cNvPr id="50" name="Rectangle 49"/>
+          <p:cNvSpPr/>
+          <p:nvPr/>
+        </p:nvSpPr>
+        <p:spPr>
+          <a:xfrm>
+            <a:off x="1325880" y="3566160"/>
+            <a:ext cx="1188720" cy="548640"/>
+          </a:xfrm>
+          <a:prstGeom prst="rect">
+            <a:avLst/>
+          </a:prstGeom>
+          <a:solidFill>
+            <a:srgbClr val="FBE5D6"/>
           </a:solidFill>
           <a:ln w="15240">
             <a:solidFill>
@@ -8487,7 +8615,7 @@
               </a:spcAft>
             </a:pPr>
             <a:r>
-              <a:rPr sz="800" b="1">
+              <a:rPr sz="850" b="1">
                 <a:solidFill>
                   <a:srgbClr val="000000"/>
                 </a:solidFill>
@@ -8520,24 +8648,24 @@
       </p:sp>
       <p:sp>
         <p:nvSpPr>
-          <p:cNvPr id="52" name="Rectangle 51"/>
+          <p:cNvPr id="51" name="Rectangle 50"/>
           <p:cNvSpPr/>
           <p:nvPr/>
         </p:nvSpPr>
         <p:spPr>
           <a:xfrm>
-            <a:off x="7781544" y="1828800"/>
-            <a:ext cx="1170432" cy="548640"/>
+            <a:off x="3063239" y="3566160"/>
+            <a:ext cx="1188720" cy="548640"/>
           </a:xfrm>
           <a:prstGeom prst="rect">
             <a:avLst/>
           </a:prstGeom>
           <a:solidFill>
-            <a:srgbClr val="FFFFFF"/>
+            <a:srgbClr val="F0F1F3"/>
           </a:solidFill>
           <a:ln w="15240">
             <a:solidFill>
-              <a:srgbClr val="C55A11"/>
+              <a:srgbClr val="7F7F7F"/>
             </a:solidFill>
           </a:ln>
           <a:effectLst/>
@@ -8566,7 +8694,7 @@
               </a:spcAft>
             </a:pPr>
             <a:r>
-              <a:rPr sz="800" b="1">
+              <a:rPr sz="850" b="1">
                 <a:solidFill>
                   <a:srgbClr val="000000"/>
                 </a:solidFill>
@@ -8599,24 +8727,24 @@
       </p:sp>
       <p:sp>
         <p:nvSpPr>
-          <p:cNvPr id="53" name="Rectangle 52"/>
+          <p:cNvPr id="52" name="Rectangle 51"/>
           <p:cNvSpPr/>
           <p:nvPr/>
         </p:nvSpPr>
         <p:spPr>
           <a:xfrm>
-            <a:off x="9208008" y="1828800"/>
-            <a:ext cx="1170432" cy="548640"/>
+            <a:off x="4800600" y="3566160"/>
+            <a:ext cx="1188720" cy="548640"/>
           </a:xfrm>
           <a:prstGeom prst="rect">
             <a:avLst/>
           </a:prstGeom>
           <a:solidFill>
-            <a:srgbClr val="FFFFFF"/>
+            <a:srgbClr val="F0F1F3"/>
           </a:solidFill>
           <a:ln w="15240">
             <a:solidFill>
-              <a:srgbClr val="C55A11"/>
+              <a:srgbClr val="7F7F7F"/>
             </a:solidFill>
           </a:ln>
           <a:effectLst/>
@@ -8645,7 +8773,7 @@
               </a:spcAft>
             </a:pPr>
             <a:r>
-              <a:rPr sz="800" b="1">
+              <a:rPr sz="850" b="1">
                 <a:solidFill>
                   <a:srgbClr val="000000"/>
                 </a:solidFill>
@@ -8678,24 +8806,24 @@
       </p:sp>
       <p:sp>
         <p:nvSpPr>
-          <p:cNvPr id="54" name="Rectangle 53"/>
+          <p:cNvPr id="53" name="Rectangle 52"/>
           <p:cNvSpPr/>
           <p:nvPr/>
         </p:nvSpPr>
         <p:spPr>
           <a:xfrm>
-            <a:off x="10634472" y="1828800"/>
-            <a:ext cx="1170432" cy="548640"/>
+            <a:off x="6537959" y="3566160"/>
+            <a:ext cx="1188720" cy="548640"/>
           </a:xfrm>
           <a:prstGeom prst="rect">
             <a:avLst/>
           </a:prstGeom>
           <a:solidFill>
-            <a:srgbClr val="FFFFFF"/>
+            <a:srgbClr val="F0F1F3"/>
           </a:solidFill>
           <a:ln w="15240">
             <a:solidFill>
-              <a:srgbClr val="C55A11"/>
+              <a:srgbClr val="7F7F7F"/>
             </a:solidFill>
           </a:ln>
           <a:effectLst/>
@@ -8724,7 +8852,7 @@
               </a:spcAft>
             </a:pPr>
             <a:r>
-              <a:rPr sz="800" b="1">
+              <a:rPr sz="850" b="1">
                 <a:solidFill>
                   <a:srgbClr val="000000"/>
                 </a:solidFill>
@@ -8757,19 +8885,19 @@
       </p:sp>
       <p:cxnSp>
         <p:nvCxnSpPr>
-          <p:cNvPr id="55" name="Connector 54"/>
+          <p:cNvPr id="54" name="Connector 53"/>
           <p:cNvCxnSpPr/>
           <p:nvPr/>
         </p:nvCxnSpPr>
         <p:spPr>
           <a:xfrm>
-            <a:off x="7525512" y="2103120"/>
-            <a:ext cx="256032" cy="0"/>
+            <a:off x="2514600" y="3840480"/>
+            <a:ext cx="548639" cy="0"/>
           </a:xfrm>
           <a:prstGeom prst="line">
             <a:avLst/>
           </a:prstGeom>
-          <a:ln w="16510">
+          <a:ln w="19050">
             <a:solidFill>
               <a:srgbClr val="C55A11"/>
             </a:solidFill>
@@ -8792,6 +8920,47 @@
           </a:fontRef>
         </p:style>
       </p:cxnSp>
+      <p:sp>
+        <p:nvSpPr>
+          <p:cNvPr id="55" name="TextBox 54"/>
+          <p:cNvSpPr txBox="1"/>
+          <p:nvPr/>
+        </p:nvSpPr>
+        <p:spPr>
+          <a:xfrm>
+            <a:off x="2468880" y="3584448"/>
+            <a:ext cx="640080" cy="201168"/>
+          </a:xfrm>
+          <a:prstGeom prst="rect">
+            <a:avLst/>
+          </a:prstGeom>
+          <a:noFill/>
+        </p:spPr>
+        <p:txBody>
+          <a:bodyPr wrap="square" anchor="t" lIns="45720" rIns="45720" tIns="27432" bIns="27432">
+            <a:spAutoFit/>
+          </a:bodyPr>
+          <a:lstStyle/>
+          <a:p>
+            <a:pPr algn="ctr">
+              <a:spcAft>
+                <a:spcPts val="200"/>
+              </a:spcAft>
+            </a:pPr>
+            <a:r>
+              <a:rPr sz="700" b="0">
+                <a:solidFill>
+                  <a:srgbClr val="C55A11"/>
+                </a:solidFill>
+                <a:latin typeface="맑은 고딕"/>
+                <a:ea typeface="맑은 고딕"/>
+                <a:cs typeface="맑은 고딕"/>
+              </a:rPr>
+              <a:t>대표 Query</a:t>
+            </a:r>
+          </a:p>
+        </p:txBody>
+      </p:sp>
       <p:cxnSp>
         <p:nvCxnSpPr>
           <p:cNvPr id="56" name="Connector 55"/>
@@ -8800,13 +8969,13 @@
         </p:nvCxnSpPr>
         <p:spPr>
           <a:xfrm>
-            <a:off x="8951976" y="2103120"/>
-            <a:ext cx="256032" cy="0"/>
+            <a:off x="4251959" y="3840480"/>
+            <a:ext cx="548641" cy="0"/>
           </a:xfrm>
           <a:prstGeom prst="line">
             <a:avLst/>
           </a:prstGeom>
-          <a:ln w="16510">
+          <a:ln w="19050">
             <a:solidFill>
               <a:srgbClr val="C55A11"/>
             </a:solidFill>
@@ -8829,21 +8998,62 @@
           </a:fontRef>
         </p:style>
       </p:cxnSp>
+      <p:sp>
+        <p:nvSpPr>
+          <p:cNvPr id="57" name="TextBox 56"/>
+          <p:cNvSpPr txBox="1"/>
+          <p:nvPr/>
+        </p:nvSpPr>
+        <p:spPr>
+          <a:xfrm>
+            <a:off x="4206240" y="3584448"/>
+            <a:ext cx="640080" cy="201168"/>
+          </a:xfrm>
+          <a:prstGeom prst="rect">
+            <a:avLst/>
+          </a:prstGeom>
+          <a:noFill/>
+        </p:spPr>
+        <p:txBody>
+          <a:bodyPr wrap="square" anchor="t" lIns="45720" rIns="45720" tIns="27432" bIns="27432">
+            <a:spAutoFit/>
+          </a:bodyPr>
+          <a:lstStyle/>
+          <a:p>
+            <a:pPr algn="ctr">
+              <a:spcAft>
+                <a:spcPts val="200"/>
+              </a:spcAft>
+            </a:pPr>
+            <a:r>
+              <a:rPr sz="700" b="0">
+                <a:solidFill>
+                  <a:srgbClr val="C55A11"/>
+                </a:solidFill>
+                <a:latin typeface="맑은 고딕"/>
+                <a:ea typeface="맑은 고딕"/>
+                <a:cs typeface="맑은 고딕"/>
+              </a:rPr>
+              <a:t>score</a:t>
+            </a:r>
+          </a:p>
+        </p:txBody>
+      </p:sp>
       <p:cxnSp>
         <p:nvCxnSpPr>
-          <p:cNvPr id="57" name="Connector 56"/>
+          <p:cNvPr id="58" name="Connector 57"/>
           <p:cNvCxnSpPr/>
           <p:nvPr/>
         </p:nvCxnSpPr>
         <p:spPr>
           <a:xfrm>
-            <a:off x="10378440" y="2103120"/>
-            <a:ext cx="256032" cy="0"/>
+            <a:off x="5989320" y="3840480"/>
+            <a:ext cx="548639" cy="0"/>
           </a:xfrm>
           <a:prstGeom prst="line">
             <a:avLst/>
           </a:prstGeom>
-          <a:ln w="16510">
+          <a:ln w="19050">
             <a:solidFill>
               <a:srgbClr val="C55A11"/>
             </a:solidFill>
@@ -8868,24 +9078,65 @@
       </p:cxnSp>
       <p:sp>
         <p:nvSpPr>
-          <p:cNvPr id="58" name="Rectangle 57"/>
+          <p:cNvPr id="59" name="TextBox 58"/>
+          <p:cNvSpPr txBox="1"/>
+          <p:nvPr/>
+        </p:nvSpPr>
+        <p:spPr>
+          <a:xfrm>
+            <a:off x="5943600" y="3584448"/>
+            <a:ext cx="640080" cy="201168"/>
+          </a:xfrm>
+          <a:prstGeom prst="rect">
+            <a:avLst/>
+          </a:prstGeom>
+          <a:noFill/>
+        </p:spPr>
+        <p:txBody>
+          <a:bodyPr wrap="square" anchor="t" lIns="45720" rIns="45720" tIns="27432" bIns="27432">
+            <a:spAutoFit/>
+          </a:bodyPr>
+          <a:lstStyle/>
+          <a:p>
+            <a:pPr algn="ctr">
+              <a:spcAft>
+                <a:spcPts val="200"/>
+              </a:spcAft>
+            </a:pPr>
+            <a:r>
+              <a:rPr sz="700" b="0">
+                <a:solidFill>
+                  <a:srgbClr val="C55A11"/>
+                </a:solidFill>
+                <a:latin typeface="맑은 고딕"/>
+                <a:ea typeface="맑은 고딕"/>
+                <a:cs typeface="맑은 고딕"/>
+              </a:rPr>
+              <a:t>후보 순위</a:t>
+            </a:r>
+          </a:p>
+        </p:txBody>
+      </p:sp>
+      <p:sp>
+        <p:nvSpPr>
+          <p:cNvPr id="60" name="Rectangle 59"/>
           <p:cNvSpPr/>
           <p:nvPr/>
         </p:nvSpPr>
         <p:spPr>
           <a:xfrm>
-            <a:off x="6245352" y="3063240"/>
-            <a:ext cx="5669280" cy="914400"/>
+            <a:off x="1234440" y="4663440"/>
+            <a:ext cx="10104120" cy="731520"/>
           </a:xfrm>
           <a:prstGeom prst="rect">
             <a:avLst/>
           </a:prstGeom>
           <a:solidFill>
-            <a:srgbClr val="E2F0D9"/>
+            <a:srgbClr val="F0F1F3"/>
           </a:solidFill>
-          <a:ln w="12700">
+          <a:ln w="15240">
             <a:solidFill>
-              <a:srgbClr val="548235"/>
+              <a:srgbClr val="7F7F7F"/>
             </a:solidFill>
           </a:ln>
           <a:effectLst/>
@@ -8914,24 +9165,65 @@
       </p:sp>
       <p:sp>
         <p:nvSpPr>
-          <p:cNvPr id="59" name="Rectangle 58"/>
+          <p:cNvPr id="61" name="TextBox 60"/>
+          <p:cNvSpPr txBox="1"/>
+          <p:nvPr/>
+        </p:nvSpPr>
+        <p:spPr>
+          <a:xfrm>
+            <a:off x="1280160" y="4672584"/>
+            <a:ext cx="7315200" cy="201168"/>
+          </a:xfrm>
+          <a:prstGeom prst="rect">
+            <a:avLst/>
+          </a:prstGeom>
+          <a:noFill/>
+        </p:spPr>
+        <p:txBody>
+          <a:bodyPr wrap="square" anchor="t" lIns="45720" rIns="45720" tIns="27432" bIns="27432">
+            <a:spAutoFit/>
+          </a:bodyPr>
+          <a:lstStyle/>
+          <a:p>
+            <a:pPr algn="l">
+              <a:spcAft>
+                <a:spcPts val="200"/>
+              </a:spcAft>
+            </a:pPr>
+            <a:r>
+              <a:rPr sz="800" b="1">
+                <a:solidFill>
+                  <a:srgbClr val="404040"/>
+                </a:solidFill>
+                <a:latin typeface="맑은 고딕"/>
+                <a:ea typeface="맑은 고딕"/>
+                <a:cs typeface="맑은 고딕"/>
+              </a:rPr>
+              <a:t>KV Store (DP1) = Repository : 공유 · 영속 · 키로 조회</a:t>
+            </a:r>
+          </a:p>
+        </p:txBody>
+      </p:sp>
+      <p:sp>
+        <p:nvSpPr>
+          <p:cNvPr id="62" name="Rectangle 61"/>
           <p:cNvSpPr/>
           <p:nvPr/>
         </p:nvSpPr>
         <p:spPr>
           <a:xfrm>
-            <a:off x="6355080" y="3154680"/>
-            <a:ext cx="1170432" cy="411480"/>
+            <a:off x="1325880" y="4937760"/>
+            <a:ext cx="1188720" cy="384048"/>
           </a:xfrm>
           <a:prstGeom prst="rect">
             <a:avLst/>
           </a:prstGeom>
           <a:solidFill>
-            <a:srgbClr val="FFFFFF"/>
+            <a:srgbClr val="FBE5D6"/>
           </a:solidFill>
-          <a:ln w="10160">
+          <a:ln w="15240">
             <a:solidFill>
-              <a:srgbClr val="548235"/>
+              <a:srgbClr val="C55A11"/>
             </a:solidFill>
           </a:ln>
           <a:effectLst/>
@@ -8956,11 +9248,11 @@
           <a:p>
             <a:pPr algn="ctr">
               <a:spcAft>
-                <a:spcPts val="200"/>
+                <a:spcPts val="0"/>
               </a:spcAft>
             </a:pPr>
             <a:r>
-              <a:rPr sz="800" b="1">
+              <a:rPr sz="850" b="1">
                 <a:solidFill>
                   <a:srgbClr val="000000"/>
                 </a:solidFill>
@@ -8971,28 +9263,46 @@
               <a:t>W/L 대표 Query</a:t>
             </a:r>
           </a:p>
-        </p:txBody>
-      </p:sp>
-      <p:sp>
-        <p:nvSpPr>
-          <p:cNvPr id="60" name="Rectangle 59"/>
+          <a:p>
+            <a:pPr algn="ctr">
+              <a:spcAft>
+                <a:spcPts val="0"/>
+              </a:spcAft>
+            </a:pPr>
+            <a:r>
+              <a:rPr sz="700" b="1">
+                <a:solidFill>
+                  <a:srgbClr val="000000"/>
+                </a:solidFill>
+                <a:latin typeface="맑은 고딕"/>
+                <a:ea typeface="맑은 고딕"/>
+                <a:cs typeface="맑은 고딕"/>
+              </a:rPr>
+              <a:t/>
+            </a:r>
+          </a:p>
+        </p:txBody>
+      </p:sp>
+      <p:sp>
+        <p:nvSpPr>
+          <p:cNvPr id="63" name="Rectangle 62"/>
           <p:cNvSpPr/>
           <p:nvPr/>
         </p:nvSpPr>
         <p:spPr>
           <a:xfrm>
-            <a:off x="7781544" y="3154680"/>
-            <a:ext cx="1170432" cy="411480"/>
+            <a:off x="3063239" y="4937760"/>
+            <a:ext cx="1188720" cy="384048"/>
           </a:xfrm>
           <a:prstGeom prst="rect">
             <a:avLst/>
           </a:prstGeom>
           <a:solidFill>
-            <a:srgbClr val="FFFFFF"/>
+            <a:srgbClr val="F0F1F3"/>
           </a:solidFill>
-          <a:ln w="10160">
+          <a:ln w="15240">
             <a:solidFill>
-              <a:srgbClr val="548235"/>
+              <a:srgbClr val="7F7F7F"/>
             </a:solidFill>
           </a:ln>
           <a:effectLst/>
@@ -9017,11 +9327,11 @@
           <a:p>
             <a:pPr algn="ctr">
               <a:spcAft>
-                <a:spcPts val="200"/>
+                <a:spcPts val="0"/>
               </a:spcAft>
             </a:pPr>
             <a:r>
-              <a:rPr sz="800" b="1">
+              <a:rPr sz="850" b="1">
                 <a:solidFill>
                   <a:srgbClr val="000000"/>
                 </a:solidFill>
@@ -9032,18 +9342,36 @@
               <a:t>Context KV 1 · 2</a:t>
             </a:r>
           </a:p>
-        </p:txBody>
-      </p:sp>
-      <p:sp>
-        <p:nvSpPr>
-          <p:cNvPr id="61" name="Rectangle 60"/>
+          <a:p>
+            <a:pPr algn="ctr">
+              <a:spcAft>
+                <a:spcPts val="0"/>
+              </a:spcAft>
+            </a:pPr>
+            <a:r>
+              <a:rPr sz="700" b="1">
+                <a:solidFill>
+                  <a:srgbClr val="000000"/>
+                </a:solidFill>
+                <a:latin typeface="맑은 고딕"/>
+                <a:ea typeface="맑은 고딕"/>
+                <a:cs typeface="맑은 고딕"/>
+              </a:rPr>
+              <a:t/>
+            </a:r>
+          </a:p>
+        </p:txBody>
+      </p:sp>
+      <p:sp>
+        <p:nvSpPr>
+          <p:cNvPr id="64" name="Rectangle 63"/>
           <p:cNvSpPr/>
           <p:nvPr/>
         </p:nvSpPr>
         <p:spPr>
           <a:xfrm>
-            <a:off x="9208008" y="3154680"/>
-            <a:ext cx="1170432" cy="411480"/>
+            <a:off x="4800600" y="4937760"/>
+            <a:ext cx="1188720" cy="384048"/>
           </a:xfrm>
           <a:prstGeom prst="rect">
             <a:avLst/>
@@ -9083,7 +9411,7 @@
               </a:spcAft>
             </a:pPr>
             <a:r>
-              <a:rPr sz="800" b="1">
+              <a:rPr sz="850" b="1">
                 <a:solidFill>
                   <a:srgbClr val="000000"/>
                 </a:solidFill>
@@ -9091,31 +9419,31 @@
                 <a:ea typeface="맑은 고딕"/>
                 <a:cs typeface="맑은 고딕"/>
               </a:rPr>
-              <a:t>[제안] version · validity</a:t>
-            </a:r>
-          </a:p>
-        </p:txBody>
-      </p:sp>
-      <p:sp>
-        <p:nvSpPr>
-          <p:cNvPr id="62" name="Rectangle 61"/>
+              <a:t>version · validity</a:t>
+            </a:r>
+          </a:p>
+        </p:txBody>
+      </p:sp>
+      <p:sp>
+        <p:nvSpPr>
+          <p:cNvPr id="65" name="Rectangle 64"/>
           <p:cNvSpPr/>
           <p:nvPr/>
         </p:nvSpPr>
         <p:spPr>
           <a:xfrm>
-            <a:off x="10634472" y="3154680"/>
-            <a:ext cx="1170432" cy="411480"/>
+            <a:off x="6537959" y="4937760"/>
+            <a:ext cx="1188720" cy="384048"/>
           </a:xfrm>
           <a:prstGeom prst="rect">
             <a:avLst/>
           </a:prstGeom>
           <a:solidFill>
-            <a:srgbClr val="FFFFFF"/>
+            <a:srgbClr val="FBE5D6"/>
           </a:solidFill>
-          <a:ln w="10160">
+          <a:ln w="15240">
             <a:solidFill>
-              <a:srgbClr val="548235"/>
+              <a:srgbClr val="C55A11"/>
             </a:solidFill>
           </a:ln>
           <a:effectLst/>
@@ -9140,11 +9468,11 @@
           <a:p>
             <a:pPr algn="ctr">
               <a:spcAft>
-                <a:spcPts val="200"/>
+                <a:spcPts val="0"/>
               </a:spcAft>
             </a:pPr>
             <a:r>
-              <a:rPr sz="800" b="1">
+              <a:rPr sz="850" b="1">
                 <a:solidFill>
                   <a:srgbClr val="000000"/>
                 </a:solidFill>
@@ -9155,18 +9483,73 @@
               <a:t>KV별 재계산 위치</a:t>
             </a:r>
           </a:p>
-        </p:txBody>
-      </p:sp>
-      <p:sp>
-        <p:nvSpPr>
-          <p:cNvPr id="63" name="TextBox 62"/>
+          <a:p>
+            <a:pPr algn="ctr">
+              <a:spcAft>
+                <a:spcPts val="0"/>
+              </a:spcAft>
+            </a:pPr>
+            <a:r>
+              <a:rPr sz="700" b="1">
+                <a:solidFill>
+                  <a:srgbClr val="000000"/>
+                </a:solidFill>
+                <a:latin typeface="맑은 고딕"/>
+                <a:ea typeface="맑은 고딕"/>
+                <a:cs typeface="맑은 고딕"/>
+              </a:rPr>
+              <a:t/>
+            </a:r>
+          </a:p>
+        </p:txBody>
+      </p:sp>
+      <p:cxnSp>
+        <p:nvCxnSpPr>
+          <p:cNvPr id="66" name="Connector 65"/>
+          <p:cNvCxnSpPr/>
+          <p:nvPr/>
+        </p:nvCxnSpPr>
+        <p:spPr>
+          <a:xfrm>
+            <a:off x="1920240" y="4114800"/>
+            <a:ext cx="0" cy="822960"/>
+          </a:xfrm>
+          <a:prstGeom prst="line">
+            <a:avLst/>
+          </a:prstGeom>
+          <a:ln w="19050">
+            <a:solidFill>
+              <a:srgbClr val="C55A11"/>
+            </a:solidFill>
+            <a:prstDash val="dash"/>
+            <a:tailEnd type="triangle"/>
+          </a:ln>
+        </p:spPr>
+        <p:style>
+          <a:lnRef idx="2">
+            <a:schemeClr val="accent1"/>
+          </a:lnRef>
+          <a:fillRef idx="0">
+            <a:schemeClr val="accent1"/>
+          </a:fillRef>
+          <a:effectRef idx="1">
+            <a:schemeClr val="accent1"/>
+          </a:effectRef>
+          <a:fontRef idx="minor">
+            <a:schemeClr val="tx1"/>
+          </a:fontRef>
+        </p:style>
+      </p:cxnSp>
+      <p:sp>
+        <p:nvSpPr>
+          <p:cNvPr id="67" name="TextBox 66"/>
           <p:cNvSpPr txBox="1"/>
           <p:nvPr/>
         </p:nvSpPr>
         <p:spPr>
           <a:xfrm>
-            <a:off x="6309360" y="3703320"/>
-            <a:ext cx="5486400" cy="228600"/>
+            <a:off x="1965960" y="4434840"/>
+            <a:ext cx="822960" cy="201168"/>
           </a:xfrm>
           <a:prstGeom prst="rect">
             <a:avLst/>
@@ -9185,28 +9568,183 @@
               </a:spcAft>
             </a:pPr>
             <a:r>
-              <a:rPr sz="850" b="1">
+              <a:rPr sz="750" b="0">
                 <a:solidFill>
-                  <a:srgbClr val="548235"/>
+                  <a:srgbClr val="C55A11"/>
                 </a:solidFill>
                 <a:latin typeface="맑은 고딕"/>
                 <a:ea typeface="맑은 고딕"/>
                 <a:cs typeface="맑은 고딕"/>
               </a:rPr>
-              <a:t>KV Repository (공유 저장소 · KV 위치는 DP1: HBM · DRAM · CXL · SSD)</a:t>
-            </a:r>
-          </a:p>
-        </p:txBody>
-      </p:sp>
-      <p:sp>
-        <p:nvSpPr>
-          <p:cNvPr id="64" name="Rectangle 63"/>
+              <a:t>write</a:t>
+            </a:r>
+          </a:p>
+        </p:txBody>
+      </p:sp>
+      <p:cxnSp>
+        <p:nvCxnSpPr>
+          <p:cNvPr id="68" name="Connector 67"/>
+          <p:cNvCxnSpPr/>
+          <p:nvPr/>
+        </p:nvCxnSpPr>
+        <p:spPr>
+          <a:xfrm>
+            <a:off x="7132320" y="4114800"/>
+            <a:ext cx="0" cy="822960"/>
+          </a:xfrm>
+          <a:prstGeom prst="line">
+            <a:avLst/>
+          </a:prstGeom>
+          <a:ln w="19050">
+            <a:solidFill>
+              <a:srgbClr val="C55A11"/>
+            </a:solidFill>
+            <a:prstDash val="dash"/>
+            <a:tailEnd type="triangle"/>
+          </a:ln>
+        </p:spPr>
+        <p:style>
+          <a:lnRef idx="2">
+            <a:schemeClr val="accent1"/>
+          </a:lnRef>
+          <a:fillRef idx="0">
+            <a:schemeClr val="accent1"/>
+          </a:fillRef>
+          <a:effectRef idx="1">
+            <a:schemeClr val="accent1"/>
+          </a:effectRef>
+          <a:fontRef idx="minor">
+            <a:schemeClr val="tx1"/>
+          </a:fontRef>
+        </p:style>
+      </p:cxnSp>
+      <p:sp>
+        <p:nvSpPr>
+          <p:cNvPr id="69" name="TextBox 68"/>
+          <p:cNvSpPr txBox="1"/>
+          <p:nvPr/>
+        </p:nvSpPr>
+        <p:spPr>
+          <a:xfrm>
+            <a:off x="7178040" y="4434840"/>
+            <a:ext cx="822960" cy="201168"/>
+          </a:xfrm>
+          <a:prstGeom prst="rect">
+            <a:avLst/>
+          </a:prstGeom>
+          <a:noFill/>
+        </p:spPr>
+        <p:txBody>
+          <a:bodyPr wrap="square" anchor="t" lIns="45720" rIns="45720" tIns="27432" bIns="27432">
+            <a:spAutoFit/>
+          </a:bodyPr>
+          <a:lstStyle/>
+          <a:p>
+            <a:pPr algn="l">
+              <a:spcAft>
+                <a:spcPts val="200"/>
+              </a:spcAft>
+            </a:pPr>
+            <a:r>
+              <a:rPr sz="750" b="0">
+                <a:solidFill>
+                  <a:srgbClr val="C55A11"/>
+                </a:solidFill>
+                <a:latin typeface="맑은 고딕"/>
+                <a:ea typeface="맑은 고딕"/>
+                <a:cs typeface="맑은 고딕"/>
+              </a:rPr>
+              <a:t>write</a:t>
+            </a:r>
+          </a:p>
+        </p:txBody>
+      </p:sp>
+      <p:cxnSp>
+        <p:nvCxnSpPr>
+          <p:cNvPr id="70" name="Connector 69"/>
+          <p:cNvCxnSpPr/>
+          <p:nvPr/>
+        </p:nvCxnSpPr>
+        <p:spPr>
+          <a:xfrm flipV="1">
+            <a:off x="3657599" y="4114800"/>
+            <a:ext cx="0" cy="822960"/>
+          </a:xfrm>
+          <a:prstGeom prst="line">
+            <a:avLst/>
+          </a:prstGeom>
+          <a:ln w="15240">
+            <a:solidFill>
+              <a:srgbClr val="7F7F7F"/>
+            </a:solidFill>
+            <a:tailEnd type="triangle"/>
+          </a:ln>
+        </p:spPr>
+        <p:style>
+          <a:lnRef idx="2">
+            <a:schemeClr val="accent1"/>
+          </a:lnRef>
+          <a:fillRef idx="0">
+            <a:schemeClr val="accent1"/>
+          </a:fillRef>
+          <a:effectRef idx="1">
+            <a:schemeClr val="accent1"/>
+          </a:effectRef>
+          <a:fontRef idx="minor">
+            <a:schemeClr val="tx1"/>
+          </a:fontRef>
+        </p:style>
+      </p:cxnSp>
+      <p:sp>
+        <p:nvSpPr>
+          <p:cNvPr id="71" name="TextBox 70"/>
+          <p:cNvSpPr txBox="1"/>
+          <p:nvPr/>
+        </p:nvSpPr>
+        <p:spPr>
+          <a:xfrm>
+            <a:off x="3703320" y="4434840"/>
+            <a:ext cx="822960" cy="201168"/>
+          </a:xfrm>
+          <a:prstGeom prst="rect">
+            <a:avLst/>
+          </a:prstGeom>
+          <a:noFill/>
+        </p:spPr>
+        <p:txBody>
+          <a:bodyPr wrap="square" anchor="t" lIns="45720" rIns="45720" tIns="27432" bIns="27432">
+            <a:spAutoFit/>
+          </a:bodyPr>
+          <a:lstStyle/>
+          <a:p>
+            <a:pPr algn="l">
+              <a:spcAft>
+                <a:spcPts val="200"/>
+              </a:spcAft>
+            </a:pPr>
+            <a:r>
+              <a:rPr sz="750" b="0">
+                <a:solidFill>
+                  <a:srgbClr val="595959"/>
+                </a:solidFill>
+                <a:latin typeface="맑은 고딕"/>
+                <a:ea typeface="맑은 고딕"/>
+                <a:cs typeface="맑은 고딕"/>
+              </a:rPr>
+              <a:t>read</a:t>
+            </a:r>
+          </a:p>
+        </p:txBody>
+      </p:sp>
+      <p:sp>
+        <p:nvSpPr>
+          <p:cNvPr id="72" name="Rectangle 71"/>
           <p:cNvSpPr/>
           <p:nvPr/>
         </p:nvSpPr>
         <p:spPr>
           <a:xfrm>
-            <a:off x="11475720" y="3721608"/>
+            <a:off x="10881360" y="4690872"/>
             <a:ext cx="384048" cy="182880"/>
           </a:xfrm>
           <a:prstGeom prst="rect">
@@ -9259,53 +9797,62 @@
           </a:p>
         </p:txBody>
       </p:sp>
-      <p:cxnSp>
-        <p:nvCxnSpPr>
-          <p:cNvPr id="65" name="Connector 64"/>
-          <p:cNvCxnSpPr/>
-          <p:nvPr/>
-        </p:nvCxnSpPr>
-        <p:spPr>
-          <a:xfrm>
-            <a:off x="6940296" y="2377440"/>
-            <a:ext cx="0" cy="777240"/>
-          </a:xfrm>
-          <a:prstGeom prst="line">
-            <a:avLst/>
-          </a:prstGeom>
-          <a:ln w="16510">
+      <p:sp>
+        <p:nvSpPr>
+          <p:cNvPr id="73" name="Rectangle 72"/>
+          <p:cNvSpPr/>
+          <p:nvPr/>
+        </p:nvSpPr>
+        <p:spPr>
+          <a:xfrm>
+            <a:off x="6446520" y="5559552"/>
+            <a:ext cx="4892040" cy="841248"/>
+          </a:xfrm>
+          <a:prstGeom prst="rect">
+            <a:avLst/>
+          </a:prstGeom>
+          <a:solidFill>
+            <a:srgbClr val="FEF4EC"/>
+          </a:solidFill>
+          <a:ln w="19050">
             <a:solidFill>
               <a:srgbClr val="C55A11"/>
             </a:solidFill>
-            <a:prstDash val="dash"/>
-            <a:tailEnd type="triangle"/>
           </a:ln>
+          <a:effectLst/>
         </p:spPr>
         <p:style>
-          <a:lnRef idx="2">
+          <a:lnRef idx="1">
             <a:schemeClr val="accent1"/>
           </a:lnRef>
-          <a:fillRef idx="0">
+          <a:fillRef idx="3">
             <a:schemeClr val="accent1"/>
           </a:fillRef>
-          <a:effectRef idx="1">
+          <a:effectRef idx="2">
             <a:schemeClr val="accent1"/>
           </a:effectRef>
           <a:fontRef idx="minor">
-            <a:schemeClr val="tx1"/>
+            <a:schemeClr val="lt1"/>
           </a:fontRef>
         </p:style>
-      </p:cxnSp>
-      <p:sp>
-        <p:nvSpPr>
-          <p:cNvPr id="66" name="TextBox 65"/>
+        <p:txBody>
+          <a:bodyPr rtlCol="0" anchor="ctr"/>
+          <a:lstStyle/>
+          <a:p>
+            <a:pPr algn="ctr"/>
+          </a:p>
+        </p:txBody>
+      </p:sp>
+      <p:sp>
+        <p:nvSpPr>
+          <p:cNvPr id="74" name="TextBox 73"/>
           <p:cNvSpPr txBox="1"/>
           <p:nvPr/>
         </p:nvSpPr>
         <p:spPr>
           <a:xfrm>
-            <a:off x="6995160" y="2743200"/>
-            <a:ext cx="914400" cy="201168"/>
+            <a:off x="6492240" y="5568696"/>
+            <a:ext cx="3657600" cy="201168"/>
           </a:xfrm>
           <a:prstGeom prst="rect">
             <a:avLst/>
@@ -9324,7 +9871,7 @@
               </a:spcAft>
             </a:pPr>
             <a:r>
-              <a:rPr sz="700" b="0">
+              <a:rPr sz="800" b="1">
                 <a:solidFill>
                   <a:srgbClr val="C55A11"/>
                 </a:solidFill>
@@ -9332,186 +9879,31 @@
                 <a:ea typeface="맑은 고딕"/>
                 <a:cs typeface="맑은 고딕"/>
               </a:rPr>
-              <a:t>write: 대표 Query</a:t>
-            </a:r>
-          </a:p>
-        </p:txBody>
-      </p:sp>
-      <p:cxnSp>
-        <p:nvCxnSpPr>
-          <p:cNvPr id="67" name="Connector 66"/>
-          <p:cNvCxnSpPr/>
-          <p:nvPr/>
-        </p:nvCxnSpPr>
-        <p:spPr>
-          <a:xfrm flipV="1">
-            <a:off x="8366760" y="2377440"/>
-            <a:ext cx="0" cy="777240"/>
-          </a:xfrm>
-          <a:prstGeom prst="line">
-            <a:avLst/>
-          </a:prstGeom>
-          <a:ln w="16510">
+              <a:t>서빙 경로 (요청 1…N마다, 동기)</a:t>
+            </a:r>
+          </a:p>
+        </p:txBody>
+      </p:sp>
+      <p:sp>
+        <p:nvSpPr>
+          <p:cNvPr id="75" name="Rectangle 74"/>
+          <p:cNvSpPr/>
+          <p:nvPr/>
+        </p:nvSpPr>
+        <p:spPr>
+          <a:xfrm>
+            <a:off x="6537959" y="5833872"/>
+            <a:ext cx="1188720" cy="457200"/>
+          </a:xfrm>
+          <a:prstGeom prst="rect">
+            <a:avLst/>
+          </a:prstGeom>
+          <a:solidFill>
+            <a:srgbClr val="F0F1F3"/>
+          </a:solidFill>
+          <a:ln w="15240">
             <a:solidFill>
-              <a:srgbClr val="548235"/>
-            </a:solidFill>
-            <a:tailEnd type="triangle"/>
-          </a:ln>
-        </p:spPr>
-        <p:style>
-          <a:lnRef idx="2">
-            <a:schemeClr val="accent1"/>
-          </a:lnRef>
-          <a:fillRef idx="0">
-            <a:schemeClr val="accent1"/>
-          </a:fillRef>
-          <a:effectRef idx="1">
-            <a:schemeClr val="accent1"/>
-          </a:effectRef>
-          <a:fontRef idx="minor">
-            <a:schemeClr val="tx1"/>
-          </a:fontRef>
-        </p:style>
-      </p:cxnSp>
-      <p:sp>
-        <p:nvSpPr>
-          <p:cNvPr id="68" name="TextBox 67"/>
-          <p:cNvSpPr txBox="1"/>
-          <p:nvPr/>
-        </p:nvSpPr>
-        <p:spPr>
-          <a:xfrm>
-            <a:off x="8412480" y="2743200"/>
-            <a:ext cx="914400" cy="201168"/>
-          </a:xfrm>
-          <a:prstGeom prst="rect">
-            <a:avLst/>
-          </a:prstGeom>
-          <a:noFill/>
-        </p:spPr>
-        <p:txBody>
-          <a:bodyPr wrap="square" anchor="t" lIns="45720" rIns="45720" tIns="27432" bIns="27432">
-            <a:spAutoFit/>
-          </a:bodyPr>
-          <a:lstStyle/>
-          <a:p>
-            <a:pPr algn="l">
-              <a:spcAft>
-                <a:spcPts val="200"/>
-              </a:spcAft>
-            </a:pPr>
-            <a:r>
-              <a:rPr sz="700" b="0">
-                <a:solidFill>
-                  <a:srgbClr val="548235"/>
-                </a:solidFill>
-                <a:latin typeface="맑은 고딕"/>
-                <a:ea typeface="맑은 고딕"/>
-                <a:cs typeface="맑은 고딕"/>
-              </a:rPr>
-              <a:t>read: Context KV</a:t>
-            </a:r>
-          </a:p>
-        </p:txBody>
-      </p:sp>
-      <p:cxnSp>
-        <p:nvCxnSpPr>
-          <p:cNvPr id="69" name="Connector 68"/>
-          <p:cNvCxnSpPr/>
-          <p:nvPr/>
-        </p:nvCxnSpPr>
-        <p:spPr>
-          <a:xfrm>
-            <a:off x="11219688" y="2377440"/>
-            <a:ext cx="0" cy="777240"/>
-          </a:xfrm>
-          <a:prstGeom prst="line">
-            <a:avLst/>
-          </a:prstGeom>
-          <a:ln w="16510">
-            <a:solidFill>
-              <a:srgbClr val="C55A11"/>
-            </a:solidFill>
-            <a:prstDash val="dash"/>
-            <a:tailEnd type="triangle"/>
-          </a:ln>
-        </p:spPr>
-        <p:style>
-          <a:lnRef idx="2">
-            <a:schemeClr val="accent1"/>
-          </a:lnRef>
-          <a:fillRef idx="0">
-            <a:schemeClr val="accent1"/>
-          </a:fillRef>
-          <a:effectRef idx="1">
-            <a:schemeClr val="accent1"/>
-          </a:effectRef>
-          <a:fontRef idx="minor">
-            <a:schemeClr val="tx1"/>
-          </a:fontRef>
-        </p:style>
-      </p:cxnSp>
-      <p:sp>
-        <p:nvSpPr>
-          <p:cNvPr id="70" name="TextBox 69"/>
-          <p:cNvSpPr txBox="1"/>
-          <p:nvPr/>
-        </p:nvSpPr>
-        <p:spPr>
-          <a:xfrm>
-            <a:off x="10241280" y="2743200"/>
-            <a:ext cx="960120" cy="201168"/>
-          </a:xfrm>
-          <a:prstGeom prst="rect">
-            <a:avLst/>
-          </a:prstGeom>
-          <a:noFill/>
-        </p:spPr>
-        <p:txBody>
-          <a:bodyPr wrap="square" anchor="t" lIns="45720" rIns="45720" tIns="27432" bIns="27432">
-            <a:spAutoFit/>
-          </a:bodyPr>
-          <a:lstStyle/>
-          <a:p>
-            <a:pPr algn="r">
-              <a:spcAft>
-                <a:spcPts val="200"/>
-              </a:spcAft>
-            </a:pPr>
-            <a:r>
-              <a:rPr sz="700" b="0">
-                <a:solidFill>
-                  <a:srgbClr val="C55A11"/>
-                </a:solidFill>
-                <a:latin typeface="맑은 고딕"/>
-                <a:ea typeface="맑은 고딕"/>
-                <a:cs typeface="맑은 고딕"/>
-              </a:rPr>
-              <a:t>write: 재계산 위치</a:t>
-            </a:r>
-          </a:p>
-        </p:txBody>
-      </p:sp>
-      <p:sp>
-        <p:nvSpPr>
-          <p:cNvPr id="71" name="Rectangle 70"/>
-          <p:cNvSpPr/>
-          <p:nvPr/>
-        </p:nvSpPr>
-        <p:spPr>
-          <a:xfrm>
-            <a:off x="6245352" y="4526280"/>
-            <a:ext cx="5669280" cy="914400"/>
-          </a:xfrm>
-          <a:prstGeom prst="rect">
-            <a:avLst/>
-          </a:prstGeom>
-          <a:solidFill>
-            <a:srgbClr val="F7FAFD"/>
-          </a:solidFill>
-          <a:ln w="12700">
-            <a:solidFill>
-              <a:srgbClr val="2E75B6"/>
+              <a:srgbClr val="7F7F7F"/>
             </a:solidFill>
           </a:ln>
           <a:effectLst/>
@@ -9531,52 +9923,6 @@
           </a:fontRef>
         </p:style>
         <p:txBody>
-          <a:bodyPr rtlCol="0" anchor="ctr"/>
-          <a:lstStyle/>
-          <a:p>
-            <a:pPr algn="ctr"/>
-          </a:p>
-        </p:txBody>
-      </p:sp>
-      <p:sp>
-        <p:nvSpPr>
-          <p:cNvPr id="72" name="Rectangle 71"/>
-          <p:cNvSpPr/>
-          <p:nvPr/>
-        </p:nvSpPr>
-        <p:spPr>
-          <a:xfrm>
-            <a:off x="6355080" y="4663440"/>
-            <a:ext cx="1463040" cy="502920"/>
-          </a:xfrm>
-          <a:prstGeom prst="rect">
-            <a:avLst/>
-          </a:prstGeom>
-          <a:solidFill>
-            <a:srgbClr val="F0F1F3"/>
-          </a:solidFill>
-          <a:ln w="10160">
-            <a:solidFill>
-              <a:srgbClr val="7F7F7F"/>
-            </a:solidFill>
-          </a:ln>
-          <a:effectLst/>
-        </p:spPr>
-        <p:style>
-          <a:lnRef idx="1">
-            <a:schemeClr val="accent1"/>
-          </a:lnRef>
-          <a:fillRef idx="3">
-            <a:schemeClr val="accent1"/>
-          </a:fillRef>
-          <a:effectRef idx="2">
-            <a:schemeClr val="accent1"/>
-          </a:effectRef>
-          <a:fontRef idx="minor">
-            <a:schemeClr val="lt1"/>
-          </a:fontRef>
-        </p:style>
-        <p:txBody>
           <a:bodyPr rtlCol="0" anchor="ctr" wrap="square" lIns="27432" rIns="27432" tIns="27432" bIns="27432"/>
           <a:lstStyle/>
           <a:p>
@@ -9586,7 +9932,7 @@
               </a:spcAft>
             </a:pPr>
             <a:r>
-              <a:rPr sz="800" b="1">
+              <a:rPr sz="850" b="1">
                 <a:solidFill>
                   <a:srgbClr val="000000"/>
                 </a:solidFill>
@@ -9612,31 +9958,31 @@
                 <a:ea typeface="맑은 고딕"/>
                 <a:cs typeface="맑은 고딕"/>
               </a:rPr>
-              <a:t>실제 Query (서빙 시)</a:t>
-            </a:r>
-          </a:p>
-        </p:txBody>
-      </p:sp>
-      <p:sp>
-        <p:nvSpPr>
-          <p:cNvPr id="73" name="Rectangle 72"/>
+              <a:t>실제 Query</a:t>
+            </a:r>
+          </a:p>
+        </p:txBody>
+      </p:sp>
+      <p:sp>
+        <p:nvSpPr>
+          <p:cNvPr id="76" name="Rectangle 75"/>
           <p:cNvSpPr/>
           <p:nvPr/>
         </p:nvSpPr>
         <p:spPr>
           <a:xfrm>
-            <a:off x="8412480" y="4663440"/>
-            <a:ext cx="1828800" cy="502920"/>
+            <a:off x="8275319" y="5833872"/>
+            <a:ext cx="1188720" cy="457200"/>
           </a:xfrm>
           <a:prstGeom prst="rect">
             <a:avLst/>
           </a:prstGeom>
           <a:solidFill>
-            <a:srgbClr val="FFFFFF"/>
+            <a:srgbClr val="F0F1F3"/>
           </a:solidFill>
           <a:ln w="15240">
             <a:solidFill>
-              <a:srgbClr val="2E75B6"/>
+              <a:srgbClr val="7F7F7F"/>
             </a:solidFill>
           </a:ln>
           <a:effectLst/>
@@ -9691,21 +10037,21 @@
                 <a:ea typeface="맑은 고딕"/>
                 <a:cs typeface="맑은 고딕"/>
               </a:rPr>
-              <a:t>재계산 위치 조회 → 선정 토큰만 재계산</a:t>
-            </a:r>
-          </a:p>
-        </p:txBody>
-      </p:sp>
-      <p:sp>
-        <p:nvSpPr>
-          <p:cNvPr id="74" name="Rectangle 73"/>
+              <a:t>재계산 위치 조회 후 재계산</a:t>
+            </a:r>
+          </a:p>
+        </p:txBody>
+      </p:sp>
+      <p:sp>
+        <p:nvSpPr>
+          <p:cNvPr id="77" name="Rectangle 76"/>
           <p:cNvSpPr/>
           <p:nvPr/>
         </p:nvSpPr>
         <p:spPr>
           <a:xfrm>
-            <a:off x="10698480" y="4663440"/>
-            <a:ext cx="1143000" cy="502920"/>
+            <a:off x="10012680" y="5833872"/>
+            <a:ext cx="1188720" cy="457200"/>
           </a:xfrm>
           <a:prstGeom prst="rect">
             <a:avLst/>
@@ -9713,7 +10059,7 @@
           <a:solidFill>
             <a:srgbClr val="F0F1F3"/>
           </a:solidFill>
-          <a:ln w="10160">
+          <a:ln w="15240">
             <a:solidFill>
               <a:srgbClr val="7F7F7F"/>
             </a:solidFill>
@@ -9744,7 +10090,7 @@
               </a:spcAft>
             </a:pPr>
             <a:r>
-              <a:rPr sz="800" b="1">
+              <a:rPr sz="850" b="1">
                 <a:solidFill>
                   <a:srgbClr val="000000"/>
                 </a:solidFill>
@@ -9777,13 +10123,13 @@
       </p:sp>
       <p:sp>
         <p:nvSpPr>
-          <p:cNvPr id="75" name="Rectangle 74"/>
+          <p:cNvPr id="78" name="Rectangle 77"/>
           <p:cNvSpPr/>
           <p:nvPr/>
         </p:nvSpPr>
         <p:spPr>
           <a:xfrm>
-            <a:off x="10058400" y="4572000"/>
+            <a:off x="9098280" y="5742432"/>
             <a:ext cx="384048" cy="182880"/>
           </a:xfrm>
           <a:prstGeom prst="rect">
@@ -9838,21 +10184,21 @@
       </p:sp>
       <p:cxnSp>
         <p:nvCxnSpPr>
-          <p:cNvPr id="76" name="Connector 75"/>
+          <p:cNvPr id="79" name="Connector 78"/>
           <p:cNvCxnSpPr/>
           <p:nvPr/>
         </p:nvCxnSpPr>
         <p:spPr>
           <a:xfrm>
-            <a:off x="7818120" y="4919472"/>
-            <a:ext cx="594360" cy="0"/>
+            <a:off x="7726679" y="6062472"/>
+            <a:ext cx="548640" cy="0"/>
           </a:xfrm>
           <a:prstGeom prst="line">
             <a:avLst/>
           </a:prstGeom>
           <a:ln w="19050">
             <a:solidFill>
-              <a:srgbClr val="2E75B6"/>
+              <a:srgbClr val="7F7F7F"/>
             </a:solidFill>
             <a:tailEnd type="triangle"/>
           </a:ln>
@@ -9874,21 +10220,21 @@
       </p:cxnSp>
       <p:cxnSp>
         <p:nvCxnSpPr>
-          <p:cNvPr id="77" name="Connector 76"/>
+          <p:cNvPr id="80" name="Connector 79"/>
           <p:cNvCxnSpPr/>
           <p:nvPr/>
         </p:nvCxnSpPr>
         <p:spPr>
           <a:xfrm>
-            <a:off x="10241280" y="4919472"/>
-            <a:ext cx="457200" cy="0"/>
+            <a:off x="9464040" y="6062472"/>
+            <a:ext cx="548640" cy="0"/>
           </a:xfrm>
           <a:prstGeom prst="line">
             <a:avLst/>
           </a:prstGeom>
           <a:ln w="19050">
             <a:solidFill>
-              <a:srgbClr val="2E75B6"/>
+              <a:srgbClr val="7F7F7F"/>
             </a:solidFill>
             <a:tailEnd type="triangle"/>
           </a:ln>
@@ -9908,16 +10254,52 @@
           </a:fontRef>
         </p:style>
       </p:cxnSp>
-      <p:sp>
-        <p:nvSpPr>
-          <p:cNvPr id="78" name="TextBox 77"/>
+      <p:cxnSp>
+        <p:nvCxnSpPr>
+          <p:cNvPr id="81" name="Connector 80"/>
+          <p:cNvCxnSpPr/>
+          <p:nvPr/>
+        </p:nvCxnSpPr>
+        <p:spPr>
+          <a:xfrm>
+            <a:off x="8869680" y="5394960"/>
+            <a:ext cx="0" cy="438912"/>
+          </a:xfrm>
+          <a:prstGeom prst="line">
+            <a:avLst/>
+          </a:prstGeom>
+          <a:ln w="22860">
+            <a:solidFill>
+              <a:srgbClr val="C55A11"/>
+            </a:solidFill>
+            <a:tailEnd type="triangle"/>
+          </a:ln>
+        </p:spPr>
+        <p:style>
+          <a:lnRef idx="2">
+            <a:schemeClr val="accent1"/>
+          </a:lnRef>
+          <a:fillRef idx="0">
+            <a:schemeClr val="accent1"/>
+          </a:fillRef>
+          <a:effectRef idx="1">
+            <a:schemeClr val="accent1"/>
+          </a:effectRef>
+          <a:fontRef idx="minor">
+            <a:schemeClr val="tx1"/>
+          </a:fontRef>
+        </p:style>
+      </p:cxnSp>
+      <p:sp>
+        <p:nvSpPr>
+          <p:cNvPr id="82" name="TextBox 81"/>
           <p:cNvSpPr txBox="1"/>
           <p:nvPr/>
         </p:nvSpPr>
         <p:spPr>
           <a:xfrm>
-            <a:off x="7772400" y="4709160"/>
-            <a:ext cx="731520" cy="201168"/>
+            <a:off x="8961119" y="5029200"/>
+            <a:ext cx="2377440" cy="201168"/>
           </a:xfrm>
           <a:prstGeom prst="rect">
             <a:avLst/>
@@ -9928,6 +10310,248 @@
           <a:bodyPr wrap="square" anchor="t" lIns="45720" rIns="45720" tIns="27432" bIns="27432">
             <a:spAutoFit/>
           </a:bodyPr>
+          <a:lstStyle/>
+          <a:p>
+            <a:pPr algn="l">
+              <a:spcAft>
+                <a:spcPts val="200"/>
+              </a:spcAft>
+            </a:pPr>
+            <a:r>
+              <a:rPr sz="700" b="0">
+                <a:solidFill>
+                  <a:srgbClr val="C55A11"/>
+                </a:solidFill>
+                <a:latin typeface="맑은 고딕"/>
+                <a:ea typeface="맑은 고딕"/>
+                <a:cs typeface="맑은 고딕"/>
+              </a:rPr>
+              <a:t>read (동기): 재계산 위치 · Context KV</a:t>
+            </a:r>
+          </a:p>
+        </p:txBody>
+      </p:sp>
+      <p:sp>
+        <p:nvSpPr>
+          <p:cNvPr id="83" name="Right Arrow 82"/>
+          <p:cNvSpPr/>
+          <p:nvPr/>
+        </p:nvSpPr>
+        <p:spPr>
+          <a:xfrm>
+            <a:off x="1280160" y="5623560"/>
+            <a:ext cx="320040" cy="228600"/>
+          </a:xfrm>
+          <a:prstGeom prst="rightArrow">
+            <a:avLst/>
+          </a:prstGeom>
+          <a:solidFill>
+            <a:srgbClr val="2E75B6"/>
+          </a:solidFill>
+          <a:ln>
+            <a:noFill/>
+          </a:ln>
+          <a:effectLst/>
+        </p:spPr>
+        <p:style>
+          <a:lnRef idx="1">
+            <a:schemeClr val="accent1"/>
+          </a:lnRef>
+          <a:fillRef idx="3">
+            <a:schemeClr val="accent1"/>
+          </a:fillRef>
+          <a:effectRef idx="2">
+            <a:schemeClr val="accent1"/>
+          </a:effectRef>
+          <a:fontRef idx="minor">
+            <a:schemeClr val="lt1"/>
+          </a:fontRef>
+        </p:style>
+        <p:txBody>
+          <a:bodyPr rtlCol="0" anchor="ctr"/>
+          <a:lstStyle/>
+          <a:p>
+            <a:pPr algn="ctr"/>
+          </a:p>
+        </p:txBody>
+      </p:sp>
+      <p:sp>
+        <p:nvSpPr>
+          <p:cNvPr id="84" name="TextBox 83"/>
+          <p:cNvSpPr txBox="1"/>
+          <p:nvPr/>
+        </p:nvSpPr>
+        <p:spPr>
+          <a:xfrm>
+            <a:off x="1645920" y="5532120"/>
+            <a:ext cx="4709160" cy="868680"/>
+          </a:xfrm>
+          <a:prstGeom prst="rect">
+            <a:avLst/>
+          </a:prstGeom>
+          <a:noFill/>
+        </p:spPr>
+        <p:txBody>
+          <a:bodyPr wrap="square" anchor="t" lIns="45720" rIns="45720" tIns="27432" bIns="27432">
+            <a:spAutoFit/>
+          </a:bodyPr>
+          <a:lstStyle/>
+          <a:p>
+            <a:pPr algn="l">
+              <a:spcAft>
+                <a:spcPts val="200"/>
+              </a:spcAft>
+            </a:pPr>
+            <a:r>
+              <a:rPr sz="950" b="1">
+                <a:solidFill>
+                  <a:srgbClr val="0066FF"/>
+                </a:solidFill>
+                <a:latin typeface="맑은 고딕"/>
+                <a:ea typeface="맑은 고딕"/>
+                <a:cs typeface="맑은 고딕"/>
+              </a:rPr>
+              <a:t>흐름 순서(QS/UQM → AM → KVS → RTS → SR)는 두 안이 동일</a:t>
+            </a:r>
+          </a:p>
+          <a:p>
+            <a:pPr algn="l">
+              <a:spcAft>
+                <a:spcPts val="200"/>
+              </a:spcAft>
+            </a:pPr>
+            <a:r>
+              <a:rPr sz="950" b="0">
+                <a:solidFill>
+                  <a:srgbClr val="404040"/>
+                </a:solidFill>
+                <a:latin typeface="맑은 고딕"/>
+                <a:ea typeface="맑은 고딕"/>
+                <a:cs typeface="맑은 고딕"/>
+              </a:rPr>
+              <a:t>달라지는 것 ① 필터를 잇는 connector: Pipe → 공유 Repository  ② 실행 시점: 요청마다 → 사전 1회 + 서빙 시 조회</a:t>
+            </a:r>
+          </a:p>
+        </p:txBody>
+      </p:sp>
+      <p:sp>
+        <p:nvSpPr>
+          <p:cNvPr id="85" name="TextBox 84"/>
+          <p:cNvSpPr txBox="1"/>
+          <p:nvPr/>
+        </p:nvSpPr>
+        <p:spPr>
+          <a:xfrm>
+            <a:off x="5349240" y="6583680"/>
+            <a:ext cx="621792" cy="237744"/>
+          </a:xfrm>
+          <a:prstGeom prst="rect">
+            <a:avLst/>
+          </a:prstGeom>
+          <a:noFill/>
+        </p:spPr>
+        <p:txBody>
+          <a:bodyPr wrap="square" anchor="t" lIns="45720" rIns="45720" tIns="27432" bIns="27432">
+            <a:spAutoFit/>
+          </a:bodyPr>
+          <a:lstStyle/>
+          <a:p>
+            <a:pPr algn="r">
+              <a:spcAft>
+                <a:spcPts val="200"/>
+              </a:spcAft>
+            </a:pPr>
+            <a:r>
+              <a:rPr sz="1000" b="0">
+                <a:solidFill>
+                  <a:srgbClr val="7F7F7F"/>
+                </a:solidFill>
+                <a:latin typeface="맑은 고딕"/>
+                <a:ea typeface="맑은 고딕"/>
+                <a:cs typeface="맑은 고딕"/>
+              </a:rPr>
+              <a:t>2</a:t>
+            </a:r>
+          </a:p>
+        </p:txBody>
+      </p:sp>
+    </p:spTree>
+  </p:cSld>
+  <p:clrMapOvr>
+    <a:masterClrMapping/>
+  </p:clrMapOvr>
+</p:sld>
+</file>
+
+<file path=ppt/slides/slide3.xml><?xml version="1.0" encoding="utf-8"?>
+<p:sld xmlns:a="http://schemas.openxmlformats.org/drawingml/2006/main" xmlns:p="http://schemas.openxmlformats.org/presentationml/2006/main" xmlns:r="http://schemas.openxmlformats.org/officeDocument/2006/relationships">
+  <p:cSld>
+    <p:spTree>
+      <p:nvGrpSpPr>
+        <p:cNvPr id="1" name=""/>
+        <p:cNvGrpSpPr/>
+        <p:nvPr/>
+      </p:nvGrpSpPr>
+      <p:grpSpPr/>
+      <p:sp>
+        <p:nvSpPr>
+          <p:cNvPr id="2" name="Title 1"/>
+          <p:cNvSpPr>
+            <a:spLocks noGrp="1"/>
+          </p:cNvSpPr>
+          <p:nvPr>
+            <p:ph type="title"/>
+          </p:nvPr>
+        </p:nvSpPr>
+        <p:spPr/>
+        <p:txBody>
+          <a:bodyPr/>
+          <a:lstStyle/>
+          <a:p>
+            <a:r>
+              <a:t>DP3. KV 캐시 재사용 구조 - 설계 (흐름은 같고 무엇이 다른가)</a:t>
+            </a:r>
+          </a:p>
+        </p:txBody>
+      </p:sp>
+      <p:sp>
+        <p:nvSpPr>
+          <p:cNvPr id="3" name="Chevron 2"/>
+          <p:cNvSpPr/>
+          <p:nvPr/>
+        </p:nvSpPr>
+        <p:spPr>
+          <a:xfrm>
+            <a:off x="7522768" y="137160"/>
+            <a:ext cx="1031443" cy="357530"/>
+          </a:xfrm>
+          <a:prstGeom prst="chevron">
+            <a:avLst/>
+          </a:prstGeom>
+          <a:solidFill>
+            <a:srgbClr val="BFBFBF"/>
+          </a:solidFill>
+          <a:ln>
+            <a:noFill/>
+          </a:ln>
+          <a:effectLst/>
+        </p:spPr>
+        <p:style>
+          <a:lnRef idx="1">
+            <a:schemeClr val="accent1"/>
+          </a:lnRef>
+          <a:fillRef idx="3">
+            <a:schemeClr val="accent1"/>
+          </a:fillRef>
+          <a:effectRef idx="2">
+            <a:schemeClr val="accent1"/>
+          </a:effectRef>
+          <a:fontRef idx="minor">
+            <a:schemeClr val="lt1"/>
+          </a:fontRef>
+        </p:style>
+        <p:txBody>
+          <a:bodyPr rtlCol="0" anchor="ctr" wrap="square" lIns="0" rIns="0" tIns="27432" bIns="27432"/>
           <a:lstStyle/>
           <a:p>
             <a:pPr algn="ctr">
@@ -9936,7 +10560,881 @@
               </a:spcAft>
             </a:pPr>
             <a:r>
-              <a:rPr sz="700" b="0">
+              <a:rPr sz="1000" b="1">
+                <a:solidFill>
+                  <a:srgbClr val="FFFFFF"/>
+                </a:solidFill>
+                <a:latin typeface="맑은 고딕"/>
+                <a:ea typeface="맑은 고딕"/>
+                <a:cs typeface="맑은 고딕"/>
+              </a:rPr>
+              <a:t>과제 소개</a:t>
+            </a:r>
+          </a:p>
+        </p:txBody>
+      </p:sp>
+      <p:sp>
+        <p:nvSpPr>
+          <p:cNvPr id="4" name="Chevron 3"/>
+          <p:cNvSpPr/>
+          <p:nvPr/>
+        </p:nvSpPr>
+        <p:spPr>
+          <a:xfrm>
+            <a:off x="8415223" y="137160"/>
+            <a:ext cx="1031443" cy="357530"/>
+          </a:xfrm>
+          <a:prstGeom prst="chevron">
+            <a:avLst/>
+          </a:prstGeom>
+          <a:solidFill>
+            <a:srgbClr val="BFBFBF"/>
+          </a:solidFill>
+          <a:ln>
+            <a:noFill/>
+          </a:ln>
+          <a:effectLst/>
+        </p:spPr>
+        <p:style>
+          <a:lnRef idx="1">
+            <a:schemeClr val="accent1"/>
+          </a:lnRef>
+          <a:fillRef idx="3">
+            <a:schemeClr val="accent1"/>
+          </a:fillRef>
+          <a:effectRef idx="2">
+            <a:schemeClr val="accent1"/>
+          </a:effectRef>
+          <a:fontRef idx="minor">
+            <a:schemeClr val="lt1"/>
+          </a:fontRef>
+        </p:style>
+        <p:txBody>
+          <a:bodyPr rtlCol="0" anchor="ctr" wrap="square" lIns="0" rIns="0" tIns="27432" bIns="27432"/>
+          <a:lstStyle/>
+          <a:p>
+            <a:pPr algn="ctr">
+              <a:spcAft>
+                <a:spcPts val="200"/>
+              </a:spcAft>
+            </a:pPr>
+            <a:r>
+              <a:rPr sz="1000" b="1">
+                <a:solidFill>
+                  <a:srgbClr val="FFFFFF"/>
+                </a:solidFill>
+                <a:latin typeface="맑은 고딕"/>
+                <a:ea typeface="맑은 고딕"/>
+                <a:cs typeface="맑은 고딕"/>
+              </a:rPr>
+              <a:t>요구사항</a:t>
+            </a:r>
+          </a:p>
+        </p:txBody>
+      </p:sp>
+      <p:sp>
+        <p:nvSpPr>
+          <p:cNvPr id="5" name="Chevron 4"/>
+          <p:cNvSpPr/>
+          <p:nvPr/>
+        </p:nvSpPr>
+        <p:spPr>
+          <a:xfrm>
+            <a:off x="9314078" y="137160"/>
+            <a:ext cx="1031443" cy="357530"/>
+          </a:xfrm>
+          <a:prstGeom prst="chevron">
+            <a:avLst/>
+          </a:prstGeom>
+          <a:solidFill>
+            <a:srgbClr val="595959"/>
+          </a:solidFill>
+          <a:ln>
+            <a:noFill/>
+          </a:ln>
+          <a:effectLst/>
+        </p:spPr>
+        <p:style>
+          <a:lnRef idx="1">
+            <a:schemeClr val="accent1"/>
+          </a:lnRef>
+          <a:fillRef idx="3">
+            <a:schemeClr val="accent1"/>
+          </a:fillRef>
+          <a:effectRef idx="2">
+            <a:schemeClr val="accent1"/>
+          </a:effectRef>
+          <a:fontRef idx="minor">
+            <a:schemeClr val="lt1"/>
+          </a:fontRef>
+        </p:style>
+        <p:txBody>
+          <a:bodyPr rtlCol="0" anchor="ctr" wrap="square" lIns="0" rIns="0" tIns="27432" bIns="27432"/>
+          <a:lstStyle/>
+          <a:p>
+            <a:pPr algn="ctr">
+              <a:spcAft>
+                <a:spcPts val="200"/>
+              </a:spcAft>
+            </a:pPr>
+            <a:r>
+              <a:rPr sz="1000" b="1">
+                <a:solidFill>
+                  <a:srgbClr val="FFFFFF"/>
+                </a:solidFill>
+                <a:latin typeface="맑은 고딕"/>
+                <a:ea typeface="맑은 고딕"/>
+                <a:cs typeface="맑은 고딕"/>
+              </a:rPr>
+              <a:t>설계</a:t>
+            </a:r>
+          </a:p>
+        </p:txBody>
+      </p:sp>
+      <p:sp>
+        <p:nvSpPr>
+          <p:cNvPr id="6" name="Chevron 5"/>
+          <p:cNvSpPr/>
+          <p:nvPr/>
+        </p:nvSpPr>
+        <p:spPr>
+          <a:xfrm>
+            <a:off x="10206532" y="137160"/>
+            <a:ext cx="1031443" cy="357530"/>
+          </a:xfrm>
+          <a:prstGeom prst="chevron">
+            <a:avLst/>
+          </a:prstGeom>
+          <a:solidFill>
+            <a:srgbClr val="BFBFBF"/>
+          </a:solidFill>
+          <a:ln>
+            <a:noFill/>
+          </a:ln>
+          <a:effectLst/>
+        </p:spPr>
+        <p:style>
+          <a:lnRef idx="1">
+            <a:schemeClr val="accent1"/>
+          </a:lnRef>
+          <a:fillRef idx="3">
+            <a:schemeClr val="accent1"/>
+          </a:fillRef>
+          <a:effectRef idx="2">
+            <a:schemeClr val="accent1"/>
+          </a:effectRef>
+          <a:fontRef idx="minor">
+            <a:schemeClr val="lt1"/>
+          </a:fontRef>
+        </p:style>
+        <p:txBody>
+          <a:bodyPr rtlCol="0" anchor="ctr" wrap="square" lIns="0" rIns="0" tIns="27432" bIns="27432"/>
+          <a:lstStyle/>
+          <a:p>
+            <a:pPr algn="ctr">
+              <a:spcAft>
+                <a:spcPts val="200"/>
+              </a:spcAft>
+            </a:pPr>
+            <a:r>
+              <a:rPr sz="1000" b="1">
+                <a:solidFill>
+                  <a:srgbClr val="FFFFFF"/>
+                </a:solidFill>
+                <a:latin typeface="맑은 고딕"/>
+                <a:ea typeface="맑은 고딕"/>
+                <a:cs typeface="맑은 고딕"/>
+              </a:rPr>
+              <a:t>구현/검증</a:t>
+            </a:r>
+          </a:p>
+        </p:txBody>
+      </p:sp>
+      <p:sp>
+        <p:nvSpPr>
+          <p:cNvPr id="7" name="Chevron 6"/>
+          <p:cNvSpPr/>
+          <p:nvPr/>
+        </p:nvSpPr>
+        <p:spPr>
+          <a:xfrm>
+            <a:off x="11105388" y="137160"/>
+            <a:ext cx="892454" cy="357530"/>
+          </a:xfrm>
+          <a:prstGeom prst="chevron">
+            <a:avLst/>
+          </a:prstGeom>
+          <a:solidFill>
+            <a:srgbClr val="BFBFBF"/>
+          </a:solidFill>
+          <a:ln>
+            <a:noFill/>
+          </a:ln>
+          <a:effectLst/>
+        </p:spPr>
+        <p:style>
+          <a:lnRef idx="1">
+            <a:schemeClr val="accent1"/>
+          </a:lnRef>
+          <a:fillRef idx="3">
+            <a:schemeClr val="accent1"/>
+          </a:fillRef>
+          <a:effectRef idx="2">
+            <a:schemeClr val="accent1"/>
+          </a:effectRef>
+          <a:fontRef idx="minor">
+            <a:schemeClr val="lt1"/>
+          </a:fontRef>
+        </p:style>
+        <p:txBody>
+          <a:bodyPr rtlCol="0" anchor="ctr" wrap="square" lIns="0" rIns="0" tIns="27432" bIns="27432"/>
+          <a:lstStyle/>
+          <a:p>
+            <a:pPr algn="ctr">
+              <a:spcAft>
+                <a:spcPts val="200"/>
+              </a:spcAft>
+            </a:pPr>
+            <a:r>
+              <a:rPr sz="1000" b="1">
+                <a:solidFill>
+                  <a:srgbClr val="FFFFFF"/>
+                </a:solidFill>
+                <a:latin typeface="맑은 고딕"/>
+                <a:ea typeface="맑은 고딕"/>
+                <a:cs typeface="맑은 고딕"/>
+              </a:rPr>
+              <a:t>결론</a:t>
+            </a:r>
+          </a:p>
+        </p:txBody>
+      </p:sp>
+      <p:sp>
+        <p:nvSpPr>
+          <p:cNvPr id="8" name="Rectangle 7"/>
+          <p:cNvSpPr/>
+          <p:nvPr/>
+        </p:nvSpPr>
+        <p:spPr>
+          <a:xfrm>
+            <a:off x="7529169" y="137160"/>
+            <a:ext cx="212140" cy="357530"/>
+          </a:xfrm>
+          <a:prstGeom prst="rect">
+            <a:avLst/>
+          </a:prstGeom>
+          <a:solidFill>
+            <a:srgbClr val="BFBFBF"/>
+          </a:solidFill>
+          <a:ln>
+            <a:noFill/>
+          </a:ln>
+          <a:effectLst/>
+        </p:spPr>
+        <p:style>
+          <a:lnRef idx="1">
+            <a:schemeClr val="accent1"/>
+          </a:lnRef>
+          <a:fillRef idx="3">
+            <a:schemeClr val="accent1"/>
+          </a:fillRef>
+          <a:effectRef idx="2">
+            <a:schemeClr val="accent1"/>
+          </a:effectRef>
+          <a:fontRef idx="minor">
+            <a:schemeClr val="lt1"/>
+          </a:fontRef>
+        </p:style>
+        <p:txBody>
+          <a:bodyPr rtlCol="0" anchor="ctr"/>
+          <a:lstStyle/>
+          <a:p>
+            <a:pPr algn="ctr"/>
+          </a:p>
+        </p:txBody>
+      </p:sp>
+      <p:sp>
+        <p:nvSpPr>
+          <p:cNvPr id="9" name="Rectangle 8"/>
+          <p:cNvSpPr/>
+          <p:nvPr/>
+        </p:nvSpPr>
+        <p:spPr>
+          <a:xfrm>
+            <a:off x="11789359" y="137160"/>
+            <a:ext cx="212140" cy="357530"/>
+          </a:xfrm>
+          <a:prstGeom prst="rect">
+            <a:avLst/>
+          </a:prstGeom>
+          <a:solidFill>
+            <a:srgbClr val="BFBFBF"/>
+          </a:solidFill>
+          <a:ln>
+            <a:noFill/>
+          </a:ln>
+          <a:effectLst/>
+        </p:spPr>
+        <p:style>
+          <a:lnRef idx="1">
+            <a:schemeClr val="accent1"/>
+          </a:lnRef>
+          <a:fillRef idx="3">
+            <a:schemeClr val="accent1"/>
+          </a:fillRef>
+          <a:effectRef idx="2">
+            <a:schemeClr val="accent1"/>
+          </a:effectRef>
+          <a:fontRef idx="minor">
+            <a:schemeClr val="lt1"/>
+          </a:fontRef>
+        </p:style>
+        <p:txBody>
+          <a:bodyPr rtlCol="0" anchor="ctr"/>
+          <a:lstStyle/>
+          <a:p>
+            <a:pPr algn="ctr"/>
+          </a:p>
+        </p:txBody>
+      </p:sp>
+      <p:sp>
+        <p:nvSpPr>
+          <p:cNvPr id="10" name="Rectangle 9"/>
+          <p:cNvSpPr/>
+          <p:nvPr/>
+        </p:nvSpPr>
+        <p:spPr>
+          <a:xfrm>
+            <a:off x="237744" y="594360"/>
+            <a:ext cx="11750040" cy="393192"/>
+          </a:xfrm>
+          <a:prstGeom prst="rect">
+            <a:avLst/>
+          </a:prstGeom>
+          <a:solidFill>
+            <a:srgbClr val="7F7F7F"/>
+          </a:solidFill>
+          <a:ln>
+            <a:noFill/>
+          </a:ln>
+          <a:effectLst/>
+        </p:spPr>
+        <p:style>
+          <a:lnRef idx="1">
+            <a:schemeClr val="accent1"/>
+          </a:lnRef>
+          <a:fillRef idx="3">
+            <a:schemeClr val="accent1"/>
+          </a:fillRef>
+          <a:effectRef idx="2">
+            <a:schemeClr val="accent1"/>
+          </a:effectRef>
+          <a:fontRef idx="minor">
+            <a:schemeClr val="lt1"/>
+          </a:fontRef>
+        </p:style>
+        <p:txBody>
+          <a:bodyPr rtlCol="0" anchor="ctr"/>
+          <a:lstStyle/>
+          <a:p>
+            <a:pPr algn="ctr"/>
+          </a:p>
+        </p:txBody>
+      </p:sp>
+      <p:sp>
+        <p:nvSpPr>
+          <p:cNvPr id="11" name="Rectangle 10"/>
+          <p:cNvSpPr/>
+          <p:nvPr/>
+        </p:nvSpPr>
+        <p:spPr>
+          <a:xfrm>
+            <a:off x="402336" y="676656"/>
+            <a:ext cx="64008" cy="219456"/>
+          </a:xfrm>
+          <a:prstGeom prst="rect">
+            <a:avLst/>
+          </a:prstGeom>
+          <a:solidFill>
+            <a:srgbClr val="FFFFFF"/>
+          </a:solidFill>
+          <a:ln>
+            <a:noFill/>
+          </a:ln>
+          <a:effectLst/>
+        </p:spPr>
+        <p:style>
+          <a:lnRef idx="1">
+            <a:schemeClr val="accent1"/>
+          </a:lnRef>
+          <a:fillRef idx="3">
+            <a:schemeClr val="accent1"/>
+          </a:fillRef>
+          <a:effectRef idx="2">
+            <a:schemeClr val="accent1"/>
+          </a:effectRef>
+          <a:fontRef idx="minor">
+            <a:schemeClr val="lt1"/>
+          </a:fontRef>
+        </p:style>
+        <p:txBody>
+          <a:bodyPr rtlCol="0" anchor="ctr"/>
+          <a:lstStyle/>
+          <a:p>
+            <a:pPr algn="ctr"/>
+          </a:p>
+        </p:txBody>
+      </p:sp>
+      <p:sp>
+        <p:nvSpPr>
+          <p:cNvPr id="12" name="TextBox 11"/>
+          <p:cNvSpPr txBox="1"/>
+          <p:nvPr/>
+        </p:nvSpPr>
+        <p:spPr>
+          <a:xfrm>
+            <a:off x="466344" y="621792"/>
+            <a:ext cx="7589520" cy="329184"/>
+          </a:xfrm>
+          <a:prstGeom prst="rect">
+            <a:avLst/>
+          </a:prstGeom>
+          <a:noFill/>
+        </p:spPr>
+        <p:txBody>
+          <a:bodyPr wrap="square" anchor="ctr" lIns="45720" rIns="45720" tIns="27432" bIns="27432">
+            <a:spAutoFit/>
+          </a:bodyPr>
+          <a:lstStyle/>
+          <a:p>
+            <a:pPr algn="l">
+              <a:spcAft>
+                <a:spcPts val="200"/>
+              </a:spcAft>
+            </a:pPr>
+            <a:r>
+              <a:rPr sz="1400" b="1">
+                <a:solidFill>
+                  <a:srgbClr val="FFFFFF"/>
+                </a:solidFill>
+                <a:latin typeface="맑은 고딕"/>
+                <a:ea typeface="맑은 고딕"/>
+                <a:cs typeface="맑은 고딕"/>
+              </a:rPr>
+              <a:t>흐름 순서는 같다 — 달라지는 것은 Pipe의 수명과 실행 시점</a:t>
+            </a:r>
+          </a:p>
+        </p:txBody>
+      </p:sp>
+      <p:sp>
+        <p:nvSpPr>
+          <p:cNvPr id="13" name="Rounded Rectangle 12"/>
+          <p:cNvSpPr/>
+          <p:nvPr/>
+        </p:nvSpPr>
+        <p:spPr>
+          <a:xfrm>
+            <a:off x="11146536" y="630936"/>
+            <a:ext cx="713232" cy="320040"/>
+          </a:xfrm>
+          <a:prstGeom prst="roundRect">
+            <a:avLst/>
+          </a:prstGeom>
+          <a:solidFill>
+            <a:srgbClr val="833C0B"/>
+          </a:solidFill>
+          <a:ln>
+            <a:noFill/>
+          </a:ln>
+          <a:effectLst/>
+        </p:spPr>
+        <p:style>
+          <a:lnRef idx="1">
+            <a:schemeClr val="accent1"/>
+          </a:lnRef>
+          <a:fillRef idx="3">
+            <a:schemeClr val="accent1"/>
+          </a:fillRef>
+          <a:effectRef idx="2">
+            <a:schemeClr val="accent1"/>
+          </a:effectRef>
+          <a:fontRef idx="minor">
+            <a:schemeClr val="lt1"/>
+          </a:fontRef>
+        </p:style>
+        <p:txBody>
+          <a:bodyPr rtlCol="0" anchor="ctr" wrap="square" lIns="0" rIns="0" tIns="27432" bIns="27432"/>
+          <a:lstStyle/>
+          <a:p>
+            <a:pPr algn="ctr">
+              <a:spcAft>
+                <a:spcPts val="200"/>
+              </a:spcAft>
+            </a:pPr>
+            <a:r>
+              <a:rPr sz="900" b="1">
+                <a:solidFill>
+                  <a:srgbClr val="FFFFFF"/>
+                </a:solidFill>
+                <a:latin typeface="맑은 고딕"/>
+                <a:ea typeface="맑은 고딕"/>
+                <a:cs typeface="맑은 고딕"/>
+              </a:rPr>
+              <a:t>QA5</a:t>
+            </a:r>
+          </a:p>
+        </p:txBody>
+      </p:sp>
+      <p:sp>
+        <p:nvSpPr>
+          <p:cNvPr id="14" name="Rounded Rectangle 13"/>
+          <p:cNvSpPr/>
+          <p:nvPr/>
+        </p:nvSpPr>
+        <p:spPr>
+          <a:xfrm>
+            <a:off x="10396728" y="630936"/>
+            <a:ext cx="713232" cy="320040"/>
+          </a:xfrm>
+          <a:prstGeom prst="roundRect">
+            <a:avLst/>
+          </a:prstGeom>
+          <a:solidFill>
+            <a:srgbClr val="833C0B"/>
+          </a:solidFill>
+          <a:ln>
+            <a:noFill/>
+          </a:ln>
+          <a:effectLst/>
+        </p:spPr>
+        <p:style>
+          <a:lnRef idx="1">
+            <a:schemeClr val="accent1"/>
+          </a:lnRef>
+          <a:fillRef idx="3">
+            <a:schemeClr val="accent1"/>
+          </a:fillRef>
+          <a:effectRef idx="2">
+            <a:schemeClr val="accent1"/>
+          </a:effectRef>
+          <a:fontRef idx="minor">
+            <a:schemeClr val="lt1"/>
+          </a:fontRef>
+        </p:style>
+        <p:txBody>
+          <a:bodyPr rtlCol="0" anchor="ctr" wrap="square" lIns="0" rIns="0" tIns="27432" bIns="27432"/>
+          <a:lstStyle/>
+          <a:p>
+            <a:pPr algn="ctr">
+              <a:spcAft>
+                <a:spcPts val="200"/>
+              </a:spcAft>
+            </a:pPr>
+            <a:r>
+              <a:rPr sz="900" b="1">
+                <a:solidFill>
+                  <a:srgbClr val="FFFFFF"/>
+                </a:solidFill>
+                <a:latin typeface="맑은 고딕"/>
+                <a:ea typeface="맑은 고딕"/>
+                <a:cs typeface="맑은 고딕"/>
+              </a:rPr>
+              <a:t>QA2</a:t>
+            </a:r>
+          </a:p>
+        </p:txBody>
+      </p:sp>
+      <p:sp>
+        <p:nvSpPr>
+          <p:cNvPr id="15" name="Rounded Rectangle 14"/>
+          <p:cNvSpPr/>
+          <p:nvPr/>
+        </p:nvSpPr>
+        <p:spPr>
+          <a:xfrm>
+            <a:off x="9646919" y="630936"/>
+            <a:ext cx="713232" cy="320040"/>
+          </a:xfrm>
+          <a:prstGeom prst="roundRect">
+            <a:avLst/>
+          </a:prstGeom>
+          <a:solidFill>
+            <a:srgbClr val="833C0B"/>
+          </a:solidFill>
+          <a:ln>
+            <a:noFill/>
+          </a:ln>
+          <a:effectLst/>
+        </p:spPr>
+        <p:style>
+          <a:lnRef idx="1">
+            <a:schemeClr val="accent1"/>
+          </a:lnRef>
+          <a:fillRef idx="3">
+            <a:schemeClr val="accent1"/>
+          </a:fillRef>
+          <a:effectRef idx="2">
+            <a:schemeClr val="accent1"/>
+          </a:effectRef>
+          <a:fontRef idx="minor">
+            <a:schemeClr val="lt1"/>
+          </a:fontRef>
+        </p:style>
+        <p:txBody>
+          <a:bodyPr rtlCol="0" anchor="ctr" wrap="square" lIns="0" rIns="0" tIns="27432" bIns="27432"/>
+          <a:lstStyle/>
+          <a:p>
+            <a:pPr algn="ctr">
+              <a:spcAft>
+                <a:spcPts val="200"/>
+              </a:spcAft>
+            </a:pPr>
+            <a:r>
+              <a:rPr sz="900" b="1">
+                <a:solidFill>
+                  <a:srgbClr val="FFFFFF"/>
+                </a:solidFill>
+                <a:latin typeface="맑은 고딕"/>
+                <a:ea typeface="맑은 고딕"/>
+                <a:cs typeface="맑은 고딕"/>
+              </a:rPr>
+              <a:t>QA1</a:t>
+            </a:r>
+          </a:p>
+        </p:txBody>
+      </p:sp>
+      <p:sp>
+        <p:nvSpPr>
+          <p:cNvPr id="16" name="Rounded Rectangle 15"/>
+          <p:cNvSpPr/>
+          <p:nvPr/>
+        </p:nvSpPr>
+        <p:spPr>
+          <a:xfrm>
+            <a:off x="8897111" y="630936"/>
+            <a:ext cx="713232" cy="320040"/>
+          </a:xfrm>
+          <a:prstGeom prst="roundRect">
+            <a:avLst/>
+          </a:prstGeom>
+          <a:solidFill>
+            <a:srgbClr val="203864"/>
+          </a:solidFill>
+          <a:ln>
+            <a:noFill/>
+          </a:ln>
+          <a:effectLst/>
+        </p:spPr>
+        <p:style>
+          <a:lnRef idx="1">
+            <a:schemeClr val="accent1"/>
+          </a:lnRef>
+          <a:fillRef idx="3">
+            <a:schemeClr val="accent1"/>
+          </a:fillRef>
+          <a:effectRef idx="2">
+            <a:schemeClr val="accent1"/>
+          </a:effectRef>
+          <a:fontRef idx="minor">
+            <a:schemeClr val="lt1"/>
+          </a:fontRef>
+        </p:style>
+        <p:txBody>
+          <a:bodyPr rtlCol="0" anchor="ctr" wrap="square" lIns="0" rIns="0" tIns="27432" bIns="27432"/>
+          <a:lstStyle/>
+          <a:p>
+            <a:pPr algn="ctr">
+              <a:spcAft>
+                <a:spcPts val="200"/>
+              </a:spcAft>
+            </a:pPr>
+            <a:r>
+              <a:rPr sz="900" b="1">
+                <a:solidFill>
+                  <a:srgbClr val="FFFFFF"/>
+                </a:solidFill>
+                <a:latin typeface="맑은 고딕"/>
+                <a:ea typeface="맑은 고딕"/>
+                <a:cs typeface="맑은 고딕"/>
+              </a:rPr>
+              <a:t>F5</a:t>
+            </a:r>
+          </a:p>
+        </p:txBody>
+      </p:sp>
+      <p:sp>
+        <p:nvSpPr>
+          <p:cNvPr id="17" name="Rectangle 16"/>
+          <p:cNvSpPr/>
+          <p:nvPr/>
+        </p:nvSpPr>
+        <p:spPr>
+          <a:xfrm>
+            <a:off x="246888" y="1097280"/>
+            <a:ext cx="5760720" cy="310896"/>
+          </a:xfrm>
+          <a:prstGeom prst="rect">
+            <a:avLst/>
+          </a:prstGeom>
+          <a:solidFill>
+            <a:srgbClr val="F2F2F2"/>
+          </a:solidFill>
+          <a:ln w="10160">
+            <a:solidFill>
+              <a:srgbClr val="7F7F7F"/>
+            </a:solidFill>
+          </a:ln>
+          <a:effectLst/>
+        </p:spPr>
+        <p:style>
+          <a:lnRef idx="1">
+            <a:schemeClr val="accent1"/>
+          </a:lnRef>
+          <a:fillRef idx="3">
+            <a:schemeClr val="accent1"/>
+          </a:fillRef>
+          <a:effectRef idx="2">
+            <a:schemeClr val="accent1"/>
+          </a:effectRef>
+          <a:fontRef idx="minor">
+            <a:schemeClr val="lt1"/>
+          </a:fontRef>
+        </p:style>
+        <p:txBody>
+          <a:bodyPr rtlCol="0" anchor="ctr" wrap="square" lIns="45720" rIns="45720" tIns="27432" bIns="27432"/>
+          <a:lstStyle/>
+          <a:p>
+            <a:pPr algn="ctr">
+              <a:spcAft>
+                <a:spcPts val="200"/>
+              </a:spcAft>
+            </a:pPr>
+            <a:r>
+              <a:rPr sz="1100" b="1">
+                <a:solidFill>
+                  <a:srgbClr val="000000"/>
+                </a:solidFill>
+                <a:latin typeface="맑은 고딕"/>
+                <a:ea typeface="맑은 고딕"/>
+                <a:cs typeface="맑은 고딕"/>
+              </a:rPr>
+              <a:t>(1안) Pipe-and-Filter </a:t>
+            </a:r>
+            <a:r>
+              <a:rPr sz="1100" b="1">
+                <a:solidFill>
+                  <a:srgbClr val="2E75B6"/>
+                </a:solidFill>
+                <a:latin typeface="맑은 고딕"/>
+                <a:ea typeface="맑은 고딕"/>
+                <a:cs typeface="맑은 고딕"/>
+              </a:rPr>
+              <a:t>요청마다 전체 체인 실행</a:t>
+            </a:r>
+          </a:p>
+        </p:txBody>
+      </p:sp>
+      <p:sp>
+        <p:nvSpPr>
+          <p:cNvPr id="18" name="Rectangle 17"/>
+          <p:cNvSpPr/>
+          <p:nvPr/>
+        </p:nvSpPr>
+        <p:spPr>
+          <a:xfrm>
+            <a:off x="6199632" y="1097280"/>
+            <a:ext cx="5760720" cy="310896"/>
+          </a:xfrm>
+          <a:prstGeom prst="rect">
+            <a:avLst/>
+          </a:prstGeom>
+          <a:solidFill>
+            <a:srgbClr val="F2F2F2"/>
+          </a:solidFill>
+          <a:ln w="10160">
+            <a:solidFill>
+              <a:srgbClr val="7F7F7F"/>
+            </a:solidFill>
+          </a:ln>
+          <a:effectLst/>
+        </p:spPr>
+        <p:style>
+          <a:lnRef idx="1">
+            <a:schemeClr val="accent1"/>
+          </a:lnRef>
+          <a:fillRef idx="3">
+            <a:schemeClr val="accent1"/>
+          </a:fillRef>
+          <a:effectRef idx="2">
+            <a:schemeClr val="accent1"/>
+          </a:effectRef>
+          <a:fontRef idx="minor">
+            <a:schemeClr val="lt1"/>
+          </a:fontRef>
+        </p:style>
+        <p:txBody>
+          <a:bodyPr rtlCol="0" anchor="ctr" wrap="square" lIns="45720" rIns="45720" tIns="27432" bIns="27432"/>
+          <a:lstStyle/>
+          <a:p>
+            <a:pPr algn="ctr">
+              <a:spcAft>
+                <a:spcPts val="200"/>
+              </a:spcAft>
+            </a:pPr>
+            <a:r>
+              <a:rPr sz="1100" b="1">
+                <a:solidFill>
+                  <a:srgbClr val="000000"/>
+                </a:solidFill>
+                <a:latin typeface="맑은 고딕"/>
+                <a:ea typeface="맑은 고딕"/>
+                <a:cs typeface="맑은 고딕"/>
+              </a:rPr>
+              <a:t>(2안) Repository </a:t>
+            </a:r>
+            <a:r>
+              <a:rPr sz="1100" b="1">
+                <a:solidFill>
+                  <a:srgbClr val="C55A11"/>
+                </a:solidFill>
+                <a:latin typeface="맑은 고딕"/>
+                <a:ea typeface="맑은 고딕"/>
+                <a:cs typeface="맑은 고딕"/>
+              </a:rPr>
+              <a:t>분석 1회 + 요청마다 조회</a:t>
+            </a:r>
+          </a:p>
+        </p:txBody>
+      </p:sp>
+      <p:sp>
+        <p:nvSpPr>
+          <p:cNvPr id="19" name="TextBox 18"/>
+          <p:cNvSpPr txBox="1"/>
+          <p:nvPr/>
+        </p:nvSpPr>
+        <p:spPr>
+          <a:xfrm>
+            <a:off x="274320" y="1645920"/>
+            <a:ext cx="457200" cy="274320"/>
+          </a:xfrm>
+          <a:prstGeom prst="rect">
+            <a:avLst/>
+          </a:prstGeom>
+          <a:noFill/>
+        </p:spPr>
+        <p:txBody>
+          <a:bodyPr wrap="square" anchor="t" lIns="45720" rIns="45720" tIns="27432" bIns="27432">
+            <a:spAutoFit/>
+          </a:bodyPr>
+          <a:lstStyle/>
+          <a:p>
+            <a:pPr algn="l">
+              <a:spcAft>
+                <a:spcPts val="200"/>
+              </a:spcAft>
+            </a:pPr>
+            <a:r>
+              <a:rPr sz="1000" b="1">
                 <a:solidFill>
                   <a:srgbClr val="595959"/>
                 </a:solidFill>
@@ -9944,28 +11442,89 @@
                 <a:ea typeface="맑은 고딕"/>
                 <a:cs typeface="맑은 고딕"/>
               </a:rPr>
-              <a:t>Query</a:t>
+              <a:t>R1</a:t>
+            </a:r>
+          </a:p>
+        </p:txBody>
+      </p:sp>
+      <p:sp>
+        <p:nvSpPr>
+          <p:cNvPr id="20" name="Rectangle 19"/>
+          <p:cNvSpPr/>
+          <p:nvPr/>
+        </p:nvSpPr>
+        <p:spPr>
+          <a:xfrm>
+            <a:off x="777240" y="1600200"/>
+            <a:ext cx="868680" cy="365760"/>
+          </a:xfrm>
+          <a:prstGeom prst="rect">
+            <a:avLst/>
+          </a:prstGeom>
+          <a:solidFill>
+            <a:srgbClr val="F0F1F3"/>
+          </a:solidFill>
+          <a:ln w="15240">
+            <a:solidFill>
+              <a:srgbClr val="7F7F7F"/>
+            </a:solidFill>
+          </a:ln>
+          <a:effectLst/>
+        </p:spPr>
+        <p:style>
+          <a:lnRef idx="1">
+            <a:schemeClr val="accent1"/>
+          </a:lnRef>
+          <a:fillRef idx="3">
+            <a:schemeClr val="accent1"/>
+          </a:fillRef>
+          <a:effectRef idx="2">
+            <a:schemeClr val="accent1"/>
+          </a:effectRef>
+          <a:fontRef idx="minor">
+            <a:schemeClr val="lt1"/>
+          </a:fontRef>
+        </p:style>
+        <p:txBody>
+          <a:bodyPr rtlCol="0" anchor="ctr" wrap="square" lIns="45720" rIns="45720" tIns="27432" bIns="27432"/>
+          <a:lstStyle/>
+          <a:p>
+            <a:pPr algn="ctr">
+              <a:spcAft>
+                <a:spcPts val="200"/>
+              </a:spcAft>
+            </a:pPr>
+            <a:r>
+              <a:rPr sz="900" b="1">
+                <a:solidFill>
+                  <a:srgbClr val="000000"/>
+                </a:solidFill>
+                <a:latin typeface="맑은 고딕"/>
+                <a:ea typeface="맑은 고딕"/>
+                <a:cs typeface="맑은 고딕"/>
+              </a:rPr>
+              <a:t>AM</a:t>
             </a:r>
           </a:p>
         </p:txBody>
       </p:sp>
       <p:cxnSp>
         <p:nvCxnSpPr>
-          <p:cNvPr id="79" name="Connector 78"/>
+          <p:cNvPr id="21" name="Connector 20"/>
           <p:cNvCxnSpPr/>
           <p:nvPr/>
         </p:nvCxnSpPr>
         <p:spPr>
-          <a:xfrm flipV="1">
-            <a:off x="9326880" y="3977639"/>
-            <a:ext cx="0" cy="685801"/>
+          <a:xfrm>
+            <a:off x="1645919" y="1783080"/>
+            <a:ext cx="228600" cy="0"/>
           </a:xfrm>
           <a:prstGeom prst="line">
             <a:avLst/>
           </a:prstGeom>
-          <a:ln w="19050">
+          <a:ln w="28575">
             <a:solidFill>
-              <a:srgbClr val="548235"/>
+              <a:srgbClr val="2E75B6"/>
             </a:solidFill>
             <a:tailEnd type="triangle"/>
           </a:ln>
@@ -9987,14 +11546,269 @@
       </p:cxnSp>
       <p:sp>
         <p:nvSpPr>
-          <p:cNvPr id="80" name="TextBox 79"/>
+          <p:cNvPr id="22" name="Rectangle 21"/>
+          <p:cNvSpPr/>
+          <p:nvPr/>
+        </p:nvSpPr>
+        <p:spPr>
+          <a:xfrm>
+            <a:off x="1874519" y="1600200"/>
+            <a:ext cx="868680" cy="365760"/>
+          </a:xfrm>
+          <a:prstGeom prst="rect">
+            <a:avLst/>
+          </a:prstGeom>
+          <a:solidFill>
+            <a:srgbClr val="F0F1F3"/>
+          </a:solidFill>
+          <a:ln w="15240">
+            <a:solidFill>
+              <a:srgbClr val="7F7F7F"/>
+            </a:solidFill>
+          </a:ln>
+          <a:effectLst/>
+        </p:spPr>
+        <p:style>
+          <a:lnRef idx="1">
+            <a:schemeClr val="accent1"/>
+          </a:lnRef>
+          <a:fillRef idx="3">
+            <a:schemeClr val="accent1"/>
+          </a:fillRef>
+          <a:effectRef idx="2">
+            <a:schemeClr val="accent1"/>
+          </a:effectRef>
+          <a:fontRef idx="minor">
+            <a:schemeClr val="lt1"/>
+          </a:fontRef>
+        </p:style>
+        <p:txBody>
+          <a:bodyPr rtlCol="0" anchor="ctr" wrap="square" lIns="45720" rIns="45720" tIns="27432" bIns="27432"/>
+          <a:lstStyle/>
+          <a:p>
+            <a:pPr algn="ctr">
+              <a:spcAft>
+                <a:spcPts val="200"/>
+              </a:spcAft>
+            </a:pPr>
+            <a:r>
+              <a:rPr sz="900" b="1">
+                <a:solidFill>
+                  <a:srgbClr val="000000"/>
+                </a:solidFill>
+                <a:latin typeface="맑은 고딕"/>
+                <a:ea typeface="맑은 고딕"/>
+                <a:cs typeface="맑은 고딕"/>
+              </a:rPr>
+              <a:t>KVS</a:t>
+            </a:r>
+          </a:p>
+        </p:txBody>
+      </p:sp>
+      <p:cxnSp>
+        <p:nvCxnSpPr>
+          <p:cNvPr id="23" name="Connector 22"/>
+          <p:cNvCxnSpPr/>
+          <p:nvPr/>
+        </p:nvCxnSpPr>
+        <p:spPr>
+          <a:xfrm>
+            <a:off x="2743200" y="1783080"/>
+            <a:ext cx="228600" cy="0"/>
+          </a:xfrm>
+          <a:prstGeom prst="line">
+            <a:avLst/>
+          </a:prstGeom>
+          <a:ln w="28575">
+            <a:solidFill>
+              <a:srgbClr val="2E75B6"/>
+            </a:solidFill>
+            <a:tailEnd type="triangle"/>
+          </a:ln>
+        </p:spPr>
+        <p:style>
+          <a:lnRef idx="2">
+            <a:schemeClr val="accent1"/>
+          </a:lnRef>
+          <a:fillRef idx="0">
+            <a:schemeClr val="accent1"/>
+          </a:fillRef>
+          <a:effectRef idx="1">
+            <a:schemeClr val="accent1"/>
+          </a:effectRef>
+          <a:fontRef idx="minor">
+            <a:schemeClr val="tx1"/>
+          </a:fontRef>
+        </p:style>
+      </p:cxnSp>
+      <p:sp>
+        <p:nvSpPr>
+          <p:cNvPr id="24" name="Rectangle 23"/>
+          <p:cNvSpPr/>
+          <p:nvPr/>
+        </p:nvSpPr>
+        <p:spPr>
+          <a:xfrm>
+            <a:off x="2971800" y="1600200"/>
+            <a:ext cx="868680" cy="365760"/>
+          </a:xfrm>
+          <a:prstGeom prst="rect">
+            <a:avLst/>
+          </a:prstGeom>
+          <a:solidFill>
+            <a:srgbClr val="F0F1F3"/>
+          </a:solidFill>
+          <a:ln w="15240">
+            <a:solidFill>
+              <a:srgbClr val="7F7F7F"/>
+            </a:solidFill>
+          </a:ln>
+          <a:effectLst/>
+        </p:spPr>
+        <p:style>
+          <a:lnRef idx="1">
+            <a:schemeClr val="accent1"/>
+          </a:lnRef>
+          <a:fillRef idx="3">
+            <a:schemeClr val="accent1"/>
+          </a:fillRef>
+          <a:effectRef idx="2">
+            <a:schemeClr val="accent1"/>
+          </a:effectRef>
+          <a:fontRef idx="minor">
+            <a:schemeClr val="lt1"/>
+          </a:fontRef>
+        </p:style>
+        <p:txBody>
+          <a:bodyPr rtlCol="0" anchor="ctr" wrap="square" lIns="45720" rIns="45720" tIns="27432" bIns="27432"/>
+          <a:lstStyle/>
+          <a:p>
+            <a:pPr algn="ctr">
+              <a:spcAft>
+                <a:spcPts val="200"/>
+              </a:spcAft>
+            </a:pPr>
+            <a:r>
+              <a:rPr sz="900" b="1">
+                <a:solidFill>
+                  <a:srgbClr val="000000"/>
+                </a:solidFill>
+                <a:latin typeface="맑은 고딕"/>
+                <a:ea typeface="맑은 고딕"/>
+                <a:cs typeface="맑은 고딕"/>
+              </a:rPr>
+              <a:t>RTS</a:t>
+            </a:r>
+          </a:p>
+        </p:txBody>
+      </p:sp>
+      <p:cxnSp>
+        <p:nvCxnSpPr>
+          <p:cNvPr id="25" name="Connector 24"/>
+          <p:cNvCxnSpPr/>
+          <p:nvPr/>
+        </p:nvCxnSpPr>
+        <p:spPr>
+          <a:xfrm>
+            <a:off x="3840480" y="1783080"/>
+            <a:ext cx="228600" cy="0"/>
+          </a:xfrm>
+          <a:prstGeom prst="line">
+            <a:avLst/>
+          </a:prstGeom>
+          <a:ln w="28575">
+            <a:solidFill>
+              <a:srgbClr val="2E75B6"/>
+            </a:solidFill>
+            <a:tailEnd type="triangle"/>
+          </a:ln>
+        </p:spPr>
+        <p:style>
+          <a:lnRef idx="2">
+            <a:schemeClr val="accent1"/>
+          </a:lnRef>
+          <a:fillRef idx="0">
+            <a:schemeClr val="accent1"/>
+          </a:fillRef>
+          <a:effectRef idx="1">
+            <a:schemeClr val="accent1"/>
+          </a:effectRef>
+          <a:fontRef idx="minor">
+            <a:schemeClr val="tx1"/>
+          </a:fontRef>
+        </p:style>
+      </p:cxnSp>
+      <p:sp>
+        <p:nvSpPr>
+          <p:cNvPr id="26" name="Rectangle 25"/>
+          <p:cNvSpPr/>
+          <p:nvPr/>
+        </p:nvSpPr>
+        <p:spPr>
+          <a:xfrm>
+            <a:off x="4069079" y="1600200"/>
+            <a:ext cx="868680" cy="365760"/>
+          </a:xfrm>
+          <a:prstGeom prst="rect">
+            <a:avLst/>
+          </a:prstGeom>
+          <a:solidFill>
+            <a:srgbClr val="F0F1F3"/>
+          </a:solidFill>
+          <a:ln w="15240">
+            <a:solidFill>
+              <a:srgbClr val="7F7F7F"/>
+            </a:solidFill>
+          </a:ln>
+          <a:effectLst/>
+        </p:spPr>
+        <p:style>
+          <a:lnRef idx="1">
+            <a:schemeClr val="accent1"/>
+          </a:lnRef>
+          <a:fillRef idx="3">
+            <a:schemeClr val="accent1"/>
+          </a:fillRef>
+          <a:effectRef idx="2">
+            <a:schemeClr val="accent1"/>
+          </a:effectRef>
+          <a:fontRef idx="minor">
+            <a:schemeClr val="lt1"/>
+          </a:fontRef>
+        </p:style>
+        <p:txBody>
+          <a:bodyPr rtlCol="0" anchor="ctr" wrap="square" lIns="45720" rIns="45720" tIns="27432" bIns="27432"/>
+          <a:lstStyle/>
+          <a:p>
+            <a:pPr algn="ctr">
+              <a:spcAft>
+                <a:spcPts val="200"/>
+              </a:spcAft>
+            </a:pPr>
+            <a:r>
+              <a:rPr sz="900" b="1">
+                <a:solidFill>
+                  <a:srgbClr val="000000"/>
+                </a:solidFill>
+                <a:latin typeface="맑은 고딕"/>
+                <a:ea typeface="맑은 고딕"/>
+                <a:cs typeface="맑은 고딕"/>
+              </a:rPr>
+              <a:t>SR</a:t>
+            </a:r>
+          </a:p>
+        </p:txBody>
+      </p:sp>
+      <p:sp>
+        <p:nvSpPr>
+          <p:cNvPr id="27" name="TextBox 26"/>
           <p:cNvSpPr txBox="1"/>
           <p:nvPr/>
         </p:nvSpPr>
         <p:spPr>
           <a:xfrm>
-            <a:off x="9418320" y="4187952"/>
-            <a:ext cx="2377440" cy="201168"/>
+            <a:off x="274320" y="2103120"/>
+            <a:ext cx="457200" cy="274320"/>
           </a:xfrm>
           <a:prstGeom prst="rect">
             <a:avLst/>
@@ -10013,29 +11827,381 @@
               </a:spcAft>
             </a:pPr>
             <a:r>
-              <a:rPr sz="750" b="0">
+              <a:rPr sz="1000" b="1">
                 <a:solidFill>
-                  <a:srgbClr val="548235"/>
+                  <a:srgbClr val="595959"/>
                 </a:solidFill>
                 <a:latin typeface="맑은 고딕"/>
                 <a:ea typeface="맑은 고딕"/>
                 <a:cs typeface="맑은 고딕"/>
               </a:rPr>
-              <a:t>read (동기): Context KV · 재계산 위치</a:t>
-            </a:r>
-          </a:p>
-        </p:txBody>
-      </p:sp>
-      <p:sp>
-        <p:nvSpPr>
-          <p:cNvPr id="81" name="TextBox 80"/>
+              <a:t>R2</a:t>
+            </a:r>
+          </a:p>
+        </p:txBody>
+      </p:sp>
+      <p:sp>
+        <p:nvSpPr>
+          <p:cNvPr id="28" name="Rectangle 27"/>
+          <p:cNvSpPr/>
+          <p:nvPr/>
+        </p:nvSpPr>
+        <p:spPr>
+          <a:xfrm>
+            <a:off x="777240" y="2057400"/>
+            <a:ext cx="868680" cy="365760"/>
+          </a:xfrm>
+          <a:prstGeom prst="rect">
+            <a:avLst/>
+          </a:prstGeom>
+          <a:solidFill>
+            <a:srgbClr val="F0F1F3"/>
+          </a:solidFill>
+          <a:ln w="15240">
+            <a:solidFill>
+              <a:srgbClr val="7F7F7F"/>
+            </a:solidFill>
+          </a:ln>
+          <a:effectLst/>
+        </p:spPr>
+        <p:style>
+          <a:lnRef idx="1">
+            <a:schemeClr val="accent1"/>
+          </a:lnRef>
+          <a:fillRef idx="3">
+            <a:schemeClr val="accent1"/>
+          </a:fillRef>
+          <a:effectRef idx="2">
+            <a:schemeClr val="accent1"/>
+          </a:effectRef>
+          <a:fontRef idx="minor">
+            <a:schemeClr val="lt1"/>
+          </a:fontRef>
+        </p:style>
+        <p:txBody>
+          <a:bodyPr rtlCol="0" anchor="ctr" wrap="square" lIns="45720" rIns="45720" tIns="27432" bIns="27432"/>
+          <a:lstStyle/>
+          <a:p>
+            <a:pPr algn="ctr">
+              <a:spcAft>
+                <a:spcPts val="200"/>
+              </a:spcAft>
+            </a:pPr>
+            <a:r>
+              <a:rPr sz="900" b="1">
+                <a:solidFill>
+                  <a:srgbClr val="000000"/>
+                </a:solidFill>
+                <a:latin typeface="맑은 고딕"/>
+                <a:ea typeface="맑은 고딕"/>
+                <a:cs typeface="맑은 고딕"/>
+              </a:rPr>
+              <a:t>AM</a:t>
+            </a:r>
+          </a:p>
+        </p:txBody>
+      </p:sp>
+      <p:cxnSp>
+        <p:nvCxnSpPr>
+          <p:cNvPr id="29" name="Connector 28"/>
+          <p:cNvCxnSpPr/>
+          <p:nvPr/>
+        </p:nvCxnSpPr>
+        <p:spPr>
+          <a:xfrm>
+            <a:off x="1645919" y="2240280"/>
+            <a:ext cx="228600" cy="0"/>
+          </a:xfrm>
+          <a:prstGeom prst="line">
+            <a:avLst/>
+          </a:prstGeom>
+          <a:ln w="28575">
+            <a:solidFill>
+              <a:srgbClr val="2E75B6"/>
+            </a:solidFill>
+            <a:tailEnd type="triangle"/>
+          </a:ln>
+        </p:spPr>
+        <p:style>
+          <a:lnRef idx="2">
+            <a:schemeClr val="accent1"/>
+          </a:lnRef>
+          <a:fillRef idx="0">
+            <a:schemeClr val="accent1"/>
+          </a:fillRef>
+          <a:effectRef idx="1">
+            <a:schemeClr val="accent1"/>
+          </a:effectRef>
+          <a:fontRef idx="minor">
+            <a:schemeClr val="tx1"/>
+          </a:fontRef>
+        </p:style>
+      </p:cxnSp>
+      <p:sp>
+        <p:nvSpPr>
+          <p:cNvPr id="30" name="Rectangle 29"/>
+          <p:cNvSpPr/>
+          <p:nvPr/>
+        </p:nvSpPr>
+        <p:spPr>
+          <a:xfrm>
+            <a:off x="1874519" y="2057400"/>
+            <a:ext cx="868680" cy="365760"/>
+          </a:xfrm>
+          <a:prstGeom prst="rect">
+            <a:avLst/>
+          </a:prstGeom>
+          <a:solidFill>
+            <a:srgbClr val="F0F1F3"/>
+          </a:solidFill>
+          <a:ln w="15240">
+            <a:solidFill>
+              <a:srgbClr val="7F7F7F"/>
+            </a:solidFill>
+          </a:ln>
+          <a:effectLst/>
+        </p:spPr>
+        <p:style>
+          <a:lnRef idx="1">
+            <a:schemeClr val="accent1"/>
+          </a:lnRef>
+          <a:fillRef idx="3">
+            <a:schemeClr val="accent1"/>
+          </a:fillRef>
+          <a:effectRef idx="2">
+            <a:schemeClr val="accent1"/>
+          </a:effectRef>
+          <a:fontRef idx="minor">
+            <a:schemeClr val="lt1"/>
+          </a:fontRef>
+        </p:style>
+        <p:txBody>
+          <a:bodyPr rtlCol="0" anchor="ctr" wrap="square" lIns="45720" rIns="45720" tIns="27432" bIns="27432"/>
+          <a:lstStyle/>
+          <a:p>
+            <a:pPr algn="ctr">
+              <a:spcAft>
+                <a:spcPts val="200"/>
+              </a:spcAft>
+            </a:pPr>
+            <a:r>
+              <a:rPr sz="900" b="1">
+                <a:solidFill>
+                  <a:srgbClr val="000000"/>
+                </a:solidFill>
+                <a:latin typeface="맑은 고딕"/>
+                <a:ea typeface="맑은 고딕"/>
+                <a:cs typeface="맑은 고딕"/>
+              </a:rPr>
+              <a:t>KVS</a:t>
+            </a:r>
+          </a:p>
+        </p:txBody>
+      </p:sp>
+      <p:cxnSp>
+        <p:nvCxnSpPr>
+          <p:cNvPr id="31" name="Connector 30"/>
+          <p:cNvCxnSpPr/>
+          <p:nvPr/>
+        </p:nvCxnSpPr>
+        <p:spPr>
+          <a:xfrm>
+            <a:off x="2743200" y="2240280"/>
+            <a:ext cx="228600" cy="0"/>
+          </a:xfrm>
+          <a:prstGeom prst="line">
+            <a:avLst/>
+          </a:prstGeom>
+          <a:ln w="28575">
+            <a:solidFill>
+              <a:srgbClr val="2E75B6"/>
+            </a:solidFill>
+            <a:tailEnd type="triangle"/>
+          </a:ln>
+        </p:spPr>
+        <p:style>
+          <a:lnRef idx="2">
+            <a:schemeClr val="accent1"/>
+          </a:lnRef>
+          <a:fillRef idx="0">
+            <a:schemeClr val="accent1"/>
+          </a:fillRef>
+          <a:effectRef idx="1">
+            <a:schemeClr val="accent1"/>
+          </a:effectRef>
+          <a:fontRef idx="minor">
+            <a:schemeClr val="tx1"/>
+          </a:fontRef>
+        </p:style>
+      </p:cxnSp>
+      <p:sp>
+        <p:nvSpPr>
+          <p:cNvPr id="32" name="Rectangle 31"/>
+          <p:cNvSpPr/>
+          <p:nvPr/>
+        </p:nvSpPr>
+        <p:spPr>
+          <a:xfrm>
+            <a:off x="2971800" y="2057400"/>
+            <a:ext cx="868680" cy="365760"/>
+          </a:xfrm>
+          <a:prstGeom prst="rect">
+            <a:avLst/>
+          </a:prstGeom>
+          <a:solidFill>
+            <a:srgbClr val="F0F1F3"/>
+          </a:solidFill>
+          <a:ln w="15240">
+            <a:solidFill>
+              <a:srgbClr val="7F7F7F"/>
+            </a:solidFill>
+          </a:ln>
+          <a:effectLst/>
+        </p:spPr>
+        <p:style>
+          <a:lnRef idx="1">
+            <a:schemeClr val="accent1"/>
+          </a:lnRef>
+          <a:fillRef idx="3">
+            <a:schemeClr val="accent1"/>
+          </a:fillRef>
+          <a:effectRef idx="2">
+            <a:schemeClr val="accent1"/>
+          </a:effectRef>
+          <a:fontRef idx="minor">
+            <a:schemeClr val="lt1"/>
+          </a:fontRef>
+        </p:style>
+        <p:txBody>
+          <a:bodyPr rtlCol="0" anchor="ctr" wrap="square" lIns="45720" rIns="45720" tIns="27432" bIns="27432"/>
+          <a:lstStyle/>
+          <a:p>
+            <a:pPr algn="ctr">
+              <a:spcAft>
+                <a:spcPts val="200"/>
+              </a:spcAft>
+            </a:pPr>
+            <a:r>
+              <a:rPr sz="900" b="1">
+                <a:solidFill>
+                  <a:srgbClr val="000000"/>
+                </a:solidFill>
+                <a:latin typeface="맑은 고딕"/>
+                <a:ea typeface="맑은 고딕"/>
+                <a:cs typeface="맑은 고딕"/>
+              </a:rPr>
+              <a:t>RTS</a:t>
+            </a:r>
+          </a:p>
+        </p:txBody>
+      </p:sp>
+      <p:cxnSp>
+        <p:nvCxnSpPr>
+          <p:cNvPr id="33" name="Connector 32"/>
+          <p:cNvCxnSpPr/>
+          <p:nvPr/>
+        </p:nvCxnSpPr>
+        <p:spPr>
+          <a:xfrm>
+            <a:off x="3840480" y="2240280"/>
+            <a:ext cx="228600" cy="0"/>
+          </a:xfrm>
+          <a:prstGeom prst="line">
+            <a:avLst/>
+          </a:prstGeom>
+          <a:ln w="28575">
+            <a:solidFill>
+              <a:srgbClr val="2E75B6"/>
+            </a:solidFill>
+            <a:tailEnd type="triangle"/>
+          </a:ln>
+        </p:spPr>
+        <p:style>
+          <a:lnRef idx="2">
+            <a:schemeClr val="accent1"/>
+          </a:lnRef>
+          <a:fillRef idx="0">
+            <a:schemeClr val="accent1"/>
+          </a:fillRef>
+          <a:effectRef idx="1">
+            <a:schemeClr val="accent1"/>
+          </a:effectRef>
+          <a:fontRef idx="minor">
+            <a:schemeClr val="tx1"/>
+          </a:fontRef>
+        </p:style>
+      </p:cxnSp>
+      <p:sp>
+        <p:nvSpPr>
+          <p:cNvPr id="34" name="Rectangle 33"/>
+          <p:cNvSpPr/>
+          <p:nvPr/>
+        </p:nvSpPr>
+        <p:spPr>
+          <a:xfrm>
+            <a:off x="4069079" y="2057400"/>
+            <a:ext cx="868680" cy="365760"/>
+          </a:xfrm>
+          <a:prstGeom prst="rect">
+            <a:avLst/>
+          </a:prstGeom>
+          <a:solidFill>
+            <a:srgbClr val="F0F1F3"/>
+          </a:solidFill>
+          <a:ln w="15240">
+            <a:solidFill>
+              <a:srgbClr val="7F7F7F"/>
+            </a:solidFill>
+          </a:ln>
+          <a:effectLst/>
+        </p:spPr>
+        <p:style>
+          <a:lnRef idx="1">
+            <a:schemeClr val="accent1"/>
+          </a:lnRef>
+          <a:fillRef idx="3">
+            <a:schemeClr val="accent1"/>
+          </a:fillRef>
+          <a:effectRef idx="2">
+            <a:schemeClr val="accent1"/>
+          </a:effectRef>
+          <a:fontRef idx="minor">
+            <a:schemeClr val="lt1"/>
+          </a:fontRef>
+        </p:style>
+        <p:txBody>
+          <a:bodyPr rtlCol="0" anchor="ctr" wrap="square" lIns="45720" rIns="45720" tIns="27432" bIns="27432"/>
+          <a:lstStyle/>
+          <a:p>
+            <a:pPr algn="ctr">
+              <a:spcAft>
+                <a:spcPts val="200"/>
+              </a:spcAft>
+            </a:pPr>
+            <a:r>
+              <a:rPr sz="900" b="1">
+                <a:solidFill>
+                  <a:srgbClr val="000000"/>
+                </a:solidFill>
+                <a:latin typeface="맑은 고딕"/>
+                <a:ea typeface="맑은 고딕"/>
+                <a:cs typeface="맑은 고딕"/>
+              </a:rPr>
+              <a:t>SR</a:t>
+            </a:r>
+          </a:p>
+        </p:txBody>
+      </p:sp>
+      <p:sp>
+        <p:nvSpPr>
+          <p:cNvPr id="35" name="TextBox 34"/>
           <p:cNvSpPr txBox="1"/>
           <p:nvPr/>
         </p:nvSpPr>
         <p:spPr>
           <a:xfrm>
-            <a:off x="6309360" y="5212080"/>
-            <a:ext cx="2743200" cy="228600"/>
+            <a:off x="274320" y="2560320"/>
+            <a:ext cx="457200" cy="274320"/>
           </a:xfrm>
           <a:prstGeom prst="rect">
             <a:avLst/>
@@ -10054,7 +12220,441 @@
               </a:spcAft>
             </a:pPr>
             <a:r>
-              <a:rPr sz="800" b="1">
+              <a:rPr sz="1000" b="1">
+                <a:solidFill>
+                  <a:srgbClr val="595959"/>
+                </a:solidFill>
+                <a:latin typeface="맑은 고딕"/>
+                <a:ea typeface="맑은 고딕"/>
+                <a:cs typeface="맑은 고딕"/>
+              </a:rPr>
+              <a:t>R3</a:t>
+            </a:r>
+          </a:p>
+        </p:txBody>
+      </p:sp>
+      <p:sp>
+        <p:nvSpPr>
+          <p:cNvPr id="36" name="Rectangle 35"/>
+          <p:cNvSpPr/>
+          <p:nvPr/>
+        </p:nvSpPr>
+        <p:spPr>
+          <a:xfrm>
+            <a:off x="777240" y="2514600"/>
+            <a:ext cx="868680" cy="365760"/>
+          </a:xfrm>
+          <a:prstGeom prst="rect">
+            <a:avLst/>
+          </a:prstGeom>
+          <a:solidFill>
+            <a:srgbClr val="F0F1F3"/>
+          </a:solidFill>
+          <a:ln w="15240">
+            <a:solidFill>
+              <a:srgbClr val="7F7F7F"/>
+            </a:solidFill>
+          </a:ln>
+          <a:effectLst/>
+        </p:spPr>
+        <p:style>
+          <a:lnRef idx="1">
+            <a:schemeClr val="accent1"/>
+          </a:lnRef>
+          <a:fillRef idx="3">
+            <a:schemeClr val="accent1"/>
+          </a:fillRef>
+          <a:effectRef idx="2">
+            <a:schemeClr val="accent1"/>
+          </a:effectRef>
+          <a:fontRef idx="minor">
+            <a:schemeClr val="lt1"/>
+          </a:fontRef>
+        </p:style>
+        <p:txBody>
+          <a:bodyPr rtlCol="0" anchor="ctr" wrap="square" lIns="45720" rIns="45720" tIns="27432" bIns="27432"/>
+          <a:lstStyle/>
+          <a:p>
+            <a:pPr algn="ctr">
+              <a:spcAft>
+                <a:spcPts val="200"/>
+              </a:spcAft>
+            </a:pPr>
+            <a:r>
+              <a:rPr sz="900" b="1">
+                <a:solidFill>
+                  <a:srgbClr val="000000"/>
+                </a:solidFill>
+                <a:latin typeface="맑은 고딕"/>
+                <a:ea typeface="맑은 고딕"/>
+                <a:cs typeface="맑은 고딕"/>
+              </a:rPr>
+              <a:t>AM</a:t>
+            </a:r>
+          </a:p>
+        </p:txBody>
+      </p:sp>
+      <p:cxnSp>
+        <p:nvCxnSpPr>
+          <p:cNvPr id="37" name="Connector 36"/>
+          <p:cNvCxnSpPr/>
+          <p:nvPr/>
+        </p:nvCxnSpPr>
+        <p:spPr>
+          <a:xfrm>
+            <a:off x="1645919" y="2697480"/>
+            <a:ext cx="228600" cy="0"/>
+          </a:xfrm>
+          <a:prstGeom prst="line">
+            <a:avLst/>
+          </a:prstGeom>
+          <a:ln w="28575">
+            <a:solidFill>
+              <a:srgbClr val="2E75B6"/>
+            </a:solidFill>
+            <a:tailEnd type="triangle"/>
+          </a:ln>
+        </p:spPr>
+        <p:style>
+          <a:lnRef idx="2">
+            <a:schemeClr val="accent1"/>
+          </a:lnRef>
+          <a:fillRef idx="0">
+            <a:schemeClr val="accent1"/>
+          </a:fillRef>
+          <a:effectRef idx="1">
+            <a:schemeClr val="accent1"/>
+          </a:effectRef>
+          <a:fontRef idx="minor">
+            <a:schemeClr val="tx1"/>
+          </a:fontRef>
+        </p:style>
+      </p:cxnSp>
+      <p:sp>
+        <p:nvSpPr>
+          <p:cNvPr id="38" name="Rectangle 37"/>
+          <p:cNvSpPr/>
+          <p:nvPr/>
+        </p:nvSpPr>
+        <p:spPr>
+          <a:xfrm>
+            <a:off x="1874519" y="2514600"/>
+            <a:ext cx="868680" cy="365760"/>
+          </a:xfrm>
+          <a:prstGeom prst="rect">
+            <a:avLst/>
+          </a:prstGeom>
+          <a:solidFill>
+            <a:srgbClr val="F0F1F3"/>
+          </a:solidFill>
+          <a:ln w="15240">
+            <a:solidFill>
+              <a:srgbClr val="7F7F7F"/>
+            </a:solidFill>
+          </a:ln>
+          <a:effectLst/>
+        </p:spPr>
+        <p:style>
+          <a:lnRef idx="1">
+            <a:schemeClr val="accent1"/>
+          </a:lnRef>
+          <a:fillRef idx="3">
+            <a:schemeClr val="accent1"/>
+          </a:fillRef>
+          <a:effectRef idx="2">
+            <a:schemeClr val="accent1"/>
+          </a:effectRef>
+          <a:fontRef idx="minor">
+            <a:schemeClr val="lt1"/>
+          </a:fontRef>
+        </p:style>
+        <p:txBody>
+          <a:bodyPr rtlCol="0" anchor="ctr" wrap="square" lIns="45720" rIns="45720" tIns="27432" bIns="27432"/>
+          <a:lstStyle/>
+          <a:p>
+            <a:pPr algn="ctr">
+              <a:spcAft>
+                <a:spcPts val="200"/>
+              </a:spcAft>
+            </a:pPr>
+            <a:r>
+              <a:rPr sz="900" b="1">
+                <a:solidFill>
+                  <a:srgbClr val="000000"/>
+                </a:solidFill>
+                <a:latin typeface="맑은 고딕"/>
+                <a:ea typeface="맑은 고딕"/>
+                <a:cs typeface="맑은 고딕"/>
+              </a:rPr>
+              <a:t>KVS</a:t>
+            </a:r>
+          </a:p>
+        </p:txBody>
+      </p:sp>
+      <p:cxnSp>
+        <p:nvCxnSpPr>
+          <p:cNvPr id="39" name="Connector 38"/>
+          <p:cNvCxnSpPr/>
+          <p:nvPr/>
+        </p:nvCxnSpPr>
+        <p:spPr>
+          <a:xfrm>
+            <a:off x="2743200" y="2697480"/>
+            <a:ext cx="228600" cy="0"/>
+          </a:xfrm>
+          <a:prstGeom prst="line">
+            <a:avLst/>
+          </a:prstGeom>
+          <a:ln w="28575">
+            <a:solidFill>
+              <a:srgbClr val="2E75B6"/>
+            </a:solidFill>
+            <a:tailEnd type="triangle"/>
+          </a:ln>
+        </p:spPr>
+        <p:style>
+          <a:lnRef idx="2">
+            <a:schemeClr val="accent1"/>
+          </a:lnRef>
+          <a:fillRef idx="0">
+            <a:schemeClr val="accent1"/>
+          </a:fillRef>
+          <a:effectRef idx="1">
+            <a:schemeClr val="accent1"/>
+          </a:effectRef>
+          <a:fontRef idx="minor">
+            <a:schemeClr val="tx1"/>
+          </a:fontRef>
+        </p:style>
+      </p:cxnSp>
+      <p:sp>
+        <p:nvSpPr>
+          <p:cNvPr id="40" name="Rectangle 39"/>
+          <p:cNvSpPr/>
+          <p:nvPr/>
+        </p:nvSpPr>
+        <p:spPr>
+          <a:xfrm>
+            <a:off x="2971800" y="2514600"/>
+            <a:ext cx="868680" cy="365760"/>
+          </a:xfrm>
+          <a:prstGeom prst="rect">
+            <a:avLst/>
+          </a:prstGeom>
+          <a:solidFill>
+            <a:srgbClr val="F0F1F3"/>
+          </a:solidFill>
+          <a:ln w="15240">
+            <a:solidFill>
+              <a:srgbClr val="7F7F7F"/>
+            </a:solidFill>
+          </a:ln>
+          <a:effectLst/>
+        </p:spPr>
+        <p:style>
+          <a:lnRef idx="1">
+            <a:schemeClr val="accent1"/>
+          </a:lnRef>
+          <a:fillRef idx="3">
+            <a:schemeClr val="accent1"/>
+          </a:fillRef>
+          <a:effectRef idx="2">
+            <a:schemeClr val="accent1"/>
+          </a:effectRef>
+          <a:fontRef idx="minor">
+            <a:schemeClr val="lt1"/>
+          </a:fontRef>
+        </p:style>
+        <p:txBody>
+          <a:bodyPr rtlCol="0" anchor="ctr" wrap="square" lIns="45720" rIns="45720" tIns="27432" bIns="27432"/>
+          <a:lstStyle/>
+          <a:p>
+            <a:pPr algn="ctr">
+              <a:spcAft>
+                <a:spcPts val="200"/>
+              </a:spcAft>
+            </a:pPr>
+            <a:r>
+              <a:rPr sz="900" b="1">
+                <a:solidFill>
+                  <a:srgbClr val="000000"/>
+                </a:solidFill>
+                <a:latin typeface="맑은 고딕"/>
+                <a:ea typeface="맑은 고딕"/>
+                <a:cs typeface="맑은 고딕"/>
+              </a:rPr>
+              <a:t>RTS</a:t>
+            </a:r>
+          </a:p>
+        </p:txBody>
+      </p:sp>
+      <p:cxnSp>
+        <p:nvCxnSpPr>
+          <p:cNvPr id="41" name="Connector 40"/>
+          <p:cNvCxnSpPr/>
+          <p:nvPr/>
+        </p:nvCxnSpPr>
+        <p:spPr>
+          <a:xfrm>
+            <a:off x="3840480" y="2697480"/>
+            <a:ext cx="228600" cy="0"/>
+          </a:xfrm>
+          <a:prstGeom prst="line">
+            <a:avLst/>
+          </a:prstGeom>
+          <a:ln w="28575">
+            <a:solidFill>
+              <a:srgbClr val="2E75B6"/>
+            </a:solidFill>
+            <a:tailEnd type="triangle"/>
+          </a:ln>
+        </p:spPr>
+        <p:style>
+          <a:lnRef idx="2">
+            <a:schemeClr val="accent1"/>
+          </a:lnRef>
+          <a:fillRef idx="0">
+            <a:schemeClr val="accent1"/>
+          </a:fillRef>
+          <a:effectRef idx="1">
+            <a:schemeClr val="accent1"/>
+          </a:effectRef>
+          <a:fontRef idx="minor">
+            <a:schemeClr val="tx1"/>
+          </a:fontRef>
+        </p:style>
+      </p:cxnSp>
+      <p:sp>
+        <p:nvSpPr>
+          <p:cNvPr id="42" name="Rectangle 41"/>
+          <p:cNvSpPr/>
+          <p:nvPr/>
+        </p:nvSpPr>
+        <p:spPr>
+          <a:xfrm>
+            <a:off x="4069079" y="2514600"/>
+            <a:ext cx="868680" cy="365760"/>
+          </a:xfrm>
+          <a:prstGeom prst="rect">
+            <a:avLst/>
+          </a:prstGeom>
+          <a:solidFill>
+            <a:srgbClr val="F0F1F3"/>
+          </a:solidFill>
+          <a:ln w="15240">
+            <a:solidFill>
+              <a:srgbClr val="7F7F7F"/>
+            </a:solidFill>
+          </a:ln>
+          <a:effectLst/>
+        </p:spPr>
+        <p:style>
+          <a:lnRef idx="1">
+            <a:schemeClr val="accent1"/>
+          </a:lnRef>
+          <a:fillRef idx="3">
+            <a:schemeClr val="accent1"/>
+          </a:fillRef>
+          <a:effectRef idx="2">
+            <a:schemeClr val="accent1"/>
+          </a:effectRef>
+          <a:fontRef idx="minor">
+            <a:schemeClr val="lt1"/>
+          </a:fontRef>
+        </p:style>
+        <p:txBody>
+          <a:bodyPr rtlCol="0" anchor="ctr" wrap="square" lIns="45720" rIns="45720" tIns="27432" bIns="27432"/>
+          <a:lstStyle/>
+          <a:p>
+            <a:pPr algn="ctr">
+              <a:spcAft>
+                <a:spcPts val="200"/>
+              </a:spcAft>
+            </a:pPr>
+            <a:r>
+              <a:rPr sz="900" b="1">
+                <a:solidFill>
+                  <a:srgbClr val="000000"/>
+                </a:solidFill>
+                <a:latin typeface="맑은 고딕"/>
+                <a:ea typeface="맑은 고딕"/>
+                <a:cs typeface="맑은 고딕"/>
+              </a:rPr>
+              <a:t>SR</a:t>
+            </a:r>
+          </a:p>
+        </p:txBody>
+      </p:sp>
+      <p:sp>
+        <p:nvSpPr>
+          <p:cNvPr id="43" name="TextBox 42"/>
+          <p:cNvSpPr txBox="1"/>
+          <p:nvPr/>
+        </p:nvSpPr>
+        <p:spPr>
+          <a:xfrm>
+            <a:off x="5029200" y="1691640"/>
+            <a:ext cx="1005840" cy="822960"/>
+          </a:xfrm>
+          <a:prstGeom prst="rect">
+            <a:avLst/>
+          </a:prstGeom>
+          <a:noFill/>
+        </p:spPr>
+        <p:txBody>
+          <a:bodyPr wrap="square" anchor="t" lIns="45720" rIns="45720" tIns="27432" bIns="27432">
+            <a:spAutoFit/>
+          </a:bodyPr>
+          <a:lstStyle/>
+          <a:p>
+            <a:pPr algn="l">
+              <a:spcAft>
+                <a:spcPts val="200"/>
+              </a:spcAft>
+            </a:pPr>
+            <a:r>
+              <a:rPr sz="850" b="1">
+                <a:solidFill>
+                  <a:srgbClr val="FF0000"/>
+                </a:solidFill>
+                <a:latin typeface="맑은 고딕"/>
+                <a:ea typeface="맑은 고딕"/>
+                <a:cs typeface="맑은 고딕"/>
+              </a:rPr>
+              <a:t>요청마다 분석 3단계 반복</a:t>
+            </a:r>
+          </a:p>
+        </p:txBody>
+      </p:sp>
+      <p:sp>
+        <p:nvSpPr>
+          <p:cNvPr id="44" name="TextBox 43"/>
+          <p:cNvSpPr txBox="1"/>
+          <p:nvPr/>
+        </p:nvSpPr>
+        <p:spPr>
+          <a:xfrm>
+            <a:off x="274320" y="3017520"/>
+            <a:ext cx="5669280" cy="457200"/>
+          </a:xfrm>
+          <a:prstGeom prst="rect">
+            <a:avLst/>
+          </a:prstGeom>
+          <a:noFill/>
+        </p:spPr>
+        <p:txBody>
+          <a:bodyPr wrap="square" anchor="t" lIns="45720" rIns="45720" tIns="27432" bIns="27432">
+            <a:spAutoFit/>
+          </a:bodyPr>
+          <a:lstStyle/>
+          <a:p>
+            <a:pPr algn="l">
+              <a:spcAft>
+                <a:spcPts val="100"/>
+              </a:spcAft>
+            </a:pPr>
+            <a:r>
+              <a:rPr sz="900" b="1">
                 <a:solidFill>
                   <a:srgbClr val="2E75B6"/>
                 </a:solidFill>
@@ -10062,21 +12662,39 @@
                 <a:ea typeface="맑은 고딕"/>
                 <a:cs typeface="맑은 고딕"/>
               </a:rPr>
-              <a:t>서빙 경로 (요청 시점, 동기)</a:t>
-            </a:r>
-          </a:p>
-        </p:txBody>
-      </p:sp>
-      <p:sp>
-        <p:nvSpPr>
-          <p:cNvPr id="82" name="TextBox 81"/>
+              <a:t>Pipe : 요청 범위에서만 존재 · 순차 · 1:1, 요청이 끝나면 소멸</a:t>
+            </a:r>
+          </a:p>
+          <a:p>
+            <a:pPr algn="l">
+              <a:spcAft>
+                <a:spcPts val="100"/>
+              </a:spcAft>
+            </a:pPr>
+            <a:r>
+              <a:rPr sz="900" b="0">
+                <a:solidFill>
+                  <a:srgbClr val="404040"/>
+                </a:solidFill>
+                <a:latin typeface="맑은 고딕"/>
+                <a:ea typeface="맑은 고딕"/>
+                <a:cs typeface="맑은 고딕"/>
+              </a:rPr>
+              <a:t>실제 Query를 매번 반영 → 정확도 유리, 파생 상태 없음</a:t>
+            </a:r>
+          </a:p>
+        </p:txBody>
+      </p:sp>
+      <p:sp>
+        <p:nvSpPr>
+          <p:cNvPr id="45" name="TextBox 44"/>
           <p:cNvSpPr txBox="1"/>
           <p:nvPr/>
         </p:nvSpPr>
         <p:spPr>
           <a:xfrm>
-            <a:off x="9144000" y="5212080"/>
-            <a:ext cx="2743200" cy="228600"/>
+            <a:off x="6217920" y="1645920"/>
+            <a:ext cx="502920" cy="274320"/>
           </a:xfrm>
           <a:prstGeom prst="rect">
             <a:avLst/>
@@ -10089,13 +12707,880 @@
           </a:bodyPr>
           <a:lstStyle/>
           <a:p>
-            <a:pPr algn="r">
+            <a:pPr algn="l">
               <a:spcAft>
                 <a:spcPts val="200"/>
               </a:spcAft>
             </a:pPr>
             <a:r>
-              <a:rPr sz="800" b="0">
+              <a:rPr sz="900" b="1">
+                <a:solidFill>
+                  <a:srgbClr val="C55A11"/>
+                </a:solidFill>
+                <a:latin typeface="맑은 고딕"/>
+                <a:ea typeface="맑은 고딕"/>
+                <a:cs typeface="맑은 고딕"/>
+              </a:rPr>
+              <a:t>사전</a:t>
+            </a:r>
+          </a:p>
+        </p:txBody>
+      </p:sp>
+      <p:sp>
+        <p:nvSpPr>
+          <p:cNvPr id="46" name="Rectangle 45"/>
+          <p:cNvSpPr/>
+          <p:nvPr/>
+        </p:nvSpPr>
+        <p:spPr>
+          <a:xfrm>
+            <a:off x="6720840" y="1600200"/>
+            <a:ext cx="822960" cy="365760"/>
+          </a:xfrm>
+          <a:prstGeom prst="rect">
+            <a:avLst/>
+          </a:prstGeom>
+          <a:solidFill>
+            <a:srgbClr val="FBE5D6"/>
+          </a:solidFill>
+          <a:ln w="15240">
+            <a:solidFill>
+              <a:srgbClr val="C55A11"/>
+            </a:solidFill>
+          </a:ln>
+          <a:effectLst/>
+        </p:spPr>
+        <p:style>
+          <a:lnRef idx="1">
+            <a:schemeClr val="accent1"/>
+          </a:lnRef>
+          <a:fillRef idx="3">
+            <a:schemeClr val="accent1"/>
+          </a:fillRef>
+          <a:effectRef idx="2">
+            <a:schemeClr val="accent1"/>
+          </a:effectRef>
+          <a:fontRef idx="minor">
+            <a:schemeClr val="lt1"/>
+          </a:fontRef>
+        </p:style>
+        <p:txBody>
+          <a:bodyPr rtlCol="0" anchor="ctr" wrap="square" lIns="45720" rIns="45720" tIns="27432" bIns="27432"/>
+          <a:lstStyle/>
+          <a:p>
+            <a:pPr algn="ctr">
+              <a:spcAft>
+                <a:spcPts val="200"/>
+              </a:spcAft>
+            </a:pPr>
+            <a:r>
+              <a:rPr sz="900" b="1">
+                <a:solidFill>
+                  <a:srgbClr val="000000"/>
+                </a:solidFill>
+                <a:latin typeface="맑은 고딕"/>
+                <a:ea typeface="맑은 고딕"/>
+                <a:cs typeface="맑은 고딕"/>
+              </a:rPr>
+              <a:t>QS</a:t>
+            </a:r>
+          </a:p>
+        </p:txBody>
+      </p:sp>
+      <p:cxnSp>
+        <p:nvCxnSpPr>
+          <p:cNvPr id="47" name="Connector 46"/>
+          <p:cNvCxnSpPr/>
+          <p:nvPr/>
+        </p:nvCxnSpPr>
+        <p:spPr>
+          <a:xfrm>
+            <a:off x="7543800" y="1783080"/>
+            <a:ext cx="228600" cy="0"/>
+          </a:xfrm>
+          <a:prstGeom prst="line">
+            <a:avLst/>
+          </a:prstGeom>
+          <a:ln w="19050">
+            <a:solidFill>
+              <a:srgbClr val="C55A11"/>
+            </a:solidFill>
+            <a:prstDash val="dash"/>
+            <a:tailEnd type="triangle"/>
+          </a:ln>
+        </p:spPr>
+        <p:style>
+          <a:lnRef idx="2">
+            <a:schemeClr val="accent1"/>
+          </a:lnRef>
+          <a:fillRef idx="0">
+            <a:schemeClr val="accent1"/>
+          </a:fillRef>
+          <a:effectRef idx="1">
+            <a:schemeClr val="accent1"/>
+          </a:effectRef>
+          <a:fontRef idx="minor">
+            <a:schemeClr val="tx1"/>
+          </a:fontRef>
+        </p:style>
+      </p:cxnSp>
+      <p:sp>
+        <p:nvSpPr>
+          <p:cNvPr id="48" name="Rectangle 47"/>
+          <p:cNvSpPr/>
+          <p:nvPr/>
+        </p:nvSpPr>
+        <p:spPr>
+          <a:xfrm>
+            <a:off x="7772400" y="1600200"/>
+            <a:ext cx="822960" cy="365760"/>
+          </a:xfrm>
+          <a:prstGeom prst="rect">
+            <a:avLst/>
+          </a:prstGeom>
+          <a:solidFill>
+            <a:srgbClr val="F0F1F3"/>
+          </a:solidFill>
+          <a:ln w="15240">
+            <a:solidFill>
+              <a:srgbClr val="7F7F7F"/>
+            </a:solidFill>
+          </a:ln>
+          <a:effectLst/>
+        </p:spPr>
+        <p:style>
+          <a:lnRef idx="1">
+            <a:schemeClr val="accent1"/>
+          </a:lnRef>
+          <a:fillRef idx="3">
+            <a:schemeClr val="accent1"/>
+          </a:fillRef>
+          <a:effectRef idx="2">
+            <a:schemeClr val="accent1"/>
+          </a:effectRef>
+          <a:fontRef idx="minor">
+            <a:schemeClr val="lt1"/>
+          </a:fontRef>
+        </p:style>
+        <p:txBody>
+          <a:bodyPr rtlCol="0" anchor="ctr" wrap="square" lIns="45720" rIns="45720" tIns="27432" bIns="27432"/>
+          <a:lstStyle/>
+          <a:p>
+            <a:pPr algn="ctr">
+              <a:spcAft>
+                <a:spcPts val="200"/>
+              </a:spcAft>
+            </a:pPr>
+            <a:r>
+              <a:rPr sz="900" b="1">
+                <a:solidFill>
+                  <a:srgbClr val="000000"/>
+                </a:solidFill>
+                <a:latin typeface="맑은 고딕"/>
+                <a:ea typeface="맑은 고딕"/>
+                <a:cs typeface="맑은 고딕"/>
+              </a:rPr>
+              <a:t>AM</a:t>
+            </a:r>
+          </a:p>
+        </p:txBody>
+      </p:sp>
+      <p:cxnSp>
+        <p:nvCxnSpPr>
+          <p:cNvPr id="49" name="Connector 48"/>
+          <p:cNvCxnSpPr/>
+          <p:nvPr/>
+        </p:nvCxnSpPr>
+        <p:spPr>
+          <a:xfrm>
+            <a:off x="8595360" y="1783080"/>
+            <a:ext cx="228600" cy="0"/>
+          </a:xfrm>
+          <a:prstGeom prst="line">
+            <a:avLst/>
+          </a:prstGeom>
+          <a:ln w="19050">
+            <a:solidFill>
+              <a:srgbClr val="C55A11"/>
+            </a:solidFill>
+            <a:prstDash val="dash"/>
+            <a:tailEnd type="triangle"/>
+          </a:ln>
+        </p:spPr>
+        <p:style>
+          <a:lnRef idx="2">
+            <a:schemeClr val="accent1"/>
+          </a:lnRef>
+          <a:fillRef idx="0">
+            <a:schemeClr val="accent1"/>
+          </a:fillRef>
+          <a:effectRef idx="1">
+            <a:schemeClr val="accent1"/>
+          </a:effectRef>
+          <a:fontRef idx="minor">
+            <a:schemeClr val="tx1"/>
+          </a:fontRef>
+        </p:style>
+      </p:cxnSp>
+      <p:sp>
+        <p:nvSpPr>
+          <p:cNvPr id="50" name="Rectangle 49"/>
+          <p:cNvSpPr/>
+          <p:nvPr/>
+        </p:nvSpPr>
+        <p:spPr>
+          <a:xfrm>
+            <a:off x="8823959" y="1600200"/>
+            <a:ext cx="822960" cy="365760"/>
+          </a:xfrm>
+          <a:prstGeom prst="rect">
+            <a:avLst/>
+          </a:prstGeom>
+          <a:solidFill>
+            <a:srgbClr val="F0F1F3"/>
+          </a:solidFill>
+          <a:ln w="15240">
+            <a:solidFill>
+              <a:srgbClr val="7F7F7F"/>
+            </a:solidFill>
+          </a:ln>
+          <a:effectLst/>
+        </p:spPr>
+        <p:style>
+          <a:lnRef idx="1">
+            <a:schemeClr val="accent1"/>
+          </a:lnRef>
+          <a:fillRef idx="3">
+            <a:schemeClr val="accent1"/>
+          </a:fillRef>
+          <a:effectRef idx="2">
+            <a:schemeClr val="accent1"/>
+          </a:effectRef>
+          <a:fontRef idx="minor">
+            <a:schemeClr val="lt1"/>
+          </a:fontRef>
+        </p:style>
+        <p:txBody>
+          <a:bodyPr rtlCol="0" anchor="ctr" wrap="square" lIns="45720" rIns="45720" tIns="27432" bIns="27432"/>
+          <a:lstStyle/>
+          <a:p>
+            <a:pPr algn="ctr">
+              <a:spcAft>
+                <a:spcPts val="200"/>
+              </a:spcAft>
+            </a:pPr>
+            <a:r>
+              <a:rPr sz="900" b="1">
+                <a:solidFill>
+                  <a:srgbClr val="000000"/>
+                </a:solidFill>
+                <a:latin typeface="맑은 고딕"/>
+                <a:ea typeface="맑은 고딕"/>
+                <a:cs typeface="맑은 고딕"/>
+              </a:rPr>
+              <a:t>KVS</a:t>
+            </a:r>
+          </a:p>
+        </p:txBody>
+      </p:sp>
+      <p:cxnSp>
+        <p:nvCxnSpPr>
+          <p:cNvPr id="51" name="Connector 50"/>
+          <p:cNvCxnSpPr/>
+          <p:nvPr/>
+        </p:nvCxnSpPr>
+        <p:spPr>
+          <a:xfrm>
+            <a:off x="9646919" y="1783080"/>
+            <a:ext cx="228600" cy="0"/>
+          </a:xfrm>
+          <a:prstGeom prst="line">
+            <a:avLst/>
+          </a:prstGeom>
+          <a:ln w="19050">
+            <a:solidFill>
+              <a:srgbClr val="C55A11"/>
+            </a:solidFill>
+            <a:prstDash val="dash"/>
+            <a:tailEnd type="triangle"/>
+          </a:ln>
+        </p:spPr>
+        <p:style>
+          <a:lnRef idx="2">
+            <a:schemeClr val="accent1"/>
+          </a:lnRef>
+          <a:fillRef idx="0">
+            <a:schemeClr val="accent1"/>
+          </a:fillRef>
+          <a:effectRef idx="1">
+            <a:schemeClr val="accent1"/>
+          </a:effectRef>
+          <a:fontRef idx="minor">
+            <a:schemeClr val="tx1"/>
+          </a:fontRef>
+        </p:style>
+      </p:cxnSp>
+      <p:sp>
+        <p:nvSpPr>
+          <p:cNvPr id="52" name="Rectangle 51"/>
+          <p:cNvSpPr/>
+          <p:nvPr/>
+        </p:nvSpPr>
+        <p:spPr>
+          <a:xfrm>
+            <a:off x="9875519" y="1600200"/>
+            <a:ext cx="822960" cy="365760"/>
+          </a:xfrm>
+          <a:prstGeom prst="rect">
+            <a:avLst/>
+          </a:prstGeom>
+          <a:solidFill>
+            <a:srgbClr val="F0F1F3"/>
+          </a:solidFill>
+          <a:ln w="15240">
+            <a:solidFill>
+              <a:srgbClr val="7F7F7F"/>
+            </a:solidFill>
+          </a:ln>
+          <a:effectLst/>
+        </p:spPr>
+        <p:style>
+          <a:lnRef idx="1">
+            <a:schemeClr val="accent1"/>
+          </a:lnRef>
+          <a:fillRef idx="3">
+            <a:schemeClr val="accent1"/>
+          </a:fillRef>
+          <a:effectRef idx="2">
+            <a:schemeClr val="accent1"/>
+          </a:effectRef>
+          <a:fontRef idx="minor">
+            <a:schemeClr val="lt1"/>
+          </a:fontRef>
+        </p:style>
+        <p:txBody>
+          <a:bodyPr rtlCol="0" anchor="ctr" wrap="square" lIns="45720" rIns="45720" tIns="27432" bIns="27432"/>
+          <a:lstStyle/>
+          <a:p>
+            <a:pPr algn="ctr">
+              <a:spcAft>
+                <a:spcPts val="200"/>
+              </a:spcAft>
+            </a:pPr>
+            <a:r>
+              <a:rPr sz="900" b="1">
+                <a:solidFill>
+                  <a:srgbClr val="000000"/>
+                </a:solidFill>
+                <a:latin typeface="맑은 고딕"/>
+                <a:ea typeface="맑은 고딕"/>
+                <a:cs typeface="맑은 고딕"/>
+              </a:rPr>
+              <a:t>RTS</a:t>
+            </a:r>
+          </a:p>
+        </p:txBody>
+      </p:sp>
+      <p:sp>
+        <p:nvSpPr>
+          <p:cNvPr id="53" name="Rectangle 52"/>
+          <p:cNvSpPr/>
+          <p:nvPr/>
+        </p:nvSpPr>
+        <p:spPr>
+          <a:xfrm>
+            <a:off x="6245352" y="2240280"/>
+            <a:ext cx="5669280" cy="347472"/>
+          </a:xfrm>
+          <a:prstGeom prst="rect">
+            <a:avLst/>
+          </a:prstGeom>
+          <a:solidFill>
+            <a:srgbClr val="FBE5D6"/>
+          </a:solidFill>
+          <a:ln w="15240">
+            <a:solidFill>
+              <a:srgbClr val="C55A11"/>
+            </a:solidFill>
+          </a:ln>
+          <a:effectLst/>
+        </p:spPr>
+        <p:style>
+          <a:lnRef idx="1">
+            <a:schemeClr val="accent1"/>
+          </a:lnRef>
+          <a:fillRef idx="3">
+            <a:schemeClr val="accent1"/>
+          </a:fillRef>
+          <a:effectRef idx="2">
+            <a:schemeClr val="accent1"/>
+          </a:effectRef>
+          <a:fontRef idx="minor">
+            <a:schemeClr val="lt1"/>
+          </a:fontRef>
+        </p:style>
+        <p:txBody>
+          <a:bodyPr rtlCol="0" anchor="ctr" wrap="square" lIns="45720" rIns="45720" tIns="27432" bIns="27432"/>
+          <a:lstStyle/>
+          <a:p>
+            <a:pPr algn="ctr">
+              <a:spcAft>
+                <a:spcPts val="200"/>
+              </a:spcAft>
+            </a:pPr>
+            <a:r>
+              <a:rPr sz="900" b="1">
+                <a:solidFill>
+                  <a:srgbClr val="000000"/>
+                </a:solidFill>
+                <a:latin typeface="맑은 고딕"/>
+                <a:ea typeface="맑은 고딕"/>
+                <a:cs typeface="맑은 고딕"/>
+              </a:rPr>
+              <a:t>Repository : 재계산 위치 (영속, 키로 조회)</a:t>
+            </a:r>
+          </a:p>
+        </p:txBody>
+      </p:sp>
+      <p:cxnSp>
+        <p:nvCxnSpPr>
+          <p:cNvPr id="54" name="Connector 53"/>
+          <p:cNvCxnSpPr/>
+          <p:nvPr/>
+        </p:nvCxnSpPr>
+        <p:spPr>
+          <a:xfrm>
+            <a:off x="10287000" y="1965960"/>
+            <a:ext cx="0" cy="274320"/>
+          </a:xfrm>
+          <a:prstGeom prst="line">
+            <a:avLst/>
+          </a:prstGeom>
+          <a:ln w="19050">
+            <a:solidFill>
+              <a:srgbClr val="C55A11"/>
+            </a:solidFill>
+            <a:prstDash val="dash"/>
+            <a:tailEnd type="triangle"/>
+          </a:ln>
+        </p:spPr>
+        <p:style>
+          <a:lnRef idx="2">
+            <a:schemeClr val="accent1"/>
+          </a:lnRef>
+          <a:fillRef idx="0">
+            <a:schemeClr val="accent1"/>
+          </a:fillRef>
+          <a:effectRef idx="1">
+            <a:schemeClr val="accent1"/>
+          </a:effectRef>
+          <a:fontRef idx="minor">
+            <a:schemeClr val="tx1"/>
+          </a:fontRef>
+        </p:style>
+      </p:cxnSp>
+      <p:sp>
+        <p:nvSpPr>
+          <p:cNvPr id="55" name="TextBox 54"/>
+          <p:cNvSpPr txBox="1"/>
+          <p:nvPr/>
+        </p:nvSpPr>
+        <p:spPr>
+          <a:xfrm>
+            <a:off x="10332720" y="1965960"/>
+            <a:ext cx="1371600" cy="201168"/>
+          </a:xfrm>
+          <a:prstGeom prst="rect">
+            <a:avLst/>
+          </a:prstGeom>
+          <a:noFill/>
+        </p:spPr>
+        <p:txBody>
+          <a:bodyPr wrap="square" anchor="t" lIns="45720" rIns="45720" tIns="27432" bIns="27432">
+            <a:spAutoFit/>
+          </a:bodyPr>
+          <a:lstStyle/>
+          <a:p>
+            <a:pPr algn="l">
+              <a:spcAft>
+                <a:spcPts val="200"/>
+              </a:spcAft>
+            </a:pPr>
+            <a:r>
+              <a:rPr sz="750" b="0">
+                <a:solidFill>
+                  <a:srgbClr val="C55A11"/>
+                </a:solidFill>
+                <a:latin typeface="맑은 고딕"/>
+                <a:ea typeface="맑은 고딕"/>
+                <a:cs typeface="맑은 고딕"/>
+              </a:rPr>
+              <a:t>write 1회</a:t>
+            </a:r>
+          </a:p>
+        </p:txBody>
+      </p:sp>
+      <p:sp>
+        <p:nvSpPr>
+          <p:cNvPr id="56" name="Rectangle 55"/>
+          <p:cNvSpPr/>
+          <p:nvPr/>
+        </p:nvSpPr>
+        <p:spPr>
+          <a:xfrm>
+            <a:off x="6720840" y="2834640"/>
+            <a:ext cx="914400" cy="310896"/>
+          </a:xfrm>
+          <a:prstGeom prst="rect">
+            <a:avLst/>
+          </a:prstGeom>
+          <a:solidFill>
+            <a:srgbClr val="F0F1F3"/>
+          </a:solidFill>
+          <a:ln w="15240">
+            <a:solidFill>
+              <a:srgbClr val="7F7F7F"/>
+            </a:solidFill>
+          </a:ln>
+          <a:effectLst/>
+        </p:spPr>
+        <p:style>
+          <a:lnRef idx="1">
+            <a:schemeClr val="accent1"/>
+          </a:lnRef>
+          <a:fillRef idx="3">
+            <a:schemeClr val="accent1"/>
+          </a:fillRef>
+          <a:effectRef idx="2">
+            <a:schemeClr val="accent1"/>
+          </a:effectRef>
+          <a:fontRef idx="minor">
+            <a:schemeClr val="lt1"/>
+          </a:fontRef>
+        </p:style>
+        <p:txBody>
+          <a:bodyPr rtlCol="0" anchor="ctr" wrap="square" lIns="45720" rIns="45720" tIns="27432" bIns="27432"/>
+          <a:lstStyle/>
+          <a:p>
+            <a:pPr algn="ctr">
+              <a:spcAft>
+                <a:spcPts val="200"/>
+              </a:spcAft>
+            </a:pPr>
+            <a:r>
+              <a:rPr sz="900" b="1">
+                <a:solidFill>
+                  <a:srgbClr val="000000"/>
+                </a:solidFill>
+                <a:latin typeface="맑은 고딕"/>
+                <a:ea typeface="맑은 고딕"/>
+                <a:cs typeface="맑은 고딕"/>
+              </a:rPr>
+              <a:t>R1 : SR</a:t>
+            </a:r>
+          </a:p>
+        </p:txBody>
+      </p:sp>
+      <p:cxnSp>
+        <p:nvCxnSpPr>
+          <p:cNvPr id="57" name="Connector 56"/>
+          <p:cNvCxnSpPr/>
+          <p:nvPr/>
+        </p:nvCxnSpPr>
+        <p:spPr>
+          <a:xfrm flipV="1">
+            <a:off x="7178040" y="2587752"/>
+            <a:ext cx="0" cy="246888"/>
+          </a:xfrm>
+          <a:prstGeom prst="line">
+            <a:avLst/>
+          </a:prstGeom>
+          <a:ln w="19050">
+            <a:solidFill>
+              <a:srgbClr val="C55A11"/>
+            </a:solidFill>
+            <a:tailEnd type="triangle"/>
+          </a:ln>
+        </p:spPr>
+        <p:style>
+          <a:lnRef idx="2">
+            <a:schemeClr val="accent1"/>
+          </a:lnRef>
+          <a:fillRef idx="0">
+            <a:schemeClr val="accent1"/>
+          </a:fillRef>
+          <a:effectRef idx="1">
+            <a:schemeClr val="accent1"/>
+          </a:effectRef>
+          <a:fontRef idx="minor">
+            <a:schemeClr val="tx1"/>
+          </a:fontRef>
+        </p:style>
+      </p:cxnSp>
+      <p:sp>
+        <p:nvSpPr>
+          <p:cNvPr id="58" name="Rectangle 57"/>
+          <p:cNvSpPr/>
+          <p:nvPr/>
+        </p:nvSpPr>
+        <p:spPr>
+          <a:xfrm>
+            <a:off x="7909560" y="2834640"/>
+            <a:ext cx="914400" cy="310896"/>
+          </a:xfrm>
+          <a:prstGeom prst="rect">
+            <a:avLst/>
+          </a:prstGeom>
+          <a:solidFill>
+            <a:srgbClr val="F0F1F3"/>
+          </a:solidFill>
+          <a:ln w="15240">
+            <a:solidFill>
+              <a:srgbClr val="7F7F7F"/>
+            </a:solidFill>
+          </a:ln>
+          <a:effectLst/>
+        </p:spPr>
+        <p:style>
+          <a:lnRef idx="1">
+            <a:schemeClr val="accent1"/>
+          </a:lnRef>
+          <a:fillRef idx="3">
+            <a:schemeClr val="accent1"/>
+          </a:fillRef>
+          <a:effectRef idx="2">
+            <a:schemeClr val="accent1"/>
+          </a:effectRef>
+          <a:fontRef idx="minor">
+            <a:schemeClr val="lt1"/>
+          </a:fontRef>
+        </p:style>
+        <p:txBody>
+          <a:bodyPr rtlCol="0" anchor="ctr" wrap="square" lIns="45720" rIns="45720" tIns="27432" bIns="27432"/>
+          <a:lstStyle/>
+          <a:p>
+            <a:pPr algn="ctr">
+              <a:spcAft>
+                <a:spcPts val="200"/>
+              </a:spcAft>
+            </a:pPr>
+            <a:r>
+              <a:rPr sz="900" b="1">
+                <a:solidFill>
+                  <a:srgbClr val="000000"/>
+                </a:solidFill>
+                <a:latin typeface="맑은 고딕"/>
+                <a:ea typeface="맑은 고딕"/>
+                <a:cs typeface="맑은 고딕"/>
+              </a:rPr>
+              <a:t>R2 : SR</a:t>
+            </a:r>
+          </a:p>
+        </p:txBody>
+      </p:sp>
+      <p:cxnSp>
+        <p:nvCxnSpPr>
+          <p:cNvPr id="59" name="Connector 58"/>
+          <p:cNvCxnSpPr/>
+          <p:nvPr/>
+        </p:nvCxnSpPr>
+        <p:spPr>
+          <a:xfrm flipV="1">
+            <a:off x="8366760" y="2587752"/>
+            <a:ext cx="0" cy="246888"/>
+          </a:xfrm>
+          <a:prstGeom prst="line">
+            <a:avLst/>
+          </a:prstGeom>
+          <a:ln w="19050">
+            <a:solidFill>
+              <a:srgbClr val="C55A11"/>
+            </a:solidFill>
+            <a:tailEnd type="triangle"/>
+          </a:ln>
+        </p:spPr>
+        <p:style>
+          <a:lnRef idx="2">
+            <a:schemeClr val="accent1"/>
+          </a:lnRef>
+          <a:fillRef idx="0">
+            <a:schemeClr val="accent1"/>
+          </a:fillRef>
+          <a:effectRef idx="1">
+            <a:schemeClr val="accent1"/>
+          </a:effectRef>
+          <a:fontRef idx="minor">
+            <a:schemeClr val="tx1"/>
+          </a:fontRef>
+        </p:style>
+      </p:cxnSp>
+      <p:sp>
+        <p:nvSpPr>
+          <p:cNvPr id="60" name="Rectangle 59"/>
+          <p:cNvSpPr/>
+          <p:nvPr/>
+        </p:nvSpPr>
+        <p:spPr>
+          <a:xfrm>
+            <a:off x="9098280" y="2834640"/>
+            <a:ext cx="914400" cy="310896"/>
+          </a:xfrm>
+          <a:prstGeom prst="rect">
+            <a:avLst/>
+          </a:prstGeom>
+          <a:solidFill>
+            <a:srgbClr val="F0F1F3"/>
+          </a:solidFill>
+          <a:ln w="15240">
+            <a:solidFill>
+              <a:srgbClr val="7F7F7F"/>
+            </a:solidFill>
+          </a:ln>
+          <a:effectLst/>
+        </p:spPr>
+        <p:style>
+          <a:lnRef idx="1">
+            <a:schemeClr val="accent1"/>
+          </a:lnRef>
+          <a:fillRef idx="3">
+            <a:schemeClr val="accent1"/>
+          </a:fillRef>
+          <a:effectRef idx="2">
+            <a:schemeClr val="accent1"/>
+          </a:effectRef>
+          <a:fontRef idx="minor">
+            <a:schemeClr val="lt1"/>
+          </a:fontRef>
+        </p:style>
+        <p:txBody>
+          <a:bodyPr rtlCol="0" anchor="ctr" wrap="square" lIns="45720" rIns="45720" tIns="27432" bIns="27432"/>
+          <a:lstStyle/>
+          <a:p>
+            <a:pPr algn="ctr">
+              <a:spcAft>
+                <a:spcPts val="200"/>
+              </a:spcAft>
+            </a:pPr>
+            <a:r>
+              <a:rPr sz="900" b="1">
+                <a:solidFill>
+                  <a:srgbClr val="000000"/>
+                </a:solidFill>
+                <a:latin typeface="맑은 고딕"/>
+                <a:ea typeface="맑은 고딕"/>
+                <a:cs typeface="맑은 고딕"/>
+              </a:rPr>
+              <a:t>R3 : SR</a:t>
+            </a:r>
+          </a:p>
+        </p:txBody>
+      </p:sp>
+      <p:cxnSp>
+        <p:nvCxnSpPr>
+          <p:cNvPr id="61" name="Connector 60"/>
+          <p:cNvCxnSpPr/>
+          <p:nvPr/>
+        </p:nvCxnSpPr>
+        <p:spPr>
+          <a:xfrm flipV="1">
+            <a:off x="9555480" y="2587752"/>
+            <a:ext cx="0" cy="246888"/>
+          </a:xfrm>
+          <a:prstGeom prst="line">
+            <a:avLst/>
+          </a:prstGeom>
+          <a:ln w="19050">
+            <a:solidFill>
+              <a:srgbClr val="C55A11"/>
+            </a:solidFill>
+            <a:tailEnd type="triangle"/>
+          </a:ln>
+        </p:spPr>
+        <p:style>
+          <a:lnRef idx="2">
+            <a:schemeClr val="accent1"/>
+          </a:lnRef>
+          <a:fillRef idx="0">
+            <a:schemeClr val="accent1"/>
+          </a:fillRef>
+          <a:effectRef idx="1">
+            <a:schemeClr val="accent1"/>
+          </a:effectRef>
+          <a:fontRef idx="minor">
+            <a:schemeClr val="tx1"/>
+          </a:fontRef>
+        </p:style>
+      </p:cxnSp>
+      <p:sp>
+        <p:nvSpPr>
+          <p:cNvPr id="62" name="TextBox 61"/>
+          <p:cNvSpPr txBox="1"/>
+          <p:nvPr/>
+        </p:nvSpPr>
+        <p:spPr>
+          <a:xfrm>
+            <a:off x="7223760" y="2615184"/>
+            <a:ext cx="1828800" cy="201168"/>
+          </a:xfrm>
+          <a:prstGeom prst="rect">
+            <a:avLst/>
+          </a:prstGeom>
+          <a:noFill/>
+        </p:spPr>
+        <p:txBody>
+          <a:bodyPr wrap="square" anchor="t" lIns="45720" rIns="45720" tIns="27432" bIns="27432">
+            <a:spAutoFit/>
+          </a:bodyPr>
+          <a:lstStyle/>
+          <a:p>
+            <a:pPr algn="l">
+              <a:spcAft>
+                <a:spcPts val="200"/>
+              </a:spcAft>
+            </a:pPr>
+            <a:r>
+              <a:rPr sz="750" b="0">
+                <a:solidFill>
+                  <a:srgbClr val="C55A11"/>
+                </a:solidFill>
+                <a:latin typeface="맑은 고딕"/>
+                <a:ea typeface="맑은 고딕"/>
+                <a:cs typeface="맑은 고딕"/>
+              </a:rPr>
+              <a:t>read × N (동기)</a:t>
+            </a:r>
+          </a:p>
+        </p:txBody>
+      </p:sp>
+      <p:sp>
+        <p:nvSpPr>
+          <p:cNvPr id="63" name="TextBox 62"/>
+          <p:cNvSpPr txBox="1"/>
+          <p:nvPr/>
+        </p:nvSpPr>
+        <p:spPr>
+          <a:xfrm>
+            <a:off x="10332720" y="2743200"/>
+            <a:ext cx="1645920" cy="731520"/>
+          </a:xfrm>
+          <a:prstGeom prst="rect">
+            <a:avLst/>
+          </a:prstGeom>
+          <a:noFill/>
+        </p:spPr>
+        <p:txBody>
+          <a:bodyPr wrap="square" anchor="t" lIns="45720" rIns="45720" tIns="27432" bIns="27432">
+            <a:spAutoFit/>
+          </a:bodyPr>
+          <a:lstStyle/>
+          <a:p>
+            <a:pPr algn="l">
+              <a:spcAft>
+                <a:spcPts val="100"/>
+              </a:spcAft>
+            </a:pPr>
+            <a:r>
+              <a:rPr sz="850" b="1">
                 <a:solidFill>
                   <a:srgbClr val="FF0000"/>
                 </a:solidFill>
@@ -10103,22 +13588,58 @@
                 <a:ea typeface="맑은 고딕"/>
                 <a:cs typeface="맑은 고딕"/>
               </a:rPr>
-              <a:t>재계산 위치는 Query와 무관하게 결정된 값</a:t>
+              <a:t>서빙 경로에는 SR만 남음</a:t>
+            </a:r>
+          </a:p>
+          <a:p>
+            <a:pPr algn="l">
+              <a:spcAft>
+                <a:spcPts val="100"/>
+              </a:spcAft>
+            </a:pPr>
+            <a:r>
+              <a:rPr sz="850" b="0">
+                <a:solidFill>
+                  <a:srgbClr val="404040"/>
+                </a:solidFill>
+                <a:latin typeface="맑은 고딕"/>
+                <a:ea typeface="맑은 고딕"/>
+                <a:cs typeface="맑은 고딕"/>
+              </a:rPr>
+              <a:t>대표 Query 기반 → 정확도 근사</a:t>
+            </a:r>
+          </a:p>
+          <a:p>
+            <a:pPr algn="l">
+              <a:spcAft>
+                <a:spcPts val="100"/>
+              </a:spcAft>
+            </a:pPr>
+            <a:r>
+              <a:rPr sz="850" b="0">
+                <a:solidFill>
+                  <a:srgbClr val="404040"/>
+                </a:solidFill>
+                <a:latin typeface="맑은 고딕"/>
+                <a:ea typeface="맑은 고딕"/>
+                <a:cs typeface="맑은 고딕"/>
+              </a:rPr>
+              <a:t>version · validity 필요 [제안]</a:t>
             </a:r>
           </a:p>
         </p:txBody>
       </p:sp>
       <p:graphicFrame>
         <p:nvGraphicFramePr>
-          <p:cNvPr id="83" name="Table 82"/>
+          <p:cNvPr id="64" name="Table 63"/>
           <p:cNvGraphicFramePr>
             <a:graphicFrameLocks noGrp="1"/>
           </p:cNvGraphicFramePr>
           <p:nvPr/>
         </p:nvGraphicFramePr>
         <p:xfrm>
-          <a:off x="246888" y="5559552"/>
-          <a:ext cx="11750040" cy="768096"/>
+          <a:off x="246888" y="4114800"/>
+          <a:ext cx="11750039" cy="2194560"/>
         </p:xfrm>
         <a:graphic>
           <a:graphicData uri="http://schemas.openxmlformats.org/drawingml/2006/table">
@@ -10127,11 +13648,12 @@
                 <a:tableStyleId>{2D5ABB26-0587-4C30-8999-92F81FD0307C}</a:tableStyleId>
               </a:tblPr>
               <a:tblGrid>
-                <a:gridCol w="1325880"/>
-                <a:gridCol w="5212080"/>
-                <a:gridCol w="5212080"/>
+                <a:gridCol w="2468880"/>
+                <a:gridCol w="3749039"/>
+                <a:gridCol w="4526280"/>
+                <a:gridCol w="1005840"/>
               </a:tblGrid>
-              <a:tr h="256032">
+              <a:tr h="274320">
                 <a:tc>
                   <a:txBody>
                     <a:bodyPr wrap="square"/>
@@ -10143,7 +13665,7 @@
                         </a:spcAft>
                       </a:pPr>
                       <a:r>
-                        <a:rPr sz="900" b="0">
+                        <a:rPr sz="1050" b="0">
                           <a:solidFill>
                             <a:srgbClr val="7F7F7F"/>
                           </a:solidFill>
@@ -10151,7 +13673,997 @@
                           <a:ea typeface="맑은 고딕"/>
                           <a:cs typeface="맑은 고딕"/>
                         </a:rPr>
-                        <a:t>결합 방식 (Connector)</a:t>
+                        <a:t>Pipe로는 어려운 것</a:t>
+                      </a:r>
+                    </a:p>
+                  </a:txBody>
+                  <a:tcPr marL="64008" marR="64008" marT="27432" marB="27432" anchor="ctr">
+                    <a:lnL w="6350">
+                      <a:solidFill>
+                        <a:srgbClr val="BFBFBF"/>
+                      </a:solidFill>
+                    </a:lnL>
+                    <a:lnR w="6350">
+                      <a:solidFill>
+                        <a:srgbClr val="BFBFBF"/>
+                      </a:solidFill>
+                    </a:lnR>
+                    <a:lnT w="6350">
+                      <a:solidFill>
+                        <a:srgbClr val="BFBFBF"/>
+                      </a:solidFill>
+                    </a:lnT>
+                    <a:lnB w="6350">
+                      <a:solidFill>
+                        <a:srgbClr val="BFBFBF"/>
+                      </a:solidFill>
+                    </a:lnB>
+                    <a:solidFill>
+                      <a:srgbClr val="FFFFFF"/>
+                    </a:solidFill>
+                  </a:tcPr>
+                </a:tc>
+                <a:tc>
+                  <a:txBody>
+                    <a:bodyPr wrap="square"/>
+                    <a:lstStyle/>
+                    <a:p>
+                      <a:pPr algn="ctr">
+                        <a:spcAft>
+                          <a:spcPts val="100"/>
+                        </a:spcAft>
+                      </a:pPr>
+                      <a:r>
+                        <a:rPr sz="1050" b="1">
+                          <a:solidFill>
+                            <a:srgbClr val="7F7F7F"/>
+                          </a:solidFill>
+                          <a:latin typeface="맑은 고딕"/>
+                          <a:ea typeface="맑은 고딕"/>
+                          <a:cs typeface="맑은 고딕"/>
+                        </a:rPr>
+                        <a:t>1안 Pipe-and-Filter</a:t>
+                      </a:r>
+                    </a:p>
+                  </a:txBody>
+                  <a:tcPr marL="64008" marR="64008" marT="27432" marB="27432" anchor="ctr">
+                    <a:lnL w="6350">
+                      <a:solidFill>
+                        <a:srgbClr val="BFBFBF"/>
+                      </a:solidFill>
+                    </a:lnL>
+                    <a:lnR w="6350">
+                      <a:solidFill>
+                        <a:srgbClr val="BFBFBF"/>
+                      </a:solidFill>
+                    </a:lnR>
+                    <a:lnT w="6350">
+                      <a:solidFill>
+                        <a:srgbClr val="BFBFBF"/>
+                      </a:solidFill>
+                    </a:lnT>
+                    <a:lnB w="6350">
+                      <a:solidFill>
+                        <a:srgbClr val="BFBFBF"/>
+                      </a:solidFill>
+                    </a:lnB>
+                    <a:solidFill>
+                      <a:srgbClr val="FFFFFF"/>
+                    </a:solidFill>
+                  </a:tcPr>
+                </a:tc>
+                <a:tc>
+                  <a:txBody>
+                    <a:bodyPr wrap="square"/>
+                    <a:lstStyle/>
+                    <a:p>
+                      <a:pPr algn="ctr">
+                        <a:spcAft>
+                          <a:spcPts val="100"/>
+                        </a:spcAft>
+                      </a:pPr>
+                      <a:r>
+                        <a:rPr sz="1050" b="1">
+                          <a:solidFill>
+                            <a:srgbClr val="7F7F7F"/>
+                          </a:solidFill>
+                          <a:latin typeface="맑은 고딕"/>
+                          <a:ea typeface="맑은 고딕"/>
+                          <a:cs typeface="맑은 고딕"/>
+                        </a:rPr>
+                        <a:t>2안 Repository</a:t>
+                      </a:r>
+                    </a:p>
+                  </a:txBody>
+                  <a:tcPr marL="64008" marR="64008" marT="27432" marB="27432" anchor="ctr">
+                    <a:lnL w="6350">
+                      <a:solidFill>
+                        <a:srgbClr val="BFBFBF"/>
+                      </a:solidFill>
+                    </a:lnL>
+                    <a:lnR w="6350">
+                      <a:solidFill>
+                        <a:srgbClr val="BFBFBF"/>
+                      </a:solidFill>
+                    </a:lnR>
+                    <a:lnT w="6350">
+                      <a:solidFill>
+                        <a:srgbClr val="BFBFBF"/>
+                      </a:solidFill>
+                    </a:lnT>
+                    <a:lnB w="6350">
+                      <a:solidFill>
+                        <a:srgbClr val="BFBFBF"/>
+                      </a:solidFill>
+                    </a:lnB>
+                    <a:solidFill>
+                      <a:srgbClr val="FFFFFF"/>
+                    </a:solidFill>
+                  </a:tcPr>
+                </a:tc>
+                <a:tc>
+                  <a:txBody>
+                    <a:bodyPr wrap="square"/>
+                    <a:lstStyle/>
+                    <a:p>
+                      <a:pPr algn="ctr">
+                        <a:spcAft>
+                          <a:spcPts val="100"/>
+                        </a:spcAft>
+                      </a:pPr>
+                      <a:r>
+                        <a:rPr sz="1050" b="1">
+                          <a:solidFill>
+                            <a:srgbClr val="7F7F7F"/>
+                          </a:solidFill>
+                          <a:latin typeface="맑은 고딕"/>
+                          <a:ea typeface="맑은 고딕"/>
+                          <a:cs typeface="맑은 고딕"/>
+                        </a:rPr>
+                        <a:t>관련 QA</a:t>
+                      </a:r>
+                    </a:p>
+                  </a:txBody>
+                  <a:tcPr marL="64008" marR="64008" marT="27432" marB="27432" anchor="ctr">
+                    <a:lnL w="6350">
+                      <a:solidFill>
+                        <a:srgbClr val="BFBFBF"/>
+                      </a:solidFill>
+                    </a:lnL>
+                    <a:lnR w="6350">
+                      <a:solidFill>
+                        <a:srgbClr val="BFBFBF"/>
+                      </a:solidFill>
+                    </a:lnR>
+                    <a:lnT w="6350">
+                      <a:solidFill>
+                        <a:srgbClr val="BFBFBF"/>
+                      </a:solidFill>
+                    </a:lnT>
+                    <a:lnB w="6350">
+                      <a:solidFill>
+                        <a:srgbClr val="BFBFBF"/>
+                      </a:solidFill>
+                    </a:lnB>
+                    <a:solidFill>
+                      <a:srgbClr val="FFFFFF"/>
+                    </a:solidFill>
+                  </a:tcPr>
+                </a:tc>
+              </a:tr>
+              <a:tr h="384048">
+                <a:tc>
+                  <a:txBody>
+                    <a:bodyPr wrap="square"/>
+                    <a:lstStyle/>
+                    <a:p>
+                      <a:pPr algn="ctr">
+                        <a:spcAft>
+                          <a:spcPts val="100"/>
+                        </a:spcAft>
+                      </a:pPr>
+                      <a:r>
+                        <a:rPr sz="950" b="0">
+                          <a:solidFill>
+                            <a:srgbClr val="7F7F7F"/>
+                          </a:solidFill>
+                          <a:latin typeface="맑은 고딕"/>
+                          <a:ea typeface="맑은 고딕"/>
+                          <a:cs typeface="맑은 고딕"/>
+                        </a:rPr>
+                        <a:t>① 요청 간 재사용 (1회 생산 · N회 소비)</a:t>
+                      </a:r>
+                    </a:p>
+                  </a:txBody>
+                  <a:tcPr marL="64008" marR="64008" marT="27432" marB="27432" anchor="ctr">
+                    <a:lnL w="6350">
+                      <a:solidFill>
+                        <a:srgbClr val="BFBFBF"/>
+                      </a:solidFill>
+                    </a:lnL>
+                    <a:lnR w="6350">
+                      <a:solidFill>
+                        <a:srgbClr val="BFBFBF"/>
+                      </a:solidFill>
+                    </a:lnR>
+                    <a:lnT w="6350">
+                      <a:solidFill>
+                        <a:srgbClr val="BFBFBF"/>
+                      </a:solidFill>
+                    </a:lnT>
+                    <a:lnB w="6350">
+                      <a:solidFill>
+                        <a:srgbClr val="BFBFBF"/>
+                      </a:solidFill>
+                    </a:lnB>
+                    <a:solidFill>
+                      <a:srgbClr val="FFFFFF"/>
+                    </a:solidFill>
+                  </a:tcPr>
+                </a:tc>
+                <a:tc>
+                  <a:txBody>
+                    <a:bodyPr wrap="square"/>
+                    <a:lstStyle/>
+                    <a:p>
+                      <a:pPr>
+                        <a:spcAft>
+                          <a:spcPts val="100"/>
+                        </a:spcAft>
+                      </a:pPr>
+                      <a:r>
+                        <a:rPr sz="950" b="0">
+                          <a:solidFill>
+                            <a:srgbClr val="000000"/>
+                          </a:solidFill>
+                          <a:latin typeface="맑은 고딕"/>
+                          <a:ea typeface="맑은 고딕"/>
+                          <a:cs typeface="맑은 고딕"/>
+                        </a:rPr>
+                        <a:t>Pipe는 요청 범위에서만 존재 → 요청마다 attention · 선정 재실행</a:t>
+                      </a:r>
+                    </a:p>
+                  </a:txBody>
+                  <a:tcPr marL="64008" marR="64008" marT="27432" marB="27432" anchor="ctr">
+                    <a:lnL w="6350">
+                      <a:solidFill>
+                        <a:srgbClr val="BFBFBF"/>
+                      </a:solidFill>
+                    </a:lnL>
+                    <a:lnR w="6350">
+                      <a:solidFill>
+                        <a:srgbClr val="BFBFBF"/>
+                      </a:solidFill>
+                    </a:lnR>
+                    <a:lnT w="6350">
+                      <a:solidFill>
+                        <a:srgbClr val="BFBFBF"/>
+                      </a:solidFill>
+                    </a:lnT>
+                    <a:lnB w="6350">
+                      <a:solidFill>
+                        <a:srgbClr val="BFBFBF"/>
+                      </a:solidFill>
+                    </a:lnB>
+                    <a:solidFill>
+                      <a:srgbClr val="FFFFFF"/>
+                    </a:solidFill>
+                  </a:tcPr>
+                </a:tc>
+                <a:tc>
+                  <a:txBody>
+                    <a:bodyPr wrap="square"/>
+                    <a:lstStyle/>
+                    <a:p>
+                      <a:pPr>
+                        <a:spcAft>
+                          <a:spcPts val="100"/>
+                        </a:spcAft>
+                      </a:pPr>
+                      <a:r>
+                        <a:rPr sz="950" b="0">
+                          <a:solidFill>
+                            <a:srgbClr val="000000"/>
+                          </a:solidFill>
+                          <a:latin typeface="맑은 고딕"/>
+                          <a:ea typeface="맑은 고딕"/>
+                          <a:cs typeface="맑은 고딕"/>
+                        </a:rPr>
+                        <a:t>재계산 위치를 1회 write, 모든 요청이 read</a:t>
+                      </a:r>
+                    </a:p>
+                  </a:txBody>
+                  <a:tcPr marL="64008" marR="64008" marT="27432" marB="27432" anchor="ctr">
+                    <a:lnL w="6350">
+                      <a:solidFill>
+                        <a:srgbClr val="BFBFBF"/>
+                      </a:solidFill>
+                    </a:lnL>
+                    <a:lnR w="6350">
+                      <a:solidFill>
+                        <a:srgbClr val="BFBFBF"/>
+                      </a:solidFill>
+                    </a:lnR>
+                    <a:lnT w="6350">
+                      <a:solidFill>
+                        <a:srgbClr val="BFBFBF"/>
+                      </a:solidFill>
+                    </a:lnT>
+                    <a:lnB w="6350">
+                      <a:solidFill>
+                        <a:srgbClr val="BFBFBF"/>
+                      </a:solidFill>
+                    </a:lnB>
+                    <a:solidFill>
+                      <a:srgbClr val="FFFFFF"/>
+                    </a:solidFill>
+                  </a:tcPr>
+                </a:tc>
+                <a:tc>
+                  <a:txBody>
+                    <a:bodyPr wrap="square"/>
+                    <a:lstStyle/>
+                    <a:p>
+                      <a:pPr>
+                        <a:spcAft>
+                          <a:spcPts val="100"/>
+                        </a:spcAft>
+                      </a:pPr>
+                      <a:r>
+                        <a:rPr sz="950" b="0">
+                          <a:solidFill>
+                            <a:srgbClr val="000000"/>
+                          </a:solidFill>
+                          <a:latin typeface="맑은 고딕"/>
+                          <a:ea typeface="맑은 고딕"/>
+                          <a:cs typeface="맑은 고딕"/>
+                        </a:rPr>
+                        <a:t>QA1</a:t>
+                      </a:r>
+                    </a:p>
+                  </a:txBody>
+                  <a:tcPr marL="64008" marR="64008" marT="27432" marB="27432" anchor="ctr">
+                    <a:lnL w="6350">
+                      <a:solidFill>
+                        <a:srgbClr val="BFBFBF"/>
+                      </a:solidFill>
+                    </a:lnL>
+                    <a:lnR w="6350">
+                      <a:solidFill>
+                        <a:srgbClr val="BFBFBF"/>
+                      </a:solidFill>
+                    </a:lnR>
+                    <a:lnT w="6350">
+                      <a:solidFill>
+                        <a:srgbClr val="BFBFBF"/>
+                      </a:solidFill>
+                    </a:lnT>
+                    <a:lnB w="6350">
+                      <a:solidFill>
+                        <a:srgbClr val="BFBFBF"/>
+                      </a:solidFill>
+                    </a:lnB>
+                    <a:solidFill>
+                      <a:srgbClr val="FFFFFF"/>
+                    </a:solidFill>
+                  </a:tcPr>
+                </a:tc>
+              </a:tr>
+              <a:tr h="384048">
+                <a:tc>
+                  <a:txBody>
+                    <a:bodyPr wrap="square"/>
+                    <a:lstStyle/>
+                    <a:p>
+                      <a:pPr algn="ctr">
+                        <a:spcAft>
+                          <a:spcPts val="100"/>
+                        </a:spcAft>
+                      </a:pPr>
+                      <a:r>
+                        <a:rPr sz="950" b="0">
+                          <a:solidFill>
+                            <a:srgbClr val="7F7F7F"/>
+                          </a:solidFill>
+                          <a:latin typeface="맑은 고딕"/>
+                          <a:ea typeface="맑은 고딕"/>
+                          <a:cs typeface="맑은 고딕"/>
+                        </a:rPr>
+                        <a:t>② 서빙 경로에서 분석 필터 제거</a:t>
+                      </a:r>
+                    </a:p>
+                  </a:txBody>
+                  <a:tcPr marL="64008" marR="64008" marT="27432" marB="27432" anchor="ctr">
+                    <a:lnL w="6350">
+                      <a:solidFill>
+                        <a:srgbClr val="BFBFBF"/>
+                      </a:solidFill>
+                    </a:lnL>
+                    <a:lnR w="6350">
+                      <a:solidFill>
+                        <a:srgbClr val="BFBFBF"/>
+                      </a:solidFill>
+                    </a:lnR>
+                    <a:lnT w="6350">
+                      <a:solidFill>
+                        <a:srgbClr val="BFBFBF"/>
+                      </a:solidFill>
+                    </a:lnT>
+                    <a:lnB w="6350">
+                      <a:solidFill>
+                        <a:srgbClr val="BFBFBF"/>
+                      </a:solidFill>
+                    </a:lnB>
+                    <a:solidFill>
+                      <a:srgbClr val="FFFFFF"/>
+                    </a:solidFill>
+                  </a:tcPr>
+                </a:tc>
+                <a:tc>
+                  <a:txBody>
+                    <a:bodyPr wrap="square"/>
+                    <a:lstStyle/>
+                    <a:p>
+                      <a:pPr>
+                        <a:spcAft>
+                          <a:spcPts val="100"/>
+                        </a:spcAft>
+                      </a:pPr>
+                      <a:r>
+                        <a:rPr sz="950" b="0">
+                          <a:solidFill>
+                            <a:srgbClr val="000000"/>
+                          </a:solidFill>
+                          <a:latin typeface="맑은 고딕"/>
+                          <a:ea typeface="맑은 고딕"/>
+                          <a:cs typeface="맑은 고딕"/>
+                        </a:rPr>
+                        <a:t>AM · KVS · RTS가 모두 서빙 경로에 직렬</a:t>
+                      </a:r>
+                    </a:p>
+                  </a:txBody>
+                  <a:tcPr marL="64008" marR="64008" marT="27432" marB="27432" anchor="ctr">
+                    <a:lnL w="6350">
+                      <a:solidFill>
+                        <a:srgbClr val="BFBFBF"/>
+                      </a:solidFill>
+                    </a:lnL>
+                    <a:lnR w="6350">
+                      <a:solidFill>
+                        <a:srgbClr val="BFBFBF"/>
+                      </a:solidFill>
+                    </a:lnR>
+                    <a:lnT w="6350">
+                      <a:solidFill>
+                        <a:srgbClr val="BFBFBF"/>
+                      </a:solidFill>
+                    </a:lnT>
+                    <a:lnB w="6350">
+                      <a:solidFill>
+                        <a:srgbClr val="BFBFBF"/>
+                      </a:solidFill>
+                    </a:lnB>
+                    <a:solidFill>
+                      <a:srgbClr val="FFFFFF"/>
+                    </a:solidFill>
+                  </a:tcPr>
+                </a:tc>
+                <a:tc>
+                  <a:txBody>
+                    <a:bodyPr wrap="square"/>
+                    <a:lstStyle/>
+                    <a:p>
+                      <a:pPr>
+                        <a:spcAft>
+                          <a:spcPts val="100"/>
+                        </a:spcAft>
+                      </a:pPr>
+                      <a:r>
+                        <a:rPr sz="950" b="0">
+                          <a:solidFill>
+                            <a:srgbClr val="000000"/>
+                          </a:solidFill>
+                          <a:latin typeface="맑은 고딕"/>
+                          <a:ea typeface="맑은 고딕"/>
+                          <a:cs typeface="맑은 고딕"/>
+                        </a:rPr>
+                        <a:t>3개 필터가 사전으로 이동, 서빙에는 SR만 남음</a:t>
+                      </a:r>
+                    </a:p>
+                  </a:txBody>
+                  <a:tcPr marL="64008" marR="64008" marT="27432" marB="27432" anchor="ctr">
+                    <a:lnL w="6350">
+                      <a:solidFill>
+                        <a:srgbClr val="BFBFBF"/>
+                      </a:solidFill>
+                    </a:lnL>
+                    <a:lnR w="6350">
+                      <a:solidFill>
+                        <a:srgbClr val="BFBFBF"/>
+                      </a:solidFill>
+                    </a:lnR>
+                    <a:lnT w="6350">
+                      <a:solidFill>
+                        <a:srgbClr val="BFBFBF"/>
+                      </a:solidFill>
+                    </a:lnT>
+                    <a:lnB w="6350">
+                      <a:solidFill>
+                        <a:srgbClr val="BFBFBF"/>
+                      </a:solidFill>
+                    </a:lnB>
+                    <a:solidFill>
+                      <a:srgbClr val="FFFFFF"/>
+                    </a:solidFill>
+                  </a:tcPr>
+                </a:tc>
+                <a:tc>
+                  <a:txBody>
+                    <a:bodyPr wrap="square"/>
+                    <a:lstStyle/>
+                    <a:p>
+                      <a:pPr>
+                        <a:spcAft>
+                          <a:spcPts val="100"/>
+                        </a:spcAft>
+                      </a:pPr>
+                      <a:r>
+                        <a:rPr sz="950" b="0">
+                          <a:solidFill>
+                            <a:srgbClr val="000000"/>
+                          </a:solidFill>
+                          <a:latin typeface="맑은 고딕"/>
+                          <a:ea typeface="맑은 고딕"/>
+                          <a:cs typeface="맑은 고딕"/>
+                        </a:rPr>
+                        <a:t>QA1</a:t>
+                      </a:r>
+                    </a:p>
+                  </a:txBody>
+                  <a:tcPr marL="64008" marR="64008" marT="27432" marB="27432" anchor="ctr">
+                    <a:lnL w="6350">
+                      <a:solidFill>
+                        <a:srgbClr val="BFBFBF"/>
+                      </a:solidFill>
+                    </a:lnL>
+                    <a:lnR w="6350">
+                      <a:solidFill>
+                        <a:srgbClr val="BFBFBF"/>
+                      </a:solidFill>
+                    </a:lnR>
+                    <a:lnT w="6350">
+                      <a:solidFill>
+                        <a:srgbClr val="BFBFBF"/>
+                      </a:solidFill>
+                    </a:lnT>
+                    <a:lnB w="6350">
+                      <a:solidFill>
+                        <a:srgbClr val="BFBFBF"/>
+                      </a:solidFill>
+                    </a:lnB>
+                    <a:solidFill>
+                      <a:srgbClr val="FFFFFF"/>
+                    </a:solidFill>
+                  </a:tcPr>
+                </a:tc>
+              </a:tr>
+              <a:tr h="384048">
+                <a:tc>
+                  <a:txBody>
+                    <a:bodyPr wrap="square"/>
+                    <a:lstStyle/>
+                    <a:p>
+                      <a:pPr algn="ctr">
+                        <a:spcAft>
+                          <a:spcPts val="100"/>
+                        </a:spcAft>
+                      </a:pPr>
+                      <a:r>
+                        <a:rPr sz="950" b="0">
+                          <a:solidFill>
+                            <a:srgbClr val="7F7F7F"/>
+                          </a:solidFill>
+                          <a:latin typeface="맑은 고딕"/>
+                          <a:ea typeface="맑은 고딕"/>
+                          <a:cs typeface="맑은 고딕"/>
+                        </a:rPr>
+                        <a:t>③ 키 기반 조회</a:t>
+                      </a:r>
+                    </a:p>
+                  </a:txBody>
+                  <a:tcPr marL="64008" marR="64008" marT="27432" marB="27432" anchor="ctr">
+                    <a:lnL w="6350">
+                      <a:solidFill>
+                        <a:srgbClr val="BFBFBF"/>
+                      </a:solidFill>
+                    </a:lnL>
+                    <a:lnR w="6350">
+                      <a:solidFill>
+                        <a:srgbClr val="BFBFBF"/>
+                      </a:solidFill>
+                    </a:lnR>
+                    <a:lnT w="6350">
+                      <a:solidFill>
+                        <a:srgbClr val="BFBFBF"/>
+                      </a:solidFill>
+                    </a:lnT>
+                    <a:lnB w="6350">
+                      <a:solidFill>
+                        <a:srgbClr val="BFBFBF"/>
+                      </a:solidFill>
+                    </a:lnB>
+                    <a:solidFill>
+                      <a:srgbClr val="FFFFFF"/>
+                    </a:solidFill>
+                  </a:tcPr>
+                </a:tc>
+                <a:tc>
+                  <a:txBody>
+                    <a:bodyPr wrap="square"/>
+                    <a:lstStyle/>
+                    <a:p>
+                      <a:pPr>
+                        <a:spcAft>
+                          <a:spcPts val="100"/>
+                        </a:spcAft>
+                      </a:pPr>
+                      <a:r>
+                        <a:rPr sz="950" b="0">
+                          <a:solidFill>
+                            <a:srgbClr val="000000"/>
+                          </a:solidFill>
+                          <a:latin typeface="맑은 고딕"/>
+                          <a:ea typeface="맑은 고딕"/>
+                          <a:cs typeface="맑은 고딕"/>
+                        </a:rPr>
+                        <a:t>순차 스트림이라 소비 순서가 고정</a:t>
+                      </a:r>
+                    </a:p>
+                  </a:txBody>
+                  <a:tcPr marL="64008" marR="64008" marT="27432" marB="27432" anchor="ctr">
+                    <a:lnL w="6350">
+                      <a:solidFill>
+                        <a:srgbClr val="BFBFBF"/>
+                      </a:solidFill>
+                    </a:lnL>
+                    <a:lnR w="6350">
+                      <a:solidFill>
+                        <a:srgbClr val="BFBFBF"/>
+                      </a:solidFill>
+                    </a:lnR>
+                    <a:lnT w="6350">
+                      <a:solidFill>
+                        <a:srgbClr val="BFBFBF"/>
+                      </a:solidFill>
+                    </a:lnT>
+                    <a:lnB w="6350">
+                      <a:solidFill>
+                        <a:srgbClr val="BFBFBF"/>
+                      </a:solidFill>
+                    </a:lnB>
+                    <a:solidFill>
+                      <a:srgbClr val="FFFFFF"/>
+                    </a:solidFill>
+                  </a:tcPr>
+                </a:tc>
+                <a:tc>
+                  <a:txBody>
+                    <a:bodyPr wrap="square"/>
+                    <a:lstStyle/>
+                    <a:p>
+                      <a:pPr>
+                        <a:spcAft>
+                          <a:spcPts val="100"/>
+                        </a:spcAft>
+                      </a:pPr>
+                      <a:r>
+                        <a:rPr sz="950" b="0">
+                          <a:solidFill>
+                            <a:srgbClr val="000000"/>
+                          </a:solidFill>
+                          <a:latin typeface="맑은 고딕"/>
+                          <a:ea typeface="맑은 고딕"/>
+                          <a:cs typeface="맑은 고딕"/>
+                        </a:rPr>
+                        <a:t>KV · 워크로드 키로 조회</a:t>
+                      </a:r>
+                    </a:p>
+                  </a:txBody>
+                  <a:tcPr marL="64008" marR="64008" marT="27432" marB="27432" anchor="ctr">
+                    <a:lnL w="6350">
+                      <a:solidFill>
+                        <a:srgbClr val="BFBFBF"/>
+                      </a:solidFill>
+                    </a:lnL>
+                    <a:lnR w="6350">
+                      <a:solidFill>
+                        <a:srgbClr val="BFBFBF"/>
+                      </a:solidFill>
+                    </a:lnR>
+                    <a:lnT w="6350">
+                      <a:solidFill>
+                        <a:srgbClr val="BFBFBF"/>
+                      </a:solidFill>
+                    </a:lnT>
+                    <a:lnB w="6350">
+                      <a:solidFill>
+                        <a:srgbClr val="BFBFBF"/>
+                      </a:solidFill>
+                    </a:lnB>
+                    <a:solidFill>
+                      <a:srgbClr val="FFFFFF"/>
+                    </a:solidFill>
+                  </a:tcPr>
+                </a:tc>
+                <a:tc>
+                  <a:txBody>
+                    <a:bodyPr wrap="square"/>
+                    <a:lstStyle/>
+                    <a:p>
+                      <a:pPr>
+                        <a:spcAft>
+                          <a:spcPts val="100"/>
+                        </a:spcAft>
+                      </a:pPr>
+                      <a:r>
+                        <a:rPr sz="950" b="0">
+                          <a:solidFill>
+                            <a:srgbClr val="000000"/>
+                          </a:solidFill>
+                          <a:latin typeface="맑은 고딕"/>
+                          <a:ea typeface="맑은 고딕"/>
+                          <a:cs typeface="맑은 고딕"/>
+                        </a:rPr>
+                        <a:t>QA1</a:t>
+                      </a:r>
+                    </a:p>
+                  </a:txBody>
+                  <a:tcPr marL="64008" marR="64008" marT="27432" marB="27432" anchor="ctr">
+                    <a:lnL w="6350">
+                      <a:solidFill>
+                        <a:srgbClr val="BFBFBF"/>
+                      </a:solidFill>
+                    </a:lnL>
+                    <a:lnR w="6350">
+                      <a:solidFill>
+                        <a:srgbClr val="BFBFBF"/>
+                      </a:solidFill>
+                    </a:lnR>
+                    <a:lnT w="6350">
+                      <a:solidFill>
+                        <a:srgbClr val="BFBFBF"/>
+                      </a:solidFill>
+                    </a:lnT>
+                    <a:lnB w="6350">
+                      <a:solidFill>
+                        <a:srgbClr val="BFBFBF"/>
+                      </a:solidFill>
+                    </a:lnB>
+                    <a:solidFill>
+                      <a:srgbClr val="FFFFFF"/>
+                    </a:solidFill>
+                  </a:tcPr>
+                </a:tc>
+              </a:tr>
+              <a:tr h="384048">
+                <a:tc>
+                  <a:txBody>
+                    <a:bodyPr wrap="square"/>
+                    <a:lstStyle/>
+                    <a:p>
+                      <a:pPr algn="ctr">
+                        <a:spcAft>
+                          <a:spcPts val="100"/>
+                        </a:spcAft>
+                      </a:pPr>
+                      <a:r>
+                        <a:rPr sz="950" b="0">
+                          <a:solidFill>
+                            <a:srgbClr val="7F7F7F"/>
+                          </a:solidFill>
+                          <a:latin typeface="맑은 고딕"/>
+                          <a:ea typeface="맑은 고딕"/>
+                          <a:cs typeface="맑은 고딕"/>
+                        </a:rPr>
+                        <a:t>④ 생산 · 소비의 독립 실행</a:t>
+                      </a:r>
+                    </a:p>
+                  </a:txBody>
+                  <a:tcPr marL="64008" marR="64008" marT="27432" marB="27432" anchor="ctr">
+                    <a:lnL w="6350">
+                      <a:solidFill>
+                        <a:srgbClr val="BFBFBF"/>
+                      </a:solidFill>
+                    </a:lnL>
+                    <a:lnR w="6350">
+                      <a:solidFill>
+                        <a:srgbClr val="BFBFBF"/>
+                      </a:solidFill>
+                    </a:lnR>
+                    <a:lnT w="6350">
+                      <a:solidFill>
+                        <a:srgbClr val="BFBFBF"/>
+                      </a:solidFill>
+                    </a:lnT>
+                    <a:lnB w="6350">
+                      <a:solidFill>
+                        <a:srgbClr val="BFBFBF"/>
+                      </a:solidFill>
+                    </a:lnB>
+                    <a:solidFill>
+                      <a:srgbClr val="FFFFFF"/>
+                    </a:solidFill>
+                  </a:tcPr>
+                </a:tc>
+                <a:tc>
+                  <a:txBody>
+                    <a:bodyPr wrap="square"/>
+                    <a:lstStyle/>
+                    <a:p>
+                      <a:pPr>
+                        <a:spcAft>
+                          <a:spcPts val="100"/>
+                        </a:spcAft>
+                      </a:pPr>
+                      <a:r>
+                        <a:rPr sz="950" b="0">
+                          <a:solidFill>
+                            <a:srgbClr val="000000"/>
+                          </a:solidFill>
+                          <a:latin typeface="맑은 고딕"/>
+                          <a:ea typeface="맑은 고딕"/>
+                          <a:cs typeface="맑은 고딕"/>
+                        </a:rPr>
+                        <a:t>생산자와 소비자가 같은 실행 흐름에 결합</a:t>
+                      </a:r>
+                    </a:p>
+                  </a:txBody>
+                  <a:tcPr marL="64008" marR="64008" marT="27432" marB="27432" anchor="ctr">
+                    <a:lnL w="6350">
+                      <a:solidFill>
+                        <a:srgbClr val="BFBFBF"/>
+                      </a:solidFill>
+                    </a:lnL>
+                    <a:lnR w="6350">
+                      <a:solidFill>
+                        <a:srgbClr val="BFBFBF"/>
+                      </a:solidFill>
+                    </a:lnR>
+                    <a:lnT w="6350">
+                      <a:solidFill>
+                        <a:srgbClr val="BFBFBF"/>
+                      </a:solidFill>
+                    </a:lnT>
+                    <a:lnB w="6350">
+                      <a:solidFill>
+                        <a:srgbClr val="BFBFBF"/>
+                      </a:solidFill>
+                    </a:lnB>
+                    <a:solidFill>
+                      <a:srgbClr val="FFFFFF"/>
+                    </a:solidFill>
+                  </a:tcPr>
+                </a:tc>
+                <a:tc>
+                  <a:txBody>
+                    <a:bodyPr wrap="square"/>
+                    <a:lstStyle/>
+                    <a:p>
+                      <a:pPr>
+                        <a:spcAft>
+                          <a:spcPts val="100"/>
+                        </a:spcAft>
+                      </a:pPr>
+                      <a:r>
+                        <a:rPr sz="950" b="0">
+                          <a:solidFill>
+                            <a:srgbClr val="000000"/>
+                          </a:solidFill>
+                          <a:latin typeface="맑은 고딕"/>
+                          <a:ea typeface="맑은 고딕"/>
+                          <a:cs typeface="맑은 고딕"/>
+                        </a:rPr>
+                        <a:t>KV 변경 시 해당 분석만 재실행, 새 소비자 추가 가능 [제안]</a:t>
+                      </a:r>
+                    </a:p>
+                  </a:txBody>
+                  <a:tcPr marL="64008" marR="64008" marT="27432" marB="27432" anchor="ctr">
+                    <a:lnL w="6350">
+                      <a:solidFill>
+                        <a:srgbClr val="BFBFBF"/>
+                      </a:solidFill>
+                    </a:lnL>
+                    <a:lnR w="6350">
+                      <a:solidFill>
+                        <a:srgbClr val="BFBFBF"/>
+                      </a:solidFill>
+                    </a:lnR>
+                    <a:lnT w="6350">
+                      <a:solidFill>
+                        <a:srgbClr val="BFBFBF"/>
+                      </a:solidFill>
+                    </a:lnT>
+                    <a:lnB w="6350">
+                      <a:solidFill>
+                        <a:srgbClr val="BFBFBF"/>
+                      </a:solidFill>
+                    </a:lnB>
+                    <a:solidFill>
+                      <a:srgbClr val="FFFFFF"/>
+                    </a:solidFill>
+                  </a:tcPr>
+                </a:tc>
+                <a:tc>
+                  <a:txBody>
+                    <a:bodyPr wrap="square"/>
+                    <a:lstStyle/>
+                    <a:p>
+                      <a:pPr>
+                        <a:spcAft>
+                          <a:spcPts val="100"/>
+                        </a:spcAft>
+                      </a:pPr>
+                      <a:r>
+                        <a:rPr sz="950" b="0">
+                          <a:solidFill>
+                            <a:srgbClr val="000000"/>
+                          </a:solidFill>
+                          <a:latin typeface="맑은 고딕"/>
+                          <a:ea typeface="맑은 고딕"/>
+                          <a:cs typeface="맑은 고딕"/>
+                        </a:rPr>
+                        <a:t>QA1 · QA2</a:t>
+                      </a:r>
+                    </a:p>
+                  </a:txBody>
+                  <a:tcPr marL="64008" marR="64008" marT="27432" marB="27432" anchor="ctr">
+                    <a:lnL w="6350">
+                      <a:solidFill>
+                        <a:srgbClr val="BFBFBF"/>
+                      </a:solidFill>
+                    </a:lnL>
+                    <a:lnR w="6350">
+                      <a:solidFill>
+                        <a:srgbClr val="BFBFBF"/>
+                      </a:solidFill>
+                    </a:lnR>
+                    <a:lnT w="6350">
+                      <a:solidFill>
+                        <a:srgbClr val="BFBFBF"/>
+                      </a:solidFill>
+                    </a:lnT>
+                    <a:lnB w="6350">
+                      <a:solidFill>
+                        <a:srgbClr val="BFBFBF"/>
+                      </a:solidFill>
+                    </a:lnB>
+                    <a:solidFill>
+                      <a:srgbClr val="FFFFFF"/>
+                    </a:solidFill>
+                  </a:tcPr>
+                </a:tc>
+              </a:tr>
+              <a:tr h="384048">
+                <a:tc>
+                  <a:txBody>
+                    <a:bodyPr wrap="square"/>
+                    <a:lstStyle/>
+                    <a:p>
+                      <a:pPr algn="ctr">
+                        <a:spcAft>
+                          <a:spcPts val="100"/>
+                        </a:spcAft>
+                      </a:pPr>
+                      <a:r>
+                        <a:rPr sz="950" b="0">
+                          <a:solidFill>
+                            <a:srgbClr val="7F7F7F"/>
+                          </a:solidFill>
+                          <a:latin typeface="맑은 고딕"/>
+                          <a:ea typeface="맑은 고딕"/>
+                          <a:cs typeface="맑은 고딕"/>
+                        </a:rPr>
+                        <a:t>⑤ 반대로 1안이 나은 점</a:t>
                       </a:r>
                     </a:p>
                   </a:txBody>
@@ -10192,7 +14704,7 @@
                         </a:spcAft>
                       </a:pPr>
                       <a:r>
-                        <a:rPr sz="900" b="0">
+                        <a:rPr sz="950" b="0">
                           <a:solidFill>
                             <a:srgbClr val="000000"/>
                           </a:solidFill>
@@ -10200,107 +14712,7 @@
                           <a:ea typeface="맑은 고딕"/>
                           <a:cs typeface="맑은 고딕"/>
                         </a:rPr>
-                        <a:t>Pipe : Filter 간 데이터 스트림 전달, 단방향</a:t>
-                      </a:r>
-                    </a:p>
-                  </a:txBody>
-                  <a:tcPr marL="64008" marR="64008" marT="27432" marB="27432" anchor="ctr">
-                    <a:lnL w="6350">
-                      <a:solidFill>
-                        <a:srgbClr val="BFBFBF"/>
-                      </a:solidFill>
-                    </a:lnL>
-                    <a:lnR w="6350">
-                      <a:solidFill>
-                        <a:srgbClr val="BFBFBF"/>
-                      </a:solidFill>
-                    </a:lnR>
-                    <a:lnT w="6350">
-                      <a:solidFill>
-                        <a:srgbClr val="BFBFBF"/>
-                      </a:solidFill>
-                    </a:lnT>
-                    <a:lnB w="6350">
-                      <a:solidFill>
-                        <a:srgbClr val="BFBFBF"/>
-                      </a:solidFill>
-                    </a:lnB>
-                    <a:solidFill>
-                      <a:srgbClr val="FFFFFF"/>
-                    </a:solidFill>
-                  </a:tcPr>
-                </a:tc>
-                <a:tc>
-                  <a:txBody>
-                    <a:bodyPr wrap="square"/>
-                    <a:lstStyle/>
-                    <a:p>
-                      <a:pPr>
-                        <a:spcAft>
-                          <a:spcPts val="100"/>
-                        </a:spcAft>
-                      </a:pPr>
-                      <a:r>
-                        <a:rPr sz="900" b="0">
-                          <a:solidFill>
-                            <a:srgbClr val="000000"/>
-                          </a:solidFill>
-                          <a:latin typeface="맑은 고딕"/>
-                          <a:ea typeface="맑은 고딕"/>
-                          <a:cs typeface="맑은 고딕"/>
-                        </a:rPr>
-                        <a:t>Repository : 공유 저장소 경유 write(사전, 비동기) / read(서빙, 동기)</a:t>
-                      </a:r>
-                    </a:p>
-                  </a:txBody>
-                  <a:tcPr marL="64008" marR="64008" marT="27432" marB="27432" anchor="ctr">
-                    <a:lnL w="6350">
-                      <a:solidFill>
-                        <a:srgbClr val="BFBFBF"/>
-                      </a:solidFill>
-                    </a:lnL>
-                    <a:lnR w="6350">
-                      <a:solidFill>
-                        <a:srgbClr val="BFBFBF"/>
-                      </a:solidFill>
-                    </a:lnR>
-                    <a:lnT w="6350">
-                      <a:solidFill>
-                        <a:srgbClr val="BFBFBF"/>
-                      </a:solidFill>
-                    </a:lnT>
-                    <a:lnB w="6350">
-                      <a:solidFill>
-                        <a:srgbClr val="BFBFBF"/>
-                      </a:solidFill>
-                    </a:lnB>
-                    <a:solidFill>
-                      <a:srgbClr val="FFFFFF"/>
-                    </a:solidFill>
-                  </a:tcPr>
-                </a:tc>
-              </a:tr>
-              <a:tr h="256032">
-                <a:tc>
-                  <a:txBody>
-                    <a:bodyPr wrap="square"/>
-                    <a:lstStyle/>
-                    <a:p>
-                      <a:pPr algn="ctr">
-                        <a:spcAft>
-                          <a:spcPts val="100"/>
-                        </a:spcAft>
-                      </a:pPr>
-                      <a:r>
-                        <a:rPr sz="900" b="0">
-                          <a:solidFill>
-                            <a:srgbClr val="7F7F7F"/>
-                          </a:solidFill>
-                          <a:latin typeface="맑은 고딕"/>
-                          <a:ea typeface="맑은 고딕"/>
-                          <a:cs typeface="맑은 고딕"/>
-                        </a:rPr>
-                        <a:t>결정 시점</a:t>
+                        <a:t>실제 Query 반영, 파생 상태 없음 → 정합성</a:t>
                       </a:r>
                     </a:p>
                   </a:txBody>
@@ -10341,115 +14753,15 @@
                         </a:spcAft>
                       </a:pPr>
                       <a:r>
-                        <a:rPr sz="900" b="0">
+                        <a:rPr sz="950" b="0">
                           <a:solidFill>
-                            <a:srgbClr val="000000"/>
+                            <a:srgbClr val="FF0000"/>
                           </a:solidFill>
                           <a:latin typeface="맑은 고딕"/>
                           <a:ea typeface="맑은 고딕"/>
                           <a:cs typeface="맑은 고딕"/>
                         </a:rPr>
-                        <a:t>요청 시점 (Late Binding)</a:t>
-                      </a:r>
-                    </a:p>
-                  </a:txBody>
-                  <a:tcPr marL="64008" marR="64008" marT="27432" marB="27432" anchor="ctr">
-                    <a:lnL w="6350">
-                      <a:solidFill>
-                        <a:srgbClr val="BFBFBF"/>
-                      </a:solidFill>
-                    </a:lnL>
-                    <a:lnR w="6350">
-                      <a:solidFill>
-                        <a:srgbClr val="BFBFBF"/>
-                      </a:solidFill>
-                    </a:lnR>
-                    <a:lnT w="6350">
-                      <a:solidFill>
-                        <a:srgbClr val="BFBFBF"/>
-                      </a:solidFill>
-                    </a:lnT>
-                    <a:lnB w="6350">
-                      <a:solidFill>
-                        <a:srgbClr val="BFBFBF"/>
-                      </a:solidFill>
-                    </a:lnB>
-                    <a:solidFill>
-                      <a:srgbClr val="FFFFFF"/>
-                    </a:solidFill>
-                  </a:tcPr>
-                </a:tc>
-                <a:tc>
-                  <a:txBody>
-                    <a:bodyPr wrap="square"/>
-                    <a:lstStyle/>
-                    <a:p>
-                      <a:pPr>
-                        <a:spcAft>
-                          <a:spcPts val="100"/>
-                        </a:spcAft>
-                      </a:pPr>
-                      <a:r>
-                        <a:rPr sz="900" b="0">
-                          <a:solidFill>
-                            <a:srgbClr val="000000"/>
-                          </a:solidFill>
-                          <a:latin typeface="맑은 고딕"/>
-                          <a:ea typeface="맑은 고딕"/>
-                          <a:cs typeface="맑은 고딕"/>
-                        </a:rPr>
-                        <a:t>사전 (Early Binding), 서빙 시에는 조회만</a:t>
-                      </a:r>
-                    </a:p>
-                  </a:txBody>
-                  <a:tcPr marL="64008" marR="64008" marT="27432" marB="27432" anchor="ctr">
-                    <a:lnL w="6350">
-                      <a:solidFill>
-                        <a:srgbClr val="BFBFBF"/>
-                      </a:solidFill>
-                    </a:lnL>
-                    <a:lnR w="6350">
-                      <a:solidFill>
-                        <a:srgbClr val="BFBFBF"/>
-                      </a:solidFill>
-                    </a:lnR>
-                    <a:lnT w="6350">
-                      <a:solidFill>
-                        <a:srgbClr val="BFBFBF"/>
-                      </a:solidFill>
-                    </a:lnT>
-                    <a:lnB w="6350">
-                      <a:solidFill>
-                        <a:srgbClr val="BFBFBF"/>
-                      </a:solidFill>
-                    </a:lnB>
-                    <a:solidFill>
-                      <a:srgbClr val="FFFFFF"/>
-                    </a:solidFill>
-                  </a:tcPr>
-                </a:tc>
-              </a:tr>
-              <a:tr h="256032">
-                <a:tc>
-                  <a:txBody>
-                    <a:bodyPr wrap="square"/>
-                    <a:lstStyle/>
-                    <a:p>
-                      <a:pPr algn="ctr">
-                        <a:spcAft>
-                          <a:spcPts val="100"/>
-                        </a:spcAft>
-                      </a:pPr>
-                      <a:r>
-                        <a:rPr sz="900" b="0">
-                          <a:solidFill>
-                            <a:srgbClr val="7F7F7F"/>
-                          </a:solidFill>
-                          <a:latin typeface="맑은 고딕"/>
-                          <a:ea typeface="맑은 고딕"/>
-                          <a:cs typeface="맑은 고딕"/>
-                        </a:rPr>
-                        <a:t>파생 상태</a:t>
+                        <a:t>대표 Query 근사 → 부적합 시 정확도 저하, version · validity 필요</a:t>
                       </a:r>
                     </a:p>
                   </a:txBody>
@@ -10490,7 +14802,7 @@
                         </a:spcAft>
                       </a:pPr>
                       <a:r>
-                        <a:rPr sz="900" b="0">
+                        <a:rPr sz="950" b="0">
                           <a:solidFill>
                             <a:srgbClr val="000000"/>
                           </a:solidFill>
@@ -10498,7 +14810,7 @@
                           <a:ea typeface="맑은 고딕"/>
                           <a:cs typeface="맑은 고딕"/>
                         </a:rPr>
-                        <a:t>없음 — KV 원본만 보관</a:t>
+                        <a:t>QA5 · QA2</a:t>
                       </a:r>
                     </a:p>
                   </a:txBody>
@@ -10524,56 +14836,7 @@
                       </a:solidFill>
                     </a:lnB>
                     <a:solidFill>
-                      <a:srgbClr val="FFFFFF"/>
-                    </a:solidFill>
-                  </a:tcPr>
-                </a:tc>
-                <a:tc>
-                  <a:txBody>
-                    <a:bodyPr wrap="square"/>
-                    <a:lstStyle/>
-                    <a:p>
-                      <a:pPr>
-                        <a:spcAft>
-                          <a:spcPts val="100"/>
-                        </a:spcAft>
-                      </a:pPr>
-                      <a:r>
-                        <a:rPr sz="900" b="0">
-                          <a:solidFill>
-                            <a:srgbClr val="FF0000"/>
-                          </a:solidFill>
-                          <a:latin typeface="맑은 고딕"/>
-                          <a:ea typeface="맑은 고딕"/>
-                          <a:cs typeface="맑은 고딕"/>
-                        </a:rPr>
-                        <a:t>있음 — 재계산 위치 · 대표 Query (KV와 정합성 유지 필요)</a:t>
-                      </a:r>
-                    </a:p>
-                  </a:txBody>
-                  <a:tcPr marL="64008" marR="64008" marT="27432" marB="27432" anchor="ctr">
-                    <a:lnL w="6350">
-                      <a:solidFill>
-                        <a:srgbClr val="BFBFBF"/>
-                      </a:solidFill>
-                    </a:lnL>
-                    <a:lnR w="6350">
-                      <a:solidFill>
-                        <a:srgbClr val="BFBFBF"/>
-                      </a:solidFill>
-                    </a:lnR>
-                    <a:lnT w="6350">
-                      <a:solidFill>
-                        <a:srgbClr val="BFBFBF"/>
-                      </a:solidFill>
-                    </a:lnT>
-                    <a:lnB w="6350">
-                      <a:solidFill>
-                        <a:srgbClr val="BFBFBF"/>
-                      </a:solidFill>
-                    </a:lnB>
-                    <a:solidFill>
-                      <a:srgbClr val="FFFFFF"/>
+                      <a:srgbClr val="F2F2F2"/>
                     </a:solidFill>
                   </a:tcPr>
                 </a:tc>
@@ -10584,14 +14847,14 @@
       </p:graphicFrame>
       <p:sp>
         <p:nvSpPr>
-          <p:cNvPr id="84" name="TextBox 83"/>
+          <p:cNvPr id="65" name="TextBox 64"/>
           <p:cNvSpPr txBox="1"/>
           <p:nvPr/>
         </p:nvSpPr>
         <p:spPr>
           <a:xfrm>
             <a:off x="246888" y="6400800"/>
-            <a:ext cx="5029200" cy="201168"/>
+            <a:ext cx="5486400" cy="201168"/>
           </a:xfrm>
           <a:prstGeom prst="rect">
             <a:avLst/>
@@ -10618,14 +14881,14 @@
                 <a:ea typeface="맑은 고딕"/>
                 <a:cs typeface="맑은 고딕"/>
               </a:rPr>
-              <a:t>범례  ▭ 모듈  ━▶ 동기 data flow  ┅▶ 사전·비동기 write  노랑 점선 = 제안  [가설] = 평가 전</a:t>
-            </a:r>
-          </a:p>
-        </p:txBody>
-      </p:sp>
-      <p:sp>
-        <p:nvSpPr>
-          <p:cNvPr id="85" name="TextBox 84"/>
+              <a:t>회색 공통 · 파랑 1안 · 주황 2안 | AM Attention Mgr, KVS KV Sampler, RTS Token Selector, SR Selective Recomputer</a:t>
+            </a:r>
+          </a:p>
+        </p:txBody>
+      </p:sp>
+      <p:sp>
+        <p:nvSpPr>
+          <p:cNvPr id="66" name="TextBox 65"/>
           <p:cNvSpPr txBox="1"/>
           <p:nvPr/>
         </p:nvSpPr>
@@ -10659,7 +14922,7 @@
                 <a:ea typeface="맑은 고딕"/>
                 <a:cs typeface="맑은 고딕"/>
               </a:rPr>
-              <a:t>2</a:t>
+              <a:t>3</a:t>
             </a:r>
           </a:p>
         </p:txBody>
@@ -10672,7 +14935,7 @@
 </p:sld>
 </file>
 
-<file path=ppt/slides/slide3.xml><?xml version="1.0" encoding="utf-8"?>
+<file path=ppt/slides/slide4.xml><?xml version="1.0" encoding="utf-8"?>
 <p:sld xmlns:a="http://schemas.openxmlformats.org/drawingml/2006/main" xmlns:p="http://schemas.openxmlformats.org/presentationml/2006/main" xmlns:r="http://schemas.openxmlformats.org/officeDocument/2006/relationships">
   <p:cSld>
     <p:spTree>
@@ -12904,7 +17167,7 @@
                 <a:ea typeface="맑은 고딕"/>
                 <a:cs typeface="맑은 고딕"/>
               </a:rPr>
-              <a:t>3</a:t>
+              <a:t>4</a:t>
             </a:r>
           </a:p>
         </p:txBody>

--- a/doc-mk/slides/dp3-pipe-filter-vs-repository-structure.pptx
+++ b/doc-mk/slides/dp3-pipe-filter-vs-repository-structure.pptx
@@ -6706,14 +6706,66 @@
       </p:sp>
       <p:sp>
         <p:nvSpPr>
-          <p:cNvPr id="17" name="Rectangle 16"/>
+          <p:cNvPr id="17" name="TextBox 16"/>
+          <p:cNvSpPr txBox="1"/>
+          <p:nvPr/>
+        </p:nvSpPr>
+        <p:spPr>
+          <a:xfrm>
+            <a:off x="246888" y="1024128"/>
+            <a:ext cx="11704320" cy="274320"/>
+          </a:xfrm>
+          <a:prstGeom prst="rect">
+            <a:avLst/>
+          </a:prstGeom>
+          <a:noFill/>
+        </p:spPr>
+        <p:txBody>
+          <a:bodyPr wrap="square" anchor="t" lIns="45720" rIns="45720" tIns="27432" bIns="27432">
+            <a:spAutoFit/>
+          </a:bodyPr>
+          <a:lstStyle/>
+          <a:p>
+            <a:pPr algn="l">
+              <a:spcAft>
+                <a:spcPts val="200"/>
+              </a:spcAft>
+            </a:pPr>
+            <a:r>
+              <a:rPr sz="1050" b="1">
+                <a:solidFill>
+                  <a:srgbClr val="2E75B6"/>
+                </a:solidFill>
+                <a:latin typeface="맑은 고딕"/>
+                <a:ea typeface="맑은 고딕"/>
+                <a:cs typeface="맑은 고딕"/>
+              </a:rPr>
+              <a:t>1안 : </a:t>
+            </a:r>
+            <a:r>
+              <a:rPr sz="1050" b="1">
+                <a:solidFill>
+                  <a:srgbClr val="404040"/>
+                </a:solidFill>
+                <a:latin typeface="맑은 고딕"/>
+                <a:ea typeface="맑은 고딕"/>
+                <a:cs typeface="맑은 고딕"/>
+              </a:rPr>
+              <a:t>요청마다 무상태 필터가 Pipe로 데이터를 넘기며, 서빙 경로 안에서 재계산 토큰을 그때그때 선정하는 구조</a:t>
+            </a:r>
+          </a:p>
+        </p:txBody>
+      </p:sp>
+      <p:sp>
+        <p:nvSpPr>
+          <p:cNvPr id="18" name="Rectangle 17"/>
           <p:cNvSpPr/>
           <p:nvPr/>
         </p:nvSpPr>
         <p:spPr>
           <a:xfrm>
-            <a:off x="246888" y="1033271"/>
-            <a:ext cx="1280160" cy="201168"/>
+            <a:off x="9692640" y="2523744"/>
+            <a:ext cx="777240" cy="173736"/>
           </a:xfrm>
           <a:prstGeom prst="rect">
             <a:avLst/>
@@ -6752,7 +6804,7 @@
               </a:spcAft>
             </a:pPr>
             <a:r>
-              <a:rPr sz="800" b="1">
+              <a:rPr sz="750" b="1">
                 <a:solidFill>
                   <a:srgbClr val="000000"/>
                 </a:solidFill>
@@ -6760,21 +6812,21 @@
                 <a:ea typeface="맑은 고딕"/>
                 <a:cs typeface="맑은 고딕"/>
               </a:rPr>
-              <a:t>공통 모듈 · 연결</a:t>
-            </a:r>
-          </a:p>
-        </p:txBody>
-      </p:sp>
-      <p:sp>
-        <p:nvSpPr>
-          <p:cNvPr id="18" name="Rectangle 17"/>
+              <a:t>공통</a:t>
+            </a:r>
+          </a:p>
+        </p:txBody>
+      </p:sp>
+      <p:sp>
+        <p:nvSpPr>
+          <p:cNvPr id="19" name="Rectangle 18"/>
           <p:cNvSpPr/>
           <p:nvPr/>
         </p:nvSpPr>
         <p:spPr>
           <a:xfrm>
-            <a:off x="1618488" y="1033271"/>
-            <a:ext cx="1280160" cy="201168"/>
+            <a:off x="10515600" y="2523744"/>
+            <a:ext cx="777240" cy="173736"/>
           </a:xfrm>
           <a:prstGeom prst="rect">
             <a:avLst/>
@@ -6813,7 +6865,7 @@
               </a:spcAft>
             </a:pPr>
             <a:r>
-              <a:rPr sz="800" b="1">
+              <a:rPr sz="750" b="1">
                 <a:solidFill>
                   <a:srgbClr val="000000"/>
                 </a:solidFill>
@@ -6828,14 +6880,14 @@
       </p:sp>
       <p:sp>
         <p:nvSpPr>
-          <p:cNvPr id="19" name="Rectangle 18"/>
+          <p:cNvPr id="20" name="Rectangle 19"/>
           <p:cNvSpPr/>
           <p:nvPr/>
         </p:nvSpPr>
         <p:spPr>
           <a:xfrm>
-            <a:off x="2990088" y="1033271"/>
-            <a:ext cx="1280160" cy="201168"/>
+            <a:off x="9692640" y="2715768"/>
+            <a:ext cx="777240" cy="173736"/>
           </a:xfrm>
           <a:prstGeom prst="rect">
             <a:avLst/>
@@ -6874,7 +6926,7 @@
               </a:spcAft>
             </a:pPr>
             <a:r>
-              <a:rPr sz="800" b="1">
+              <a:rPr sz="750" b="1">
                 <a:solidFill>
                   <a:srgbClr val="000000"/>
                 </a:solidFill>
@@ -6889,14 +6941,14 @@
       </p:sp>
       <p:sp>
         <p:nvSpPr>
-          <p:cNvPr id="20" name="Rectangle 19"/>
+          <p:cNvPr id="21" name="Rectangle 20"/>
           <p:cNvSpPr/>
           <p:nvPr/>
         </p:nvSpPr>
         <p:spPr>
           <a:xfrm>
-            <a:off x="4361688" y="1033271"/>
-            <a:ext cx="1280160" cy="201168"/>
+            <a:off x="10515600" y="2715768"/>
+            <a:ext cx="777240" cy="173736"/>
           </a:xfrm>
           <a:prstGeom prst="rect">
             <a:avLst/>
@@ -6936,7 +6988,7 @@
               </a:spcAft>
             </a:pPr>
             <a:r>
-              <a:rPr sz="800" b="1">
+              <a:rPr sz="750" b="1">
                 <a:solidFill>
                   <a:srgbClr val="000000"/>
                 </a:solidFill>
@@ -6944,21 +6996,21 @@
                 <a:ea typeface="맑은 고딕"/>
                 <a:cs typeface="맑은 고딕"/>
               </a:rPr>
-              <a:t>제안 (신규 가정)</a:t>
-            </a:r>
-          </a:p>
-        </p:txBody>
-      </p:sp>
-      <p:sp>
-        <p:nvSpPr>
-          <p:cNvPr id="21" name="Rectangle 20"/>
+              <a:t>제안</a:t>
+            </a:r>
+          </a:p>
+        </p:txBody>
+      </p:sp>
+      <p:sp>
+        <p:nvSpPr>
+          <p:cNvPr id="22" name="Rectangle 21"/>
           <p:cNvSpPr/>
           <p:nvPr/>
         </p:nvSpPr>
         <p:spPr>
           <a:xfrm>
             <a:off x="246888" y="1325880"/>
-            <a:ext cx="914400" cy="1691640"/>
+            <a:ext cx="914400" cy="1572768"/>
           </a:xfrm>
           <a:prstGeom prst="rect">
             <a:avLst/>
@@ -7066,14 +7118,14 @@
       </p:sp>
       <p:sp>
         <p:nvSpPr>
-          <p:cNvPr id="22" name="Rectangle 21"/>
+          <p:cNvPr id="23" name="Rectangle 22"/>
           <p:cNvSpPr/>
           <p:nvPr/>
         </p:nvSpPr>
         <p:spPr>
           <a:xfrm>
             <a:off x="1234440" y="1325880"/>
-            <a:ext cx="10104120" cy="1097280"/>
+            <a:ext cx="10104120" cy="1024128"/>
           </a:xfrm>
           <a:prstGeom prst="rect">
             <a:avLst/>
@@ -7112,7 +7164,7 @@
       </p:sp>
       <p:sp>
         <p:nvSpPr>
-          <p:cNvPr id="23" name="TextBox 22"/>
+          <p:cNvPr id="24" name="TextBox 23"/>
           <p:cNvSpPr txBox="1"/>
           <p:nvPr/>
         </p:nvSpPr>
@@ -7153,7 +7205,7 @@
       </p:sp>
       <p:sp>
         <p:nvSpPr>
-          <p:cNvPr id="24" name="Rectangle 23"/>
+          <p:cNvPr id="25" name="Rectangle 24"/>
           <p:cNvSpPr/>
           <p:nvPr/>
         </p:nvSpPr>
@@ -7232,7 +7284,7 @@
       </p:sp>
       <p:sp>
         <p:nvSpPr>
-          <p:cNvPr id="25" name="Rectangle 24"/>
+          <p:cNvPr id="26" name="Rectangle 25"/>
           <p:cNvSpPr/>
           <p:nvPr/>
         </p:nvSpPr>
@@ -7311,7 +7363,7 @@
       </p:sp>
       <p:sp>
         <p:nvSpPr>
-          <p:cNvPr id="26" name="Rectangle 25"/>
+          <p:cNvPr id="27" name="Rectangle 26"/>
           <p:cNvSpPr/>
           <p:nvPr/>
         </p:nvSpPr>
@@ -7390,7 +7442,7 @@
       </p:sp>
       <p:sp>
         <p:nvSpPr>
-          <p:cNvPr id="27" name="Rectangle 26"/>
+          <p:cNvPr id="28" name="Rectangle 27"/>
           <p:cNvSpPr/>
           <p:nvPr/>
         </p:nvSpPr>
@@ -7469,7 +7521,7 @@
       </p:sp>
       <p:sp>
         <p:nvSpPr>
-          <p:cNvPr id="28" name="Rectangle 27"/>
+          <p:cNvPr id="29" name="Rectangle 28"/>
           <p:cNvSpPr/>
           <p:nvPr/>
         </p:nvSpPr>
@@ -7548,7 +7600,7 @@
       </p:sp>
       <p:sp>
         <p:nvSpPr>
-          <p:cNvPr id="29" name="Rectangle 28"/>
+          <p:cNvPr id="30" name="Rectangle 29"/>
           <p:cNvSpPr/>
           <p:nvPr/>
         </p:nvSpPr>
@@ -7627,7 +7679,7 @@
       </p:sp>
       <p:sp>
         <p:nvSpPr>
-          <p:cNvPr id="30" name="Rectangle 29"/>
+          <p:cNvPr id="31" name="Rectangle 30"/>
           <p:cNvSpPr/>
           <p:nvPr/>
         </p:nvSpPr>
@@ -7688,7 +7740,7 @@
       </p:sp>
       <p:cxnSp>
         <p:nvCxnSpPr>
-          <p:cNvPr id="31" name="Connector 30"/>
+          <p:cNvPr id="32" name="Connector 31"/>
           <p:cNvCxnSpPr/>
           <p:nvPr/>
         </p:nvCxnSpPr>
@@ -7724,7 +7776,7 @@
       </p:cxnSp>
       <p:sp>
         <p:nvSpPr>
-          <p:cNvPr id="32" name="TextBox 31"/>
+          <p:cNvPr id="33" name="TextBox 32"/>
           <p:cNvSpPr txBox="1"/>
           <p:nvPr/>
         </p:nvSpPr>
@@ -7765,7 +7817,7 @@
       </p:sp>
       <p:cxnSp>
         <p:nvCxnSpPr>
-          <p:cNvPr id="33" name="Connector 32"/>
+          <p:cNvPr id="34" name="Connector 33"/>
           <p:cNvCxnSpPr/>
           <p:nvPr/>
         </p:nvCxnSpPr>
@@ -7801,7 +7853,7 @@
       </p:cxnSp>
       <p:sp>
         <p:nvSpPr>
-          <p:cNvPr id="34" name="TextBox 33"/>
+          <p:cNvPr id="35" name="TextBox 34"/>
           <p:cNvSpPr txBox="1"/>
           <p:nvPr/>
         </p:nvSpPr>
@@ -7842,7 +7894,7 @@
       </p:sp>
       <p:cxnSp>
         <p:nvCxnSpPr>
-          <p:cNvPr id="35" name="Connector 34"/>
+          <p:cNvPr id="36" name="Connector 35"/>
           <p:cNvCxnSpPr/>
           <p:nvPr/>
         </p:nvCxnSpPr>
@@ -7878,7 +7930,7 @@
       </p:cxnSp>
       <p:sp>
         <p:nvSpPr>
-          <p:cNvPr id="36" name="TextBox 35"/>
+          <p:cNvPr id="37" name="TextBox 36"/>
           <p:cNvSpPr txBox="1"/>
           <p:nvPr/>
         </p:nvSpPr>
@@ -7919,7 +7971,7 @@
       </p:sp>
       <p:cxnSp>
         <p:nvCxnSpPr>
-          <p:cNvPr id="37" name="Connector 36"/>
+          <p:cNvPr id="38" name="Connector 37"/>
           <p:cNvCxnSpPr/>
           <p:nvPr/>
         </p:nvCxnSpPr>
@@ -7955,7 +8007,7 @@
       </p:cxnSp>
       <p:sp>
         <p:nvSpPr>
-          <p:cNvPr id="38" name="TextBox 37"/>
+          <p:cNvPr id="39" name="TextBox 38"/>
           <p:cNvSpPr txBox="1"/>
           <p:nvPr/>
         </p:nvSpPr>
@@ -7996,7 +8048,7 @@
       </p:sp>
       <p:cxnSp>
         <p:nvCxnSpPr>
-          <p:cNvPr id="39" name="Connector 38"/>
+          <p:cNvPr id="40" name="Connector 39"/>
           <p:cNvCxnSpPr/>
           <p:nvPr/>
         </p:nvCxnSpPr>
@@ -8032,7 +8084,7 @@
       </p:cxnSp>
       <p:sp>
         <p:nvSpPr>
-          <p:cNvPr id="40" name="TextBox 39"/>
+          <p:cNvPr id="41" name="TextBox 40"/>
           <p:cNvSpPr txBox="1"/>
           <p:nvPr/>
         </p:nvSpPr>
@@ -8073,13 +8125,13 @@
       </p:sp>
       <p:sp>
         <p:nvSpPr>
-          <p:cNvPr id="41" name="Rectangle 40"/>
+          <p:cNvPr id="42" name="Rectangle 41"/>
           <p:cNvSpPr/>
           <p:nvPr/>
         </p:nvSpPr>
         <p:spPr>
           <a:xfrm>
-            <a:off x="3063240" y="2697480"/>
+            <a:off x="3063240" y="2560320"/>
             <a:ext cx="6400800" cy="274320"/>
           </a:xfrm>
           <a:prstGeom prst="rect">
@@ -8134,13 +8186,13 @@
       </p:sp>
       <p:sp>
         <p:nvSpPr>
-          <p:cNvPr id="42" name="Rectangle 41"/>
+          <p:cNvPr id="43" name="Rectangle 42"/>
           <p:cNvSpPr/>
           <p:nvPr/>
         </p:nvSpPr>
         <p:spPr>
           <a:xfrm>
-            <a:off x="9144000" y="2606040"/>
+            <a:off x="9144000" y="2468880"/>
             <a:ext cx="384048" cy="182880"/>
           </a:xfrm>
           <a:prstGeom prst="rect">
@@ -8195,14 +8247,14 @@
       </p:sp>
       <p:cxnSp>
         <p:nvCxnSpPr>
-          <p:cNvPr id="43" name="Connector 42"/>
+          <p:cNvPr id="44" name="Connector 43"/>
           <p:cNvCxnSpPr/>
           <p:nvPr/>
         </p:nvCxnSpPr>
         <p:spPr>
           <a:xfrm flipV="1">
             <a:off x="3657600" y="2240280"/>
-            <a:ext cx="0" cy="457200"/>
+            <a:ext cx="0" cy="320040"/>
           </a:xfrm>
           <a:prstGeom prst="line">
             <a:avLst/>
@@ -8231,14 +8283,14 @@
       </p:cxnSp>
       <p:cxnSp>
         <p:nvCxnSpPr>
-          <p:cNvPr id="44" name="Connector 43"/>
+          <p:cNvPr id="45" name="Connector 44"/>
           <p:cNvCxnSpPr/>
           <p:nvPr/>
         </p:nvCxnSpPr>
         <p:spPr>
           <a:xfrm flipV="1">
             <a:off x="8869680" y="2240280"/>
-            <a:ext cx="0" cy="457200"/>
+            <a:ext cx="0" cy="320040"/>
           </a:xfrm>
           <a:prstGeom prst="line">
             <a:avLst/>
@@ -8267,13 +8319,13 @@
       </p:cxnSp>
       <p:sp>
         <p:nvSpPr>
-          <p:cNvPr id="45" name="TextBox 44"/>
+          <p:cNvPr id="46" name="TextBox 45"/>
           <p:cNvSpPr txBox="1"/>
           <p:nvPr/>
         </p:nvSpPr>
         <p:spPr>
           <a:xfrm>
-            <a:off x="3703320" y="2395728"/>
+            <a:off x="3703320" y="2359152"/>
             <a:ext cx="548640" cy="201168"/>
           </a:xfrm>
           <a:prstGeom prst="rect">
@@ -8308,13 +8360,13 @@
       </p:sp>
       <p:sp>
         <p:nvSpPr>
-          <p:cNvPr id="46" name="TextBox 45"/>
+          <p:cNvPr id="47" name="TextBox 46"/>
           <p:cNvSpPr txBox="1"/>
           <p:nvPr/>
         </p:nvSpPr>
         <p:spPr>
           <a:xfrm>
-            <a:off x="8915400" y="2395728"/>
+            <a:off x="8915400" y="2359152"/>
             <a:ext cx="548640" cy="201168"/>
           </a:xfrm>
           <a:prstGeom prst="rect">
@@ -8349,7 +8401,59 @@
       </p:sp>
       <p:sp>
         <p:nvSpPr>
-          <p:cNvPr id="47" name="Rectangle 46"/>
+          <p:cNvPr id="48" name="TextBox 47"/>
+          <p:cNvSpPr txBox="1"/>
+          <p:nvPr/>
+        </p:nvSpPr>
+        <p:spPr>
+          <a:xfrm>
+            <a:off x="246888" y="2916936"/>
+            <a:ext cx="11704320" cy="237744"/>
+          </a:xfrm>
+          <a:prstGeom prst="rect">
+            <a:avLst/>
+          </a:prstGeom>
+          <a:noFill/>
+        </p:spPr>
+        <p:txBody>
+          <a:bodyPr wrap="square" anchor="t" lIns="45720" rIns="45720" tIns="27432" bIns="27432">
+            <a:spAutoFit/>
+          </a:bodyPr>
+          <a:lstStyle/>
+          <a:p>
+            <a:pPr algn="l">
+              <a:spcAft>
+                <a:spcPts val="200"/>
+              </a:spcAft>
+            </a:pPr>
+            <a:r>
+              <a:rPr sz="1050" b="1">
+                <a:solidFill>
+                  <a:srgbClr val="C55A11"/>
+                </a:solidFill>
+                <a:latin typeface="맑은 고딕"/>
+                <a:ea typeface="맑은 고딕"/>
+                <a:cs typeface="맑은 고딕"/>
+              </a:rPr>
+              <a:t>2안 : </a:t>
+            </a:r>
+            <a:r>
+              <a:rPr sz="1050" b="1">
+                <a:solidFill>
+                  <a:srgbClr val="404040"/>
+                </a:solidFill>
+                <a:latin typeface="맑은 고딕"/>
+                <a:ea typeface="맑은 고딕"/>
+                <a:cs typeface="맑은 고딕"/>
+              </a:rPr>
+              <a:t>같은 체인을 사전에 1회 실행해 재계산 위치를 공유 KV Repository에 write하고, 서빙 경로는 read해 Selective Recomputer만 실행하는 구조</a:t>
+            </a:r>
+          </a:p>
+        </p:txBody>
+      </p:sp>
+      <p:sp>
+        <p:nvSpPr>
+          <p:cNvPr id="49" name="Rectangle 48"/>
           <p:cNvSpPr/>
           <p:nvPr/>
         </p:nvSpPr>
@@ -8482,7 +8586,7 @@
       </p:sp>
       <p:sp>
         <p:nvSpPr>
-          <p:cNvPr id="48" name="Rectangle 47"/>
+          <p:cNvPr id="50" name="Rectangle 49"/>
           <p:cNvSpPr/>
           <p:nvPr/>
         </p:nvSpPr>
@@ -8528,7 +8632,7 @@
       </p:sp>
       <p:sp>
         <p:nvSpPr>
-          <p:cNvPr id="49" name="TextBox 48"/>
+          <p:cNvPr id="51" name="TextBox 50"/>
           <p:cNvSpPr txBox="1"/>
           <p:nvPr/>
         </p:nvSpPr>
@@ -8569,7 +8673,7 @@
       </p:sp>
       <p:sp>
         <p:nvSpPr>
-          <p:cNvPr id="50" name="Rectangle 49"/>
+          <p:cNvPr id="52" name="Rectangle 51"/>
           <p:cNvSpPr/>
           <p:nvPr/>
         </p:nvSpPr>
@@ -8648,7 +8752,7 @@
       </p:sp>
       <p:sp>
         <p:nvSpPr>
-          <p:cNvPr id="51" name="Rectangle 50"/>
+          <p:cNvPr id="53" name="Rectangle 52"/>
           <p:cNvSpPr/>
           <p:nvPr/>
         </p:nvSpPr>
@@ -8727,7 +8831,7 @@
       </p:sp>
       <p:sp>
         <p:nvSpPr>
-          <p:cNvPr id="52" name="Rectangle 51"/>
+          <p:cNvPr id="54" name="Rectangle 53"/>
           <p:cNvSpPr/>
           <p:nvPr/>
         </p:nvSpPr>
@@ -8806,7 +8910,7 @@
       </p:sp>
       <p:sp>
         <p:nvSpPr>
-          <p:cNvPr id="53" name="Rectangle 52"/>
+          <p:cNvPr id="55" name="Rectangle 54"/>
           <p:cNvSpPr/>
           <p:nvPr/>
         </p:nvSpPr>
@@ -8885,7 +8989,7 @@
       </p:sp>
       <p:cxnSp>
         <p:nvCxnSpPr>
-          <p:cNvPr id="54" name="Connector 53"/>
+          <p:cNvPr id="56" name="Connector 55"/>
           <p:cNvCxnSpPr/>
           <p:nvPr/>
         </p:nvCxnSpPr>
@@ -8922,7 +9026,7 @@
       </p:cxnSp>
       <p:sp>
         <p:nvSpPr>
-          <p:cNvPr id="55" name="TextBox 54"/>
+          <p:cNvPr id="57" name="TextBox 56"/>
           <p:cNvSpPr txBox="1"/>
           <p:nvPr/>
         </p:nvSpPr>
@@ -8963,7 +9067,7 @@
       </p:sp>
       <p:cxnSp>
         <p:nvCxnSpPr>
-          <p:cNvPr id="56" name="Connector 55"/>
+          <p:cNvPr id="58" name="Connector 57"/>
           <p:cNvCxnSpPr/>
           <p:nvPr/>
         </p:nvCxnSpPr>
@@ -9000,7 +9104,7 @@
       </p:cxnSp>
       <p:sp>
         <p:nvSpPr>
-          <p:cNvPr id="57" name="TextBox 56"/>
+          <p:cNvPr id="59" name="TextBox 58"/>
           <p:cNvSpPr txBox="1"/>
           <p:nvPr/>
         </p:nvSpPr>
@@ -9041,7 +9145,7 @@
       </p:sp>
       <p:cxnSp>
         <p:nvCxnSpPr>
-          <p:cNvPr id="58" name="Connector 57"/>
+          <p:cNvPr id="60" name="Connector 59"/>
           <p:cNvCxnSpPr/>
           <p:nvPr/>
         </p:nvCxnSpPr>
@@ -9078,7 +9182,7 @@
       </p:cxnSp>
       <p:sp>
         <p:nvSpPr>
-          <p:cNvPr id="59" name="TextBox 58"/>
+          <p:cNvPr id="61" name="TextBox 60"/>
           <p:cNvSpPr txBox="1"/>
           <p:nvPr/>
         </p:nvSpPr>
@@ -9119,7 +9223,7 @@
       </p:sp>
       <p:sp>
         <p:nvSpPr>
-          <p:cNvPr id="60" name="Rectangle 59"/>
+          <p:cNvPr id="62" name="Rectangle 61"/>
           <p:cNvSpPr/>
           <p:nvPr/>
         </p:nvSpPr>
@@ -9165,7 +9269,7 @@
       </p:sp>
       <p:sp>
         <p:nvSpPr>
-          <p:cNvPr id="61" name="TextBox 60"/>
+          <p:cNvPr id="63" name="TextBox 62"/>
           <p:cNvSpPr txBox="1"/>
           <p:nvPr/>
         </p:nvSpPr>
@@ -9206,7 +9310,7 @@
       </p:sp>
       <p:sp>
         <p:nvSpPr>
-          <p:cNvPr id="62" name="Rectangle 61"/>
+          <p:cNvPr id="64" name="Rectangle 63"/>
           <p:cNvSpPr/>
           <p:nvPr/>
         </p:nvSpPr>
@@ -9285,7 +9389,7 @@
       </p:sp>
       <p:sp>
         <p:nvSpPr>
-          <p:cNvPr id="63" name="Rectangle 62"/>
+          <p:cNvPr id="65" name="Rectangle 64"/>
           <p:cNvSpPr/>
           <p:nvPr/>
         </p:nvSpPr>
@@ -9364,7 +9468,7 @@
       </p:sp>
       <p:sp>
         <p:nvSpPr>
-          <p:cNvPr id="64" name="Rectangle 63"/>
+          <p:cNvPr id="66" name="Rectangle 65"/>
           <p:cNvSpPr/>
           <p:nvPr/>
         </p:nvSpPr>
@@ -9426,7 +9530,7 @@
       </p:sp>
       <p:sp>
         <p:nvSpPr>
-          <p:cNvPr id="65" name="Rectangle 64"/>
+          <p:cNvPr id="67" name="Rectangle 66"/>
           <p:cNvSpPr/>
           <p:nvPr/>
         </p:nvSpPr>
@@ -9505,7 +9609,7 @@
       </p:sp>
       <p:cxnSp>
         <p:nvCxnSpPr>
-          <p:cNvPr id="66" name="Connector 65"/>
+          <p:cNvPr id="68" name="Connector 67"/>
           <p:cNvCxnSpPr/>
           <p:nvPr/>
         </p:nvCxnSpPr>
@@ -9542,7 +9646,7 @@
       </p:cxnSp>
       <p:sp>
         <p:nvSpPr>
-          <p:cNvPr id="67" name="TextBox 66"/>
+          <p:cNvPr id="69" name="TextBox 68"/>
           <p:cNvSpPr txBox="1"/>
           <p:nvPr/>
         </p:nvSpPr>
@@ -9583,7 +9687,7 @@
       </p:sp>
       <p:cxnSp>
         <p:nvCxnSpPr>
-          <p:cNvPr id="68" name="Connector 67"/>
+          <p:cNvPr id="70" name="Connector 69"/>
           <p:cNvCxnSpPr/>
           <p:nvPr/>
         </p:nvCxnSpPr>
@@ -9620,7 +9724,7 @@
       </p:cxnSp>
       <p:sp>
         <p:nvSpPr>
-          <p:cNvPr id="69" name="TextBox 68"/>
+          <p:cNvPr id="71" name="TextBox 70"/>
           <p:cNvSpPr txBox="1"/>
           <p:nvPr/>
         </p:nvSpPr>
@@ -9661,7 +9765,7 @@
       </p:sp>
       <p:cxnSp>
         <p:nvCxnSpPr>
-          <p:cNvPr id="70" name="Connector 69"/>
+          <p:cNvPr id="72" name="Connector 71"/>
           <p:cNvCxnSpPr/>
           <p:nvPr/>
         </p:nvCxnSpPr>
@@ -9697,7 +9801,7 @@
       </p:cxnSp>
       <p:sp>
         <p:nvSpPr>
-          <p:cNvPr id="71" name="TextBox 70"/>
+          <p:cNvPr id="73" name="TextBox 72"/>
           <p:cNvSpPr txBox="1"/>
           <p:nvPr/>
         </p:nvSpPr>
@@ -9738,7 +9842,7 @@
       </p:sp>
       <p:sp>
         <p:nvSpPr>
-          <p:cNvPr id="72" name="Rectangle 71"/>
+          <p:cNvPr id="74" name="Rectangle 73"/>
           <p:cNvSpPr/>
           <p:nvPr/>
         </p:nvSpPr>
@@ -9799,7 +9903,7 @@
       </p:sp>
       <p:sp>
         <p:nvSpPr>
-          <p:cNvPr id="73" name="Rectangle 72"/>
+          <p:cNvPr id="75" name="Rectangle 74"/>
           <p:cNvSpPr/>
           <p:nvPr/>
         </p:nvSpPr>
@@ -9845,7 +9949,7 @@
       </p:sp>
       <p:sp>
         <p:nvSpPr>
-          <p:cNvPr id="74" name="TextBox 73"/>
+          <p:cNvPr id="76" name="TextBox 75"/>
           <p:cNvSpPr txBox="1"/>
           <p:nvPr/>
         </p:nvSpPr>
@@ -9886,7 +9990,7 @@
       </p:sp>
       <p:sp>
         <p:nvSpPr>
-          <p:cNvPr id="75" name="Rectangle 74"/>
+          <p:cNvPr id="77" name="Rectangle 76"/>
           <p:cNvSpPr/>
           <p:nvPr/>
         </p:nvSpPr>
@@ -9965,7 +10069,7 @@
       </p:sp>
       <p:sp>
         <p:nvSpPr>
-          <p:cNvPr id="76" name="Rectangle 75"/>
+          <p:cNvPr id="78" name="Rectangle 77"/>
           <p:cNvSpPr/>
           <p:nvPr/>
         </p:nvSpPr>
@@ -10044,7 +10148,7 @@
       </p:sp>
       <p:sp>
         <p:nvSpPr>
-          <p:cNvPr id="77" name="Rectangle 76"/>
+          <p:cNvPr id="79" name="Rectangle 78"/>
           <p:cNvSpPr/>
           <p:nvPr/>
         </p:nvSpPr>
@@ -10123,7 +10227,7 @@
       </p:sp>
       <p:sp>
         <p:nvSpPr>
-          <p:cNvPr id="78" name="Rectangle 77"/>
+          <p:cNvPr id="80" name="Rectangle 79"/>
           <p:cNvSpPr/>
           <p:nvPr/>
         </p:nvSpPr>
@@ -10184,7 +10288,7 @@
       </p:sp>
       <p:cxnSp>
         <p:nvCxnSpPr>
-          <p:cNvPr id="79" name="Connector 78"/>
+          <p:cNvPr id="81" name="Connector 80"/>
           <p:cNvCxnSpPr/>
           <p:nvPr/>
         </p:nvCxnSpPr>
@@ -10220,7 +10324,7 @@
       </p:cxnSp>
       <p:cxnSp>
         <p:nvCxnSpPr>
-          <p:cNvPr id="80" name="Connector 79"/>
+          <p:cNvPr id="82" name="Connector 81"/>
           <p:cNvCxnSpPr/>
           <p:nvPr/>
         </p:nvCxnSpPr>
@@ -10256,7 +10360,7 @@
       </p:cxnSp>
       <p:cxnSp>
         <p:nvCxnSpPr>
-          <p:cNvPr id="81" name="Connector 80"/>
+          <p:cNvPr id="83" name="Connector 82"/>
           <p:cNvCxnSpPr/>
           <p:nvPr/>
         </p:nvCxnSpPr>
@@ -10292,7 +10396,7 @@
       </p:cxnSp>
       <p:sp>
         <p:nvSpPr>
-          <p:cNvPr id="82" name="TextBox 81"/>
+          <p:cNvPr id="84" name="TextBox 83"/>
           <p:cNvSpPr txBox="1"/>
           <p:nvPr/>
         </p:nvSpPr>
@@ -10333,7 +10437,7 @@
       </p:sp>
       <p:sp>
         <p:nvSpPr>
-          <p:cNvPr id="83" name="Right Arrow 82"/>
+          <p:cNvPr id="85" name="Right Arrow 84"/>
           <p:cNvSpPr/>
           <p:nvPr/>
         </p:nvSpPr>
@@ -10377,7 +10481,7 @@
       </p:sp>
       <p:sp>
         <p:nvSpPr>
-          <p:cNvPr id="84" name="TextBox 83"/>
+          <p:cNvPr id="86" name="TextBox 85"/>
           <p:cNvSpPr txBox="1"/>
           <p:nvPr/>
         </p:nvSpPr>
@@ -10436,7 +10540,7 @@
       </p:sp>
       <p:sp>
         <p:nvSpPr>
-          <p:cNvPr id="85" name="TextBox 84"/>
+          <p:cNvPr id="87" name="TextBox 86"/>
           <p:cNvSpPr txBox="1"/>
           <p:nvPr/>
         </p:nvSpPr>
